--- a/docs/Clg 2nd review.pptx
+++ b/docs/Clg 2nd review.pptx
@@ -213,7 +213,7 @@
           <a:p>
             <a:fld id="{C1BED7E8-5420-4F73-BA32-34A7030FE7D8}" type="datetimeFigureOut">
               <a:rPr lang="en-US" smtClean="0"/>
-              <a:t>4/6/2026</a:t>
+              <a:t>4/8/2026</a:t>
             </a:fld>
             <a:endParaRPr lang="en-US"/>
           </a:p>
@@ -2091,7 +2091,7 @@
           <a:p>
             <a:fld id="{C198EE3F-C531-4F47-81BE-EB7857D8F039}" type="datetimeFigureOut">
               <a:rPr lang="en-US" smtClean="0"/>
-              <a:t>4/6/2026</a:t>
+              <a:t>4/8/2026</a:t>
             </a:fld>
             <a:endParaRPr lang="en-US"/>
           </a:p>
@@ -2289,7 +2289,7 @@
           <a:p>
             <a:fld id="{C198EE3F-C531-4F47-81BE-EB7857D8F039}" type="datetimeFigureOut">
               <a:rPr lang="en-US" smtClean="0"/>
-              <a:t>4/6/2026</a:t>
+              <a:t>4/8/2026</a:t>
             </a:fld>
             <a:endParaRPr lang="en-US"/>
           </a:p>
@@ -2497,7 +2497,7 @@
           <a:p>
             <a:fld id="{C198EE3F-C531-4F47-81BE-EB7857D8F039}" type="datetimeFigureOut">
               <a:rPr lang="en-US" smtClean="0"/>
-              <a:t>4/6/2026</a:t>
+              <a:t>4/8/2026</a:t>
             </a:fld>
             <a:endParaRPr lang="en-US"/>
           </a:p>
@@ -2695,7 +2695,7 @@
           <a:p>
             <a:fld id="{C198EE3F-C531-4F47-81BE-EB7857D8F039}" type="datetimeFigureOut">
               <a:rPr lang="en-US" smtClean="0"/>
-              <a:t>4/6/2026</a:t>
+              <a:t>4/8/2026</a:t>
             </a:fld>
             <a:endParaRPr lang="en-US"/>
           </a:p>
@@ -2970,7 +2970,7 @@
           <a:p>
             <a:fld id="{C198EE3F-C531-4F47-81BE-EB7857D8F039}" type="datetimeFigureOut">
               <a:rPr lang="en-US" smtClean="0"/>
-              <a:t>4/6/2026</a:t>
+              <a:t>4/8/2026</a:t>
             </a:fld>
             <a:endParaRPr lang="en-US"/>
           </a:p>
@@ -3235,7 +3235,7 @@
           <a:p>
             <a:fld id="{C198EE3F-C531-4F47-81BE-EB7857D8F039}" type="datetimeFigureOut">
               <a:rPr lang="en-US" smtClean="0"/>
-              <a:t>4/6/2026</a:t>
+              <a:t>4/8/2026</a:t>
             </a:fld>
             <a:endParaRPr lang="en-US"/>
           </a:p>
@@ -3647,7 +3647,7 @@
           <a:p>
             <a:fld id="{C198EE3F-C531-4F47-81BE-EB7857D8F039}" type="datetimeFigureOut">
               <a:rPr lang="en-US" smtClean="0"/>
-              <a:t>4/6/2026</a:t>
+              <a:t>4/8/2026</a:t>
             </a:fld>
             <a:endParaRPr lang="en-US"/>
           </a:p>
@@ -3788,7 +3788,7 @@
           <a:p>
             <a:fld id="{C198EE3F-C531-4F47-81BE-EB7857D8F039}" type="datetimeFigureOut">
               <a:rPr lang="en-US" smtClean="0"/>
-              <a:t>4/6/2026</a:t>
+              <a:t>4/8/2026</a:t>
             </a:fld>
             <a:endParaRPr lang="en-US"/>
           </a:p>
@@ -3901,7 +3901,7 @@
           <a:p>
             <a:fld id="{C198EE3F-C531-4F47-81BE-EB7857D8F039}" type="datetimeFigureOut">
               <a:rPr lang="en-US" smtClean="0"/>
-              <a:t>4/6/2026</a:t>
+              <a:t>4/8/2026</a:t>
             </a:fld>
             <a:endParaRPr lang="en-US"/>
           </a:p>
@@ -4212,7 +4212,7 @@
           <a:p>
             <a:fld id="{C198EE3F-C531-4F47-81BE-EB7857D8F039}" type="datetimeFigureOut">
               <a:rPr lang="en-US" smtClean="0"/>
-              <a:t>4/6/2026</a:t>
+              <a:t>4/8/2026</a:t>
             </a:fld>
             <a:endParaRPr lang="en-US"/>
           </a:p>
@@ -4500,7 +4500,7 @@
           <a:p>
             <a:fld id="{C198EE3F-C531-4F47-81BE-EB7857D8F039}" type="datetimeFigureOut">
               <a:rPr lang="en-US" smtClean="0"/>
-              <a:t>4/6/2026</a:t>
+              <a:t>4/8/2026</a:t>
             </a:fld>
             <a:endParaRPr lang="en-US"/>
           </a:p>
@@ -4741,7 +4741,7 @@
           <a:p>
             <a:fld id="{C198EE3F-C531-4F47-81BE-EB7857D8F039}" type="datetimeFigureOut">
               <a:rPr lang="en-US" smtClean="0"/>
-              <a:t>4/6/2026</a:t>
+              <a:t>4/8/2026</a:t>
             </a:fld>
             <a:endParaRPr lang="en-US"/>
           </a:p>
@@ -6722,7 +6722,7 @@
         <p:spPr>
           <a:xfrm>
             <a:off x="265471" y="792624"/>
-            <a:ext cx="11661058" cy="4093428"/>
+            <a:ext cx="11661058" cy="4401205"/>
           </a:xfrm>
           <a:prstGeom prst="rect">
             <a:avLst/>
@@ -6744,7 +6744,7 @@
                 <a:latin typeface="Times New Roman" panose="02020603050405020304" pitchFamily="18" charset="0"/>
                 <a:cs typeface="Times New Roman" panose="02020603050405020304" pitchFamily="18" charset="0"/>
               </a:rPr>
-              <a:t>Reduces unexpected breakdowns by predicting potential failures in advance and enabling timely preventive maintenance actions.</a:t>
+              <a:t>Proactive Failure Prevention &amp; Asset Longevity: Reduces unexpected breakdowns and significantly increases equipment lifespan by continuously monitoring performance to detect early degradation and predict potential failures in advance.</a:t>
             </a:r>
           </a:p>
           <a:p>
@@ -6752,12 +6752,22 @@
               <a:buFont typeface="Wingdings" panose="05000000000000000000" pitchFamily="2" charset="2"/>
               <a:buChar char="Ø"/>
             </a:pPr>
+            <a:endParaRPr lang="en-US" sz="2000" dirty="0">
+              <a:latin typeface="Times New Roman" panose="02020603050405020304" pitchFamily="18" charset="0"/>
+              <a:cs typeface="Times New Roman" panose="02020603050405020304" pitchFamily="18" charset="0"/>
+            </a:endParaRPr>
+          </a:p>
+          <a:p>
+            <a:pPr marL="342900" indent="-342900" algn="just">
+              <a:buFont typeface="Wingdings" panose="05000000000000000000" pitchFamily="2" charset="2"/>
+              <a:buChar char="Ø"/>
+            </a:pPr>
             <a:r>
               <a:rPr lang="en-US" sz="2000" dirty="0">
                 <a:latin typeface="Times New Roman" panose="02020603050405020304" pitchFamily="18" charset="0"/>
                 <a:cs typeface="Times New Roman" panose="02020603050405020304" pitchFamily="18" charset="0"/>
               </a:rPr>
-              <a:t>Minimizes maintenance costs by shifting from reactive repairs to planned maintenance based on equipment condition.</a:t>
+              <a:t>Cost Optimization &amp; Operational Efficiency: Minimizes maintenance costs and improves overall efficiency by shifting from reactive repairs to planned, condition-based maintenance, optimizing schedules, and reducing production downtime.</a:t>
             </a:r>
           </a:p>
           <a:p>
@@ -6765,12 +6775,22 @@
               <a:buFont typeface="Wingdings" panose="05000000000000000000" pitchFamily="2" charset="2"/>
               <a:buChar char="Ø"/>
             </a:pPr>
+            <a:endParaRPr lang="en-US" sz="2000" dirty="0">
+              <a:latin typeface="Times New Roman" panose="02020603050405020304" pitchFamily="18" charset="0"/>
+              <a:cs typeface="Times New Roman" panose="02020603050405020304" pitchFamily="18" charset="0"/>
+            </a:endParaRPr>
+          </a:p>
+          <a:p>
+            <a:pPr marL="342900" indent="-342900" algn="just">
+              <a:buFont typeface="Wingdings" panose="05000000000000000000" pitchFamily="2" charset="2"/>
+              <a:buChar char="Ø"/>
+            </a:pPr>
             <a:r>
               <a:rPr lang="en-US" sz="2000" dirty="0">
                 <a:latin typeface="Times New Roman" panose="02020603050405020304" pitchFamily="18" charset="0"/>
                 <a:cs typeface="Times New Roman" panose="02020603050405020304" pitchFamily="18" charset="0"/>
               </a:rPr>
-              <a:t>Increases equipment lifespan through continuous monitoring and early detection of performance degradation.</a:t>
+              <a:t>Real-Time Monitoring &amp; Agile Decision-Making: Provides real-time visibility into vital equipment health parameters, enabling faster, data-driven decision-making and enhanced operational control.</a:t>
             </a:r>
           </a:p>
           <a:p>
@@ -6778,51 +6798,22 @@
               <a:buFont typeface="Wingdings" panose="05000000000000000000" pitchFamily="2" charset="2"/>
               <a:buChar char="Ø"/>
             </a:pPr>
+            <a:endParaRPr lang="en-US" sz="2000" dirty="0">
+              <a:latin typeface="Times New Roman" panose="02020603050405020304" pitchFamily="18" charset="0"/>
+              <a:cs typeface="Times New Roman" panose="02020603050405020304" pitchFamily="18" charset="0"/>
+            </a:endParaRPr>
+          </a:p>
+          <a:p>
+            <a:pPr marL="342900" indent="-342900" algn="just">
+              <a:buFont typeface="Wingdings" panose="05000000000000000000" pitchFamily="2" charset="2"/>
+              <a:buChar char="Ø"/>
+            </a:pPr>
             <a:r>
               <a:rPr lang="en-US" sz="2000" dirty="0">
                 <a:latin typeface="Times New Roman" panose="02020603050405020304" pitchFamily="18" charset="0"/>
                 <a:cs typeface="Times New Roman" panose="02020603050405020304" pitchFamily="18" charset="0"/>
               </a:rPr>
-              <a:t>Provides real-time monitoring of equipment health parameters for faster decision-making and operational control.</a:t>
-            </a:r>
-          </a:p>
-          <a:p>
-            <a:pPr marL="342900" indent="-342900" algn="just">
-              <a:buFont typeface="Wingdings" panose="05000000000000000000" pitchFamily="2" charset="2"/>
-              <a:buChar char="Ø"/>
-            </a:pPr>
-            <a:r>
-              <a:rPr lang="en-US" sz="2000" dirty="0">
-                <a:latin typeface="Times New Roman" panose="02020603050405020304" pitchFamily="18" charset="0"/>
-                <a:cs typeface="Times New Roman" panose="02020603050405020304" pitchFamily="18" charset="0"/>
-              </a:rPr>
-              <a:t>Ensures cloud scalability, allowing the system to handle increasing data volume and multiple equipment units efficiently.</a:t>
-            </a:r>
-          </a:p>
-          <a:p>
-            <a:pPr marL="342900" indent="-342900" algn="just">
-              <a:buFont typeface="Wingdings" panose="05000000000000000000" pitchFamily="2" charset="2"/>
-              <a:buChar char="Ø"/>
-            </a:pPr>
-            <a:r>
-              <a:rPr lang="en-US" sz="2000" dirty="0">
-                <a:latin typeface="Times New Roman" panose="02020603050405020304" pitchFamily="18" charset="0"/>
-                <a:cs typeface="Times New Roman" panose="02020603050405020304" pitchFamily="18" charset="0"/>
-              </a:rPr>
-              <a:t>Offers secure data storage with authentication and controlled access to protect sensitive operational information.</a:t>
-            </a:r>
-          </a:p>
-          <a:p>
-            <a:pPr marL="342900" indent="-342900" algn="just">
-              <a:buFont typeface="Wingdings" panose="05000000000000000000" pitchFamily="2" charset="2"/>
-              <a:buChar char="Ø"/>
-            </a:pPr>
-            <a:r>
-              <a:rPr lang="en-US" sz="2000" dirty="0">
-                <a:latin typeface="Times New Roman" panose="02020603050405020304" pitchFamily="18" charset="0"/>
-                <a:cs typeface="Times New Roman" panose="02020603050405020304" pitchFamily="18" charset="0"/>
-              </a:rPr>
-              <a:t>Improves overall operational efficiency by optimizing maintenance scheduling and reducing production downtime.</a:t>
+              <a:t>Scalable &amp; Secure Cloud Infrastructure: Leverages scalable cloud capabilities to efficiently handle increasing data volumes and multiple equipment units, while protecting sensitive operational information through secure data storage, authentication, and controlled access.</a:t>
             </a:r>
           </a:p>
         </p:txBody>
@@ -6935,7 +6926,7 @@
                 <a:latin typeface="Times New Roman" panose="02020603050405020304" pitchFamily="18" charset="0"/>
                 <a:cs typeface="Times New Roman" panose="02020603050405020304" pitchFamily="18" charset="0"/>
               </a:rPr>
-              <a:t>Requires accurate historical data to train the machine learning model effectively and ensure reliable failure predictions.</a:t>
+              <a:t>Data Quality &amp; Model Reliability: The effectiveness and accuracy of the machine learning model heavily depend on the quality of its training data; accurate, balanced historical data is essential to ensure reliable failure predictions.</a:t>
             </a:r>
           </a:p>
           <a:p>
@@ -6943,12 +6934,22 @@
               <a:buFont typeface="Wingdings" panose="05000000000000000000" pitchFamily="2" charset="2"/>
               <a:buChar char="Ø"/>
             </a:pPr>
+            <a:endParaRPr lang="en-US" sz="2000" dirty="0">
+              <a:latin typeface="Times New Roman" panose="02020603050405020304" pitchFamily="18" charset="0"/>
+              <a:cs typeface="Times New Roman" panose="02020603050405020304" pitchFamily="18" charset="0"/>
+            </a:endParaRPr>
+          </a:p>
+          <a:p>
+            <a:pPr marL="342900" indent="-342900" algn="just">
+              <a:buFont typeface="Wingdings" panose="05000000000000000000" pitchFamily="2" charset="2"/>
+              <a:buChar char="Ø"/>
+            </a:pPr>
             <a:r>
               <a:rPr lang="en-US" sz="2000" dirty="0">
                 <a:latin typeface="Times New Roman" panose="02020603050405020304" pitchFamily="18" charset="0"/>
                 <a:cs typeface="Times New Roman" panose="02020603050405020304" pitchFamily="18" charset="0"/>
               </a:rPr>
-              <a:t>Initial setup cost is high, as it involves cloud infrastructure configuration, system development, and model training.</a:t>
+              <a:t>High Initial Investment: Implementing the system involves significant upfront costs related to configuring cloud infrastructure, system development, and initial model training.</a:t>
             </a:r>
           </a:p>
           <a:p>
@@ -6956,12 +6957,22 @@
               <a:buFont typeface="Wingdings" panose="05000000000000000000" pitchFamily="2" charset="2"/>
               <a:buChar char="Ø"/>
             </a:pPr>
+            <a:endParaRPr lang="en-US" sz="2000" dirty="0">
+              <a:latin typeface="Times New Roman" panose="02020603050405020304" pitchFamily="18" charset="0"/>
+              <a:cs typeface="Times New Roman" panose="02020603050405020304" pitchFamily="18" charset="0"/>
+            </a:endParaRPr>
+          </a:p>
+          <a:p>
+            <a:pPr marL="342900" indent="-342900" algn="just">
+              <a:buFont typeface="Wingdings" panose="05000000000000000000" pitchFamily="2" charset="2"/>
+              <a:buChar char="Ø"/>
+            </a:pPr>
             <a:r>
               <a:rPr lang="en-US" sz="2000" dirty="0">
                 <a:latin typeface="Times New Roman" panose="02020603050405020304" pitchFamily="18" charset="0"/>
                 <a:cs typeface="Times New Roman" panose="02020603050405020304" pitchFamily="18" charset="0"/>
               </a:rPr>
-              <a:t>Model accuracy depends on training data quality, and poor or imbalanced data can reduce prediction performance.</a:t>
+              <a:t>Continuous Connectivity Requirement: The system strictly requires stable, uninterrupted internet connectivity to facilitate continuous cloud access, real-time monitoring, and seamless data synchronization.</a:t>
             </a:r>
           </a:p>
           <a:p>
@@ -6969,26 +6980,10 @@
               <a:buFont typeface="Wingdings" panose="05000000000000000000" pitchFamily="2" charset="2"/>
               <a:buChar char="Ø"/>
             </a:pPr>
-            <a:r>
-              <a:rPr lang="en-US" sz="2000" dirty="0">
-                <a:latin typeface="Times New Roman" panose="02020603050405020304" pitchFamily="18" charset="0"/>
-                <a:cs typeface="Times New Roman" panose="02020603050405020304" pitchFamily="18" charset="0"/>
-              </a:rPr>
-              <a:t>Requires stable internet connectivity for continuous cloud access, real-time monitoring, and data synchronization.</a:t>
-            </a:r>
-          </a:p>
-          <a:p>
-            <a:pPr marL="342900" indent="-342900" algn="just">
-              <a:buFont typeface="Wingdings" panose="05000000000000000000" pitchFamily="2" charset="2"/>
-              <a:buChar char="Ø"/>
-            </a:pPr>
-            <a:r>
-              <a:rPr lang="en-US" sz="2000" dirty="0">
-                <a:latin typeface="Times New Roman" panose="02020603050405020304" pitchFamily="18" charset="0"/>
-                <a:cs typeface="Times New Roman" panose="02020603050405020304" pitchFamily="18" charset="0"/>
-              </a:rPr>
-              <a:t>Needs periodic model retraining to adapt to new failure patterns, changing equipment behavior, and updated operational conditions.</a:t>
-            </a:r>
+            <a:endParaRPr lang="en-US" sz="2000" dirty="0">
+              <a:latin typeface="Times New Roman" panose="02020603050405020304" pitchFamily="18" charset="0"/>
+              <a:cs typeface="Times New Roman" panose="02020603050405020304" pitchFamily="18" charset="0"/>
+            </a:endParaRPr>
           </a:p>
         </p:txBody>
       </p:sp>
@@ -7729,7 +7724,7 @@
                 <a:latin typeface="Times New Roman" panose="02020603050405020304" pitchFamily="18" charset="0"/>
                 <a:cs typeface="Times New Roman" panose="02020603050405020304" pitchFamily="18" charset="0"/>
               </a:rPr>
-              <a:t>Unexpected equipment failures cause production loss, downtime, and high maintenance costs in many industries.</a:t>
+              <a:t>The Flaws of Reactive Maintenance: Heavy reliance on traditional maintenance—repairing equipment only after it fails—results in unexpected breakdowns, significant production losses, high repair costs, and increased safety risks.</a:t>
             </a:r>
           </a:p>
           <a:p>
@@ -7737,79 +7732,45 @@
               <a:buFont typeface="Wingdings" panose="05000000000000000000" pitchFamily="2" charset="2"/>
               <a:buChar char="ü"/>
             </a:pPr>
+            <a:endParaRPr lang="en-US" sz="2000" dirty="0">
+              <a:latin typeface="Times New Roman" panose="02020603050405020304" pitchFamily="18" charset="0"/>
+              <a:cs typeface="Times New Roman" panose="02020603050405020304" pitchFamily="18" charset="0"/>
+            </a:endParaRPr>
+          </a:p>
+          <a:p>
+            <a:pPr marL="342900" indent="-342900" algn="just">
+              <a:buFont typeface="Wingdings" panose="05000000000000000000" pitchFamily="2" charset="2"/>
+              <a:buChar char="ü"/>
+            </a:pPr>
             <a:r>
               <a:rPr lang="en-US" sz="2000" dirty="0">
                 <a:latin typeface="Times New Roman" panose="02020603050405020304" pitchFamily="18" charset="0"/>
                 <a:cs typeface="Times New Roman" panose="02020603050405020304" pitchFamily="18" charset="0"/>
               </a:rPr>
-              <a:t>Traditional maintenance happens after equipment fails. This causes production </a:t>
-            </a:r>
-            <a:r>
-              <a:rPr lang="en-US" sz="2000" dirty="0" err="1">
-                <a:latin typeface="Times New Roman" panose="02020603050405020304" pitchFamily="18" charset="0"/>
-                <a:cs typeface="Times New Roman" panose="02020603050405020304" pitchFamily="18" charset="0"/>
-              </a:rPr>
-              <a:t>loss,repair</a:t>
-            </a:r>
+              <a:t>Operational Bottlenecks Without Analytics: The absence of intelligent analytics makes it extremely difficult for industries to optimize their maintenance planning, efficiently allocate resources, and manage spare parts effectively.</a:t>
+            </a:r>
+          </a:p>
+          <a:p>
+            <a:pPr marL="342900" indent="-342900" algn="just">
+              <a:buFont typeface="Wingdings" panose="05000000000000000000" pitchFamily="2" charset="2"/>
+              <a:buChar char="ü"/>
+            </a:pPr>
+            <a:endParaRPr lang="en-US" sz="2000" dirty="0">
+              <a:latin typeface="Times New Roman" panose="02020603050405020304" pitchFamily="18" charset="0"/>
+              <a:cs typeface="Times New Roman" panose="02020603050405020304" pitchFamily="18" charset="0"/>
+            </a:endParaRPr>
+          </a:p>
+          <a:p>
+            <a:pPr marL="342900" indent="-342900" algn="just">
+              <a:buFont typeface="Wingdings" panose="05000000000000000000" pitchFamily="2" charset="2"/>
+              <a:buChar char="ü"/>
+            </a:pPr>
             <a:r>
               <a:rPr lang="en-US" sz="2000" dirty="0">
                 <a:latin typeface="Times New Roman" panose="02020603050405020304" pitchFamily="18" charset="0"/>
                 <a:cs typeface="Times New Roman" panose="02020603050405020304" pitchFamily="18" charset="0"/>
               </a:rPr>
-              <a:t> </a:t>
-            </a:r>
-            <a:r>
-              <a:rPr lang="en-US" sz="2000" dirty="0" err="1">
-                <a:latin typeface="Times New Roman" panose="02020603050405020304" pitchFamily="18" charset="0"/>
-                <a:cs typeface="Times New Roman" panose="02020603050405020304" pitchFamily="18" charset="0"/>
-              </a:rPr>
-              <a:t>cost,and</a:t>
-            </a:r>
-            <a:r>
-              <a:rPr lang="en-US" sz="2000" dirty="0">
-                <a:latin typeface="Times New Roman" panose="02020603050405020304" pitchFamily="18" charset="0"/>
-                <a:cs typeface="Times New Roman" panose="02020603050405020304" pitchFamily="18" charset="0"/>
-              </a:rPr>
-              <a:t> safety risk.</a:t>
-            </a:r>
-          </a:p>
-          <a:p>
-            <a:pPr marL="342900" indent="-342900" algn="just">
-              <a:buFont typeface="Wingdings" panose="05000000000000000000" pitchFamily="2" charset="2"/>
-              <a:buChar char="ü"/>
-            </a:pPr>
-            <a:r>
-              <a:rPr lang="en-US" sz="2000" dirty="0">
-                <a:latin typeface="Times New Roman" panose="02020603050405020304" pitchFamily="18" charset="0"/>
-                <a:cs typeface="Times New Roman" panose="02020603050405020304" pitchFamily="18" charset="0"/>
-              </a:rPr>
-              <a:t>A smart system that uses analytics and cloud computing to continuously monitor equipment health and anticipate failures early is required.</a:t>
-            </a:r>
-          </a:p>
-          <a:p>
-            <a:pPr marL="342900" indent="-342900" algn="just">
-              <a:buFont typeface="Wingdings" panose="05000000000000000000" pitchFamily="2" charset="2"/>
-              <a:buChar char="ü"/>
-            </a:pPr>
-            <a:r>
-              <a:rPr lang="en-US" sz="2000" dirty="0">
-                <a:latin typeface="Times New Roman" panose="02020603050405020304" pitchFamily="18" charset="0"/>
-                <a:cs typeface="Times New Roman" panose="02020603050405020304" pitchFamily="18" charset="0"/>
-              </a:rPr>
-              <a:t>Without intelligent analytics, industries struggle to optimize maintenance planning, resource allocation, and spare part management.</a:t>
-            </a:r>
-          </a:p>
-          <a:p>
-            <a:pPr marL="342900" indent="-342900" algn="just">
-              <a:buFont typeface="Wingdings" panose="05000000000000000000" pitchFamily="2" charset="2"/>
-              <a:buChar char="ü"/>
-            </a:pPr>
-            <a:r>
-              <a:rPr lang="en-US" sz="2000" dirty="0">
-                <a:latin typeface="Times New Roman" panose="02020603050405020304" pitchFamily="18" charset="0"/>
-                <a:cs typeface="Times New Roman" panose="02020603050405020304" pitchFamily="18" charset="0"/>
-              </a:rPr>
-              <a:t>The absence of centralized cloud-based data storage limits historical data analysis and prevents data-driven maintenance decision-making.</a:t>
+              <a:t>The Need for Proactive Systems: To prevent unexpected failures, industries require a smart system powered by cloud computing and analytics to continuously monitor equipment health and anticipate issues early.</a:t>
             </a:r>
           </a:p>
         </p:txBody>
@@ -7946,7 +7907,7 @@
         <p:spPr>
           <a:xfrm>
             <a:off x="265471" y="792624"/>
-            <a:ext cx="11661058" cy="4401205"/>
+            <a:ext cx="11661058" cy="3139321"/>
           </a:xfrm>
           <a:prstGeom prst="rect">
             <a:avLst/>
@@ -7959,94 +7920,85 @@
           </a:bodyPr>
           <a:lstStyle/>
           <a:p>
-            <a:pPr marL="342900" indent="-342900" algn="just">
+            <a:pPr marL="285750" indent="-285750" algn="just">
               <a:buFont typeface="Wingdings" panose="05000000000000000000" pitchFamily="2" charset="2"/>
               <a:buChar char="Ø"/>
             </a:pPr>
             <a:r>
-              <a:rPr lang="en-US" sz="2000" dirty="0">
-                <a:latin typeface="Times New Roman" panose="02020603050405020304" pitchFamily="18" charset="0"/>
-                <a:cs typeface="Times New Roman" panose="02020603050405020304" pitchFamily="18" charset="0"/>
-              </a:rPr>
-              <a:t>To develop a cloud-based predictive maintenance system that enables continuous monitoring and intelligent analysis of equipment performance from any location.</a:t>
-            </a:r>
-          </a:p>
-          <a:p>
-            <a:pPr marL="342900" indent="-342900" algn="just">
+              <a:rPr lang="en-US" dirty="0">
+                <a:latin typeface="Times New Roman" panose="02020603050405020304" pitchFamily="18" charset="0"/>
+                <a:cs typeface="Times New Roman" panose="02020603050405020304" pitchFamily="18" charset="0"/>
+              </a:rPr>
+              <a:t>Secure Data Collection &amp; Cloud Infrastructure: Develop a secure, cloud-based platform to continuously collect, process, and store vital equipment data (such as temperature, vibration, and load) for remote, real-time health monitoring.</a:t>
+            </a:r>
+          </a:p>
+          <a:p>
+            <a:pPr marL="285750" indent="-285750" algn="just">
               <a:buFont typeface="Wingdings" panose="05000000000000000000" pitchFamily="2" charset="2"/>
               <a:buChar char="Ø"/>
             </a:pPr>
-            <a:r>
-              <a:rPr lang="en-US" sz="2000" dirty="0">
-                <a:latin typeface="Times New Roman" panose="02020603050405020304" pitchFamily="18" charset="0"/>
-                <a:cs typeface="Times New Roman" panose="02020603050405020304" pitchFamily="18" charset="0"/>
-              </a:rPr>
-              <a:t>To collect and process motor equipment data such as temperature, vibration, and load parameters to assess operational health accurately.</a:t>
-            </a:r>
-          </a:p>
-          <a:p>
-            <a:pPr marL="342900" indent="-342900" algn="just">
+            <a:endParaRPr lang="en-US" dirty="0">
+              <a:latin typeface="Times New Roman" panose="02020603050405020304" pitchFamily="18" charset="0"/>
+              <a:cs typeface="Times New Roman" panose="02020603050405020304" pitchFamily="18" charset="0"/>
+            </a:endParaRPr>
+          </a:p>
+          <a:p>
+            <a:pPr marL="285750" indent="-285750" algn="just">
               <a:buFont typeface="Wingdings" panose="05000000000000000000" pitchFamily="2" charset="2"/>
               <a:buChar char="Ø"/>
             </a:pPr>
             <a:r>
-              <a:rPr lang="en-US" sz="2000" dirty="0">
-                <a:latin typeface="Times New Roman" panose="02020603050405020304" pitchFamily="18" charset="0"/>
-                <a:cs typeface="Times New Roman" panose="02020603050405020304" pitchFamily="18" charset="0"/>
-              </a:rPr>
-              <a:t>To apply Machine Learning algorithms for failure prediction in order to identify early warning signs and prevent unexpected equipment breakdowns.</a:t>
-            </a:r>
-          </a:p>
-          <a:p>
-            <a:pPr marL="342900" indent="-342900" algn="just">
+              <a:rPr lang="en-US" dirty="0">
+                <a:latin typeface="Times New Roman" panose="02020603050405020304" pitchFamily="18" charset="0"/>
+                <a:cs typeface="Times New Roman" panose="02020603050405020304" pitchFamily="18" charset="0"/>
+              </a:rPr>
+              <a:t>Predictive Analytics &amp; Machine Learning: Apply advanced machine learning algorithms to analyze operational data, extract meaningful insights, and identify early warning signs to predict and prevent unexpected failures.</a:t>
+            </a:r>
+          </a:p>
+          <a:p>
+            <a:pPr marL="285750" indent="-285750" algn="just">
               <a:buFont typeface="Wingdings" panose="05000000000000000000" pitchFamily="2" charset="2"/>
               <a:buChar char="Ø"/>
             </a:pPr>
-            <a:r>
-              <a:rPr lang="en-US" sz="2000" dirty="0">
-                <a:latin typeface="Times New Roman" panose="02020603050405020304" pitchFamily="18" charset="0"/>
-                <a:cs typeface="Times New Roman" panose="02020603050405020304" pitchFamily="18" charset="0"/>
-              </a:rPr>
-              <a:t>To provide a real-time monitoring dashboard that visually represents equipment status, predictions, and historical trends for better decision-making.</a:t>
-            </a:r>
-          </a:p>
-          <a:p>
-            <a:pPr marL="342900" indent="-342900" algn="just">
+            <a:endParaRPr lang="en-US" dirty="0">
+              <a:latin typeface="Times New Roman" panose="02020603050405020304" pitchFamily="18" charset="0"/>
+              <a:cs typeface="Times New Roman" panose="02020603050405020304" pitchFamily="18" charset="0"/>
+            </a:endParaRPr>
+          </a:p>
+          <a:p>
+            <a:pPr marL="285750" indent="-285750" algn="just">
               <a:buFont typeface="Wingdings" panose="05000000000000000000" pitchFamily="2" charset="2"/>
               <a:buChar char="Ø"/>
             </a:pPr>
             <a:r>
-              <a:rPr lang="en-US" sz="2000" dirty="0">
-                <a:latin typeface="Times New Roman" panose="02020603050405020304" pitchFamily="18" charset="0"/>
-                <a:cs typeface="Times New Roman" panose="02020603050405020304" pitchFamily="18" charset="0"/>
-              </a:rPr>
-              <a:t>To reduce downtime and maintenance costs by shifting from reactive maintenance to a proactive and predictive approach.</a:t>
-            </a:r>
-          </a:p>
-          <a:p>
-            <a:pPr marL="342900" indent="-342900" algn="just">
+              <a:rPr lang="en-US" dirty="0">
+                <a:latin typeface="Times New Roman" panose="02020603050405020304" pitchFamily="18" charset="0"/>
+                <a:cs typeface="Times New Roman" panose="02020603050405020304" pitchFamily="18" charset="0"/>
+              </a:rPr>
+              <a:t>Real-Time Visualization: Deliver an intuitive, real-time dashboard that visually represents equipment status, predictive alerts, and historical trends to facilitate rapid, data-driven decision-making.</a:t>
+            </a:r>
+          </a:p>
+          <a:p>
+            <a:pPr marL="285750" indent="-285750" algn="just">
               <a:buFont typeface="Wingdings" panose="05000000000000000000" pitchFamily="2" charset="2"/>
               <a:buChar char="Ø"/>
             </a:pPr>
-            <a:r>
-              <a:rPr lang="en-US" sz="2000" dirty="0">
-                <a:latin typeface="Times New Roman" panose="02020603050405020304" pitchFamily="18" charset="0"/>
-                <a:cs typeface="Times New Roman" panose="02020603050405020304" pitchFamily="18" charset="0"/>
-              </a:rPr>
-              <a:t>To securely store logs and system data ensuring data integrity, confidentiality, and easy retrieval for future analysis.</a:t>
-            </a:r>
-          </a:p>
-          <a:p>
-            <a:pPr marL="342900" indent="-342900" algn="just">
+            <a:endParaRPr lang="en-US" dirty="0">
+              <a:latin typeface="Times New Roman" panose="02020603050405020304" pitchFamily="18" charset="0"/>
+              <a:cs typeface="Times New Roman" panose="02020603050405020304" pitchFamily="18" charset="0"/>
+            </a:endParaRPr>
+          </a:p>
+          <a:p>
+            <a:pPr marL="285750" indent="-285750" algn="just">
               <a:buFont typeface="Wingdings" panose="05000000000000000000" pitchFamily="2" charset="2"/>
               <a:buChar char="Ø"/>
             </a:pPr>
             <a:r>
-              <a:rPr lang="en-US" sz="2000" dirty="0">
-                <a:latin typeface="Times New Roman" panose="02020603050405020304" pitchFamily="18" charset="0"/>
-                <a:cs typeface="Times New Roman" panose="02020603050405020304" pitchFamily="18" charset="0"/>
-              </a:rPr>
-              <a:t>To analyze equipment data using advanced analytics models to extract meaningful insights and improve maintenance planning.</a:t>
+              <a:rPr lang="en-US" dirty="0">
+                <a:latin typeface="Times New Roman" panose="02020603050405020304" pitchFamily="18" charset="0"/>
+                <a:cs typeface="Times New Roman" panose="02020603050405020304" pitchFamily="18" charset="0"/>
+              </a:rPr>
+              <a:t>Proactive Maintenance &amp; Cost Reduction: Transition from reactive repairs to a proactive, predictive maintenance strategy, significantly reducing unexpected operational downtime and long-term maintenance costs.</a:t>
             </a:r>
           </a:p>
         </p:txBody>
@@ -8137,7 +8089,7 @@
         <p:spPr>
           <a:xfrm>
             <a:off x="265471" y="792624"/>
-            <a:ext cx="11661058" cy="5016758"/>
+            <a:ext cx="11661058" cy="4708981"/>
           </a:xfrm>
           <a:prstGeom prst="rect">
             <a:avLst/>
@@ -8172,7 +8124,7 @@
                 <a:latin typeface="Times New Roman" panose="02020603050405020304" pitchFamily="18" charset="0"/>
                 <a:cs typeface="Times New Roman" panose="02020603050405020304" pitchFamily="18" charset="0"/>
               </a:rPr>
-              <a:t>To track the condition of equipment in real time by continuously monitoring operational parameters such as temperature, vibration, and load.</a:t>
+              <a:t>Real-Time IoT Monitoring &amp; Data Collection: Integrate smart sensors and industrial IoT devices to continuously track vital operational parameters—such as temperature, vibration, and load—in real time.</a:t>
             </a:r>
           </a:p>
           <a:p>
@@ -8180,33 +8132,6 @@
               <a:buFont typeface="Wingdings" panose="05000000000000000000" pitchFamily="2" charset="2"/>
               <a:buChar char="ü"/>
             </a:pPr>
-            <a:r>
-              <a:rPr lang="en-US" sz="2000" dirty="0">
-                <a:latin typeface="Times New Roman" panose="02020603050405020304" pitchFamily="18" charset="0"/>
-                <a:cs typeface="Times New Roman" panose="02020603050405020304" pitchFamily="18" charset="0"/>
-              </a:rPr>
-              <a:t>To predict equipment failures before they occur using data-driven models that analyze patterns and detect early warning signs.</a:t>
-            </a:r>
-          </a:p>
-          <a:p>
-            <a:pPr marL="342900" indent="-342900" algn="just">
-              <a:buFont typeface="Wingdings" panose="05000000000000000000" pitchFamily="2" charset="2"/>
-              <a:buChar char="ü"/>
-            </a:pPr>
-            <a:r>
-              <a:rPr lang="en-US" sz="2000" dirty="0">
-                <a:latin typeface="Times New Roman" panose="02020603050405020304" pitchFamily="18" charset="0"/>
-                <a:cs typeface="Times New Roman" panose="02020603050405020304" pitchFamily="18" charset="0"/>
-              </a:rPr>
-              <a:t>To enable remote monitoring through cloud integration, allowing users to access system data and predictions from any </a:t>
-            </a:r>
-            <a:r>
-              <a:rPr lang="en-US" sz="2000" dirty="0" err="1">
-                <a:latin typeface="Times New Roman" panose="02020603050405020304" pitchFamily="18" charset="0"/>
-                <a:cs typeface="Times New Roman" panose="02020603050405020304" pitchFamily="18" charset="0"/>
-              </a:rPr>
-              <a:t>location.a</a:t>
-            </a:r>
             <a:endParaRPr lang="en-US" sz="2000" dirty="0">
               <a:latin typeface="Times New Roman" panose="02020603050405020304" pitchFamily="18" charset="0"/>
               <a:cs typeface="Times New Roman" panose="02020603050405020304" pitchFamily="18" charset="0"/>
@@ -8222,7 +8147,7 @@
                 <a:latin typeface="Times New Roman" panose="02020603050405020304" pitchFamily="18" charset="0"/>
                 <a:cs typeface="Times New Roman" panose="02020603050405020304" pitchFamily="18" charset="0"/>
               </a:rPr>
-              <a:t>Applicable in manufacturing industries, where continuous machine operation and preventive maintenance are critical for productivity.</a:t>
+              <a:t>Scalable Cloud Architecture &amp; Remote Access: Leverage cloud deployment to efficiently manage increasing data volumes and multiple equipment units, allowing users to monitor systems and access predictions remotely from any location.</a:t>
             </a:r>
           </a:p>
           <a:p>
@@ -8230,12 +8155,22 @@
               <a:buFont typeface="Wingdings" panose="05000000000000000000" pitchFamily="2" charset="2"/>
               <a:buChar char="ü"/>
             </a:pPr>
+            <a:endParaRPr lang="en-US" sz="2000" dirty="0">
+              <a:latin typeface="Times New Roman" panose="02020603050405020304" pitchFamily="18" charset="0"/>
+              <a:cs typeface="Times New Roman" panose="02020603050405020304" pitchFamily="18" charset="0"/>
+            </a:endParaRPr>
+          </a:p>
+          <a:p>
+            <a:pPr marL="342900" indent="-342900" algn="just">
+              <a:buFont typeface="Wingdings" panose="05000000000000000000" pitchFamily="2" charset="2"/>
+              <a:buChar char="ü"/>
+            </a:pPr>
             <a:r>
               <a:rPr lang="en-US" sz="2000" dirty="0">
                 <a:latin typeface="Times New Roman" panose="02020603050405020304" pitchFamily="18" charset="0"/>
                 <a:cs typeface="Times New Roman" panose="02020603050405020304" pitchFamily="18" charset="0"/>
               </a:rPr>
-              <a:t>Can be implemented in power plants and heavy machinery systems to monitor critical assets and reduce operational risks.</a:t>
+              <a:t>Predictive Analytics &amp; Proactive Decision-Making: Utilize data-driven models to analyze equipment patterns, detect early warning signs, and predict failures before they occur, empowering maintenance teams with faster, proactive decision-making.</a:t>
             </a:r>
           </a:p>
           <a:p>
@@ -8243,38 +8178,22 @@
               <a:buFont typeface="Wingdings" panose="05000000000000000000" pitchFamily="2" charset="2"/>
               <a:buChar char="ü"/>
             </a:pPr>
+            <a:endParaRPr lang="en-US" sz="2000" dirty="0">
+              <a:latin typeface="Times New Roman" panose="02020603050405020304" pitchFamily="18" charset="0"/>
+              <a:cs typeface="Times New Roman" panose="02020603050405020304" pitchFamily="18" charset="0"/>
+            </a:endParaRPr>
+          </a:p>
+          <a:p>
+            <a:pPr marL="342900" indent="-342900" algn="just">
+              <a:buFont typeface="Wingdings" panose="05000000000000000000" pitchFamily="2" charset="2"/>
+              <a:buChar char="ü"/>
+            </a:pPr>
             <a:r>
               <a:rPr lang="en-US" sz="2000" dirty="0">
                 <a:latin typeface="Times New Roman" panose="02020603050405020304" pitchFamily="18" charset="0"/>
                 <a:cs typeface="Times New Roman" panose="02020603050405020304" pitchFamily="18" charset="0"/>
               </a:rPr>
-              <a:t>Supports cloud deployment for scalability, enabling the system to handle increasing volumes of data and multiple equipment units efficiently.</a:t>
-            </a:r>
-          </a:p>
-          <a:p>
-            <a:pPr marL="342900" indent="-342900" algn="just">
-              <a:buFont typeface="Wingdings" panose="05000000000000000000" pitchFamily="2" charset="2"/>
-              <a:buChar char="ü"/>
-            </a:pPr>
-            <a:r>
-              <a:rPr lang="en-US" sz="2000" dirty="0">
-                <a:latin typeface="Times New Roman" panose="02020603050405020304" pitchFamily="18" charset="0"/>
-                <a:cs typeface="Times New Roman" panose="02020603050405020304" pitchFamily="18" charset="0"/>
-              </a:rPr>
-              <a:t>Enables real-time monitoring from anywhere, improving accessibility and faster decision-making for maintenance teams.</a:t>
-            </a:r>
-          </a:p>
-          <a:p>
-            <a:pPr marL="342900" indent="-342900" algn="just">
-              <a:buFont typeface="Wingdings" panose="05000000000000000000" pitchFamily="2" charset="2"/>
-              <a:buChar char="ü"/>
-            </a:pPr>
-            <a:r>
-              <a:rPr lang="en-US" sz="2000" dirty="0">
-                <a:latin typeface="Times New Roman" panose="02020603050405020304" pitchFamily="18" charset="0"/>
-                <a:cs typeface="Times New Roman" panose="02020603050405020304" pitchFamily="18" charset="0"/>
-              </a:rPr>
-              <a:t>Can be extended with IoT integration, allowing direct connection with smart sensors and industrial devices.</a:t>
+              <a:t>Cross-Industry Application &amp; Risk Mitigation: Implement the system across manufacturing, power plants, and heavy machinery environments to maintain continuous productivity, support preventive maintenance, and reduce overall operational risks.</a:t>
             </a:r>
           </a:p>
         </p:txBody>

--- a/docs/Clg 2nd review.pptx
+++ b/docs/Clg 2nd review.pptx
@@ -5,7 +5,7 @@
     <p:sldMasterId id="2147483648" r:id="rId1"/>
   </p:sldMasterIdLst>
   <p:notesMasterIdLst>
-    <p:notesMasterId r:id="rId19"/>
+    <p:notesMasterId r:id="rId16"/>
   </p:notesMasterIdLst>
   <p:sldIdLst>
     <p:sldId id="263" r:id="rId2"/>
@@ -17,14 +17,11 @@
     <p:sldId id="269" r:id="rId8"/>
     <p:sldId id="277" r:id="rId9"/>
     <p:sldId id="268" r:id="rId10"/>
-    <p:sldId id="271" r:id="rId11"/>
-    <p:sldId id="272" r:id="rId12"/>
-    <p:sldId id="278" r:id="rId13"/>
-    <p:sldId id="276" r:id="rId14"/>
-    <p:sldId id="275" r:id="rId15"/>
-    <p:sldId id="273" r:id="rId16"/>
-    <p:sldId id="274" r:id="rId17"/>
-    <p:sldId id="264" r:id="rId18"/>
+    <p:sldId id="276" r:id="rId11"/>
+    <p:sldId id="275" r:id="rId12"/>
+    <p:sldId id="273" r:id="rId13"/>
+    <p:sldId id="274" r:id="rId14"/>
+    <p:sldId id="264" r:id="rId15"/>
   </p:sldIdLst>
   <p:sldSz cx="12192000" cy="6858000"/>
   <p:notesSz cx="6858000" cy="9144000"/>
@@ -213,7 +210,7 @@
           <a:p>
             <a:fld id="{C1BED7E8-5420-4F73-BA32-34A7030FE7D8}" type="datetimeFigureOut">
               <a:rPr lang="en-US" smtClean="0"/>
-              <a:t>4/8/2026</a:t>
+              <a:t>4/9/2026</a:t>
             </a:fld>
             <a:endParaRPr lang="en-US"/>
           </a:p>
@@ -572,330 +569,6 @@
         <p:cNvPr id="1" name="">
           <a:extLst>
             <a:ext uri="{FF2B5EF4-FFF2-40B4-BE49-F238E27FC236}">
-              <a16:creationId xmlns:a16="http://schemas.microsoft.com/office/drawing/2014/main" id="{F6ADB6BE-7B61-383A-C39D-2D85EE02A9B7}"/>
-            </a:ext>
-          </a:extLst>
-        </p:cNvPr>
-        <p:cNvGrpSpPr/>
-        <p:nvPr/>
-      </p:nvGrpSpPr>
-      <p:grpSpPr>
-        <a:xfrm>
-          <a:off x="0" y="0"/>
-          <a:ext cx="0" cy="0"/>
-          <a:chOff x="0" y="0"/>
-          <a:chExt cx="0" cy="0"/>
-        </a:xfrm>
-      </p:grpSpPr>
-      <p:sp>
-        <p:nvSpPr>
-          <p:cNvPr id="2" name="Slide Image Placeholder 1">
-            <a:extLst>
-              <a:ext uri="{FF2B5EF4-FFF2-40B4-BE49-F238E27FC236}">
-                <a16:creationId xmlns:a16="http://schemas.microsoft.com/office/drawing/2014/main" id="{D888A89B-735F-1709-E22B-684965A93192}"/>
-              </a:ext>
-            </a:extLst>
-          </p:cNvPr>
-          <p:cNvSpPr>
-            <a:spLocks noGrp="1" noRot="1" noChangeAspect="1"/>
-          </p:cNvSpPr>
-          <p:nvPr>
-            <p:ph type="sldImg"/>
-          </p:nvPr>
-        </p:nvSpPr>
-        <p:spPr/>
-      </p:sp>
-      <p:sp>
-        <p:nvSpPr>
-          <p:cNvPr id="3" name="Notes Placeholder 2">
-            <a:extLst>
-              <a:ext uri="{FF2B5EF4-FFF2-40B4-BE49-F238E27FC236}">
-                <a16:creationId xmlns:a16="http://schemas.microsoft.com/office/drawing/2014/main" id="{F7C90FD8-4B6F-3D43-0874-F0235CA03544}"/>
-              </a:ext>
-            </a:extLst>
-          </p:cNvPr>
-          <p:cNvSpPr>
-            <a:spLocks noGrp="1"/>
-          </p:cNvSpPr>
-          <p:nvPr>
-            <p:ph type="body" idx="1"/>
-          </p:nvPr>
-        </p:nvSpPr>
-        <p:spPr/>
-        <p:txBody>
-          <a:bodyPr/>
-          <a:lstStyle/>
-          <a:p>
-            <a:endParaRPr lang="en-US" dirty="0"/>
-          </a:p>
-        </p:txBody>
-      </p:sp>
-      <p:sp>
-        <p:nvSpPr>
-          <p:cNvPr id="4" name="Slide Number Placeholder 3">
-            <a:extLst>
-              <a:ext uri="{FF2B5EF4-FFF2-40B4-BE49-F238E27FC236}">
-                <a16:creationId xmlns:a16="http://schemas.microsoft.com/office/drawing/2014/main" id="{8BF56310-FCF6-B947-5012-D8E086D8C5B0}"/>
-              </a:ext>
-            </a:extLst>
-          </p:cNvPr>
-          <p:cNvSpPr>
-            <a:spLocks noGrp="1"/>
-          </p:cNvSpPr>
-          <p:nvPr>
-            <p:ph type="sldNum" sz="quarter" idx="5"/>
-          </p:nvPr>
-        </p:nvSpPr>
-        <p:spPr/>
-        <p:txBody>
-          <a:bodyPr/>
-          <a:lstStyle/>
-          <a:p>
-            <a:fld id="{C119E7F2-498D-45ED-A645-8BBCF90873D0}" type="slidenum">
-              <a:rPr lang="en-US" smtClean="0"/>
-              <a:t>12</a:t>
-            </a:fld>
-            <a:endParaRPr lang="en-US"/>
-          </a:p>
-        </p:txBody>
-      </p:sp>
-    </p:spTree>
-    <p:extLst>
-      <p:ext uri="{BB962C8B-B14F-4D97-AF65-F5344CB8AC3E}">
-        <p14:creationId xmlns:p14="http://schemas.microsoft.com/office/powerpoint/2010/main" val="779290196"/>
-      </p:ext>
-    </p:extLst>
-  </p:cSld>
-  <p:clrMapOvr>
-    <a:masterClrMapping/>
-  </p:clrMapOvr>
-</p:notes>
-</file>
-
-<file path=ppt/notesSlides/notesSlide11.xml><?xml version="1.0" encoding="utf-8"?>
-<p:notes xmlns:a="http://schemas.openxmlformats.org/drawingml/2006/main" xmlns:r="http://schemas.openxmlformats.org/officeDocument/2006/relationships" xmlns:p="http://schemas.openxmlformats.org/presentationml/2006/main">
-  <p:cSld>
-    <p:spTree>
-      <p:nvGrpSpPr>
-        <p:cNvPr id="1" name="">
-          <a:extLst>
-            <a:ext uri="{FF2B5EF4-FFF2-40B4-BE49-F238E27FC236}">
-              <a16:creationId xmlns:a16="http://schemas.microsoft.com/office/drawing/2014/main" id="{3F108448-B8B0-D313-353E-616DAB301DF8}"/>
-            </a:ext>
-          </a:extLst>
-        </p:cNvPr>
-        <p:cNvGrpSpPr/>
-        <p:nvPr/>
-      </p:nvGrpSpPr>
-      <p:grpSpPr>
-        <a:xfrm>
-          <a:off x="0" y="0"/>
-          <a:ext cx="0" cy="0"/>
-          <a:chOff x="0" y="0"/>
-          <a:chExt cx="0" cy="0"/>
-        </a:xfrm>
-      </p:grpSpPr>
-      <p:sp>
-        <p:nvSpPr>
-          <p:cNvPr id="2" name="Slide Image Placeholder 1">
-            <a:extLst>
-              <a:ext uri="{FF2B5EF4-FFF2-40B4-BE49-F238E27FC236}">
-                <a16:creationId xmlns:a16="http://schemas.microsoft.com/office/drawing/2014/main" id="{461BF45A-57FC-E02F-0E13-98B270F2E7E6}"/>
-              </a:ext>
-            </a:extLst>
-          </p:cNvPr>
-          <p:cNvSpPr>
-            <a:spLocks noGrp="1" noRot="1" noChangeAspect="1"/>
-          </p:cNvSpPr>
-          <p:nvPr>
-            <p:ph type="sldImg"/>
-          </p:nvPr>
-        </p:nvSpPr>
-        <p:spPr/>
-      </p:sp>
-      <p:sp>
-        <p:nvSpPr>
-          <p:cNvPr id="3" name="Notes Placeholder 2">
-            <a:extLst>
-              <a:ext uri="{FF2B5EF4-FFF2-40B4-BE49-F238E27FC236}">
-                <a16:creationId xmlns:a16="http://schemas.microsoft.com/office/drawing/2014/main" id="{0DD0D77E-5AFF-628E-BA6B-5F8BFAABF2E7}"/>
-              </a:ext>
-            </a:extLst>
-          </p:cNvPr>
-          <p:cNvSpPr>
-            <a:spLocks noGrp="1"/>
-          </p:cNvSpPr>
-          <p:nvPr>
-            <p:ph type="body" idx="1"/>
-          </p:nvPr>
-        </p:nvSpPr>
-        <p:spPr/>
-        <p:txBody>
-          <a:bodyPr/>
-          <a:lstStyle/>
-          <a:p>
-            <a:endParaRPr lang="en-US" dirty="0"/>
-          </a:p>
-        </p:txBody>
-      </p:sp>
-      <p:sp>
-        <p:nvSpPr>
-          <p:cNvPr id="4" name="Slide Number Placeholder 3">
-            <a:extLst>
-              <a:ext uri="{FF2B5EF4-FFF2-40B4-BE49-F238E27FC236}">
-                <a16:creationId xmlns:a16="http://schemas.microsoft.com/office/drawing/2014/main" id="{A4C16C0D-5708-C253-C2C7-3B59122C5DAD}"/>
-              </a:ext>
-            </a:extLst>
-          </p:cNvPr>
-          <p:cNvSpPr>
-            <a:spLocks noGrp="1"/>
-          </p:cNvSpPr>
-          <p:nvPr>
-            <p:ph type="sldNum" sz="quarter" idx="5"/>
-          </p:nvPr>
-        </p:nvSpPr>
-        <p:spPr/>
-        <p:txBody>
-          <a:bodyPr/>
-          <a:lstStyle/>
-          <a:p>
-            <a:fld id="{C119E7F2-498D-45ED-A645-8BBCF90873D0}" type="slidenum">
-              <a:rPr lang="en-US" smtClean="0"/>
-              <a:t>13</a:t>
-            </a:fld>
-            <a:endParaRPr lang="en-US"/>
-          </a:p>
-        </p:txBody>
-      </p:sp>
-    </p:spTree>
-    <p:extLst>
-      <p:ext uri="{BB962C8B-B14F-4D97-AF65-F5344CB8AC3E}">
-        <p14:creationId xmlns:p14="http://schemas.microsoft.com/office/powerpoint/2010/main" val="2343315806"/>
-      </p:ext>
-    </p:extLst>
-  </p:cSld>
-  <p:clrMapOvr>
-    <a:masterClrMapping/>
-  </p:clrMapOvr>
-</p:notes>
-</file>
-
-<file path=ppt/notesSlides/notesSlide12.xml><?xml version="1.0" encoding="utf-8"?>
-<p:notes xmlns:a="http://schemas.openxmlformats.org/drawingml/2006/main" xmlns:r="http://schemas.openxmlformats.org/officeDocument/2006/relationships" xmlns:p="http://schemas.openxmlformats.org/presentationml/2006/main">
-  <p:cSld>
-    <p:spTree>
-      <p:nvGrpSpPr>
-        <p:cNvPr id="1" name="">
-          <a:extLst>
-            <a:ext uri="{FF2B5EF4-FFF2-40B4-BE49-F238E27FC236}">
-              <a16:creationId xmlns:a16="http://schemas.microsoft.com/office/drawing/2014/main" id="{E18DF7F0-CC61-0DD1-055A-F106F796F212}"/>
-            </a:ext>
-          </a:extLst>
-        </p:cNvPr>
-        <p:cNvGrpSpPr/>
-        <p:nvPr/>
-      </p:nvGrpSpPr>
-      <p:grpSpPr>
-        <a:xfrm>
-          <a:off x="0" y="0"/>
-          <a:ext cx="0" cy="0"/>
-          <a:chOff x="0" y="0"/>
-          <a:chExt cx="0" cy="0"/>
-        </a:xfrm>
-      </p:grpSpPr>
-      <p:sp>
-        <p:nvSpPr>
-          <p:cNvPr id="2" name="Slide Image Placeholder 1">
-            <a:extLst>
-              <a:ext uri="{FF2B5EF4-FFF2-40B4-BE49-F238E27FC236}">
-                <a16:creationId xmlns:a16="http://schemas.microsoft.com/office/drawing/2014/main" id="{6A58D146-8DAE-35FF-57CD-485C703338DA}"/>
-              </a:ext>
-            </a:extLst>
-          </p:cNvPr>
-          <p:cNvSpPr>
-            <a:spLocks noGrp="1" noRot="1" noChangeAspect="1"/>
-          </p:cNvSpPr>
-          <p:nvPr>
-            <p:ph type="sldImg"/>
-          </p:nvPr>
-        </p:nvSpPr>
-        <p:spPr/>
-      </p:sp>
-      <p:sp>
-        <p:nvSpPr>
-          <p:cNvPr id="3" name="Notes Placeholder 2">
-            <a:extLst>
-              <a:ext uri="{FF2B5EF4-FFF2-40B4-BE49-F238E27FC236}">
-                <a16:creationId xmlns:a16="http://schemas.microsoft.com/office/drawing/2014/main" id="{472C9F5A-2EBC-AF4C-8320-5FFC89BA34AA}"/>
-              </a:ext>
-            </a:extLst>
-          </p:cNvPr>
-          <p:cNvSpPr>
-            <a:spLocks noGrp="1"/>
-          </p:cNvSpPr>
-          <p:nvPr>
-            <p:ph type="body" idx="1"/>
-          </p:nvPr>
-        </p:nvSpPr>
-        <p:spPr/>
-        <p:txBody>
-          <a:bodyPr/>
-          <a:lstStyle/>
-          <a:p>
-            <a:endParaRPr lang="en-US" dirty="0"/>
-          </a:p>
-        </p:txBody>
-      </p:sp>
-      <p:sp>
-        <p:nvSpPr>
-          <p:cNvPr id="4" name="Slide Number Placeholder 3">
-            <a:extLst>
-              <a:ext uri="{FF2B5EF4-FFF2-40B4-BE49-F238E27FC236}">
-                <a16:creationId xmlns:a16="http://schemas.microsoft.com/office/drawing/2014/main" id="{297B2B5C-B1F1-431B-640B-7BDB9E1A2D3E}"/>
-              </a:ext>
-            </a:extLst>
-          </p:cNvPr>
-          <p:cNvSpPr>
-            <a:spLocks noGrp="1"/>
-          </p:cNvSpPr>
-          <p:nvPr>
-            <p:ph type="sldNum" sz="quarter" idx="5"/>
-          </p:nvPr>
-        </p:nvSpPr>
-        <p:spPr/>
-        <p:txBody>
-          <a:bodyPr/>
-          <a:lstStyle/>
-          <a:p>
-            <a:fld id="{C119E7F2-498D-45ED-A645-8BBCF90873D0}" type="slidenum">
-              <a:rPr lang="en-US" smtClean="0"/>
-              <a:t>14</a:t>
-            </a:fld>
-            <a:endParaRPr lang="en-US"/>
-          </a:p>
-        </p:txBody>
-      </p:sp>
-    </p:spTree>
-    <p:extLst>
-      <p:ext uri="{BB962C8B-B14F-4D97-AF65-F5344CB8AC3E}">
-        <p14:creationId xmlns:p14="http://schemas.microsoft.com/office/powerpoint/2010/main" val="3394732606"/>
-      </p:ext>
-    </p:extLst>
-  </p:cSld>
-  <p:clrMapOvr>
-    <a:masterClrMapping/>
-  </p:clrMapOvr>
-</p:notes>
-</file>
-
-<file path=ppt/notesSlides/notesSlide13.xml><?xml version="1.0" encoding="utf-8"?>
-<p:notes xmlns:a="http://schemas.openxmlformats.org/drawingml/2006/main" xmlns:r="http://schemas.openxmlformats.org/officeDocument/2006/relationships" xmlns:p="http://schemas.openxmlformats.org/presentationml/2006/main">
-  <p:cSld>
-    <p:spTree>
-      <p:nvGrpSpPr>
-        <p:cNvPr id="1" name="">
-          <a:extLst>
-            <a:ext uri="{FF2B5EF4-FFF2-40B4-BE49-F238E27FC236}">
               <a16:creationId xmlns:a16="http://schemas.microsoft.com/office/drawing/2014/main" id="{11929C80-4B9D-BEE6-6F02-16BB3B296F85}"/>
             </a:ext>
           </a:extLst>
@@ -977,7 +650,7 @@
           <a:p>
             <a:fld id="{C119E7F2-498D-45ED-A645-8BBCF90873D0}" type="slidenum">
               <a:rPr lang="en-US" smtClean="0"/>
-              <a:t>15</a:t>
+              <a:t>12</a:t>
             </a:fld>
             <a:endParaRPr lang="en-US"/>
           </a:p>
@@ -996,7 +669,7 @@
 </p:notes>
 </file>
 
-<file path=ppt/notesSlides/notesSlide14.xml><?xml version="1.0" encoding="utf-8"?>
+<file path=ppt/notesSlides/notesSlide11.xml><?xml version="1.0" encoding="utf-8"?>
 <p:notes xmlns:a="http://schemas.openxmlformats.org/drawingml/2006/main" xmlns:r="http://schemas.openxmlformats.org/officeDocument/2006/relationships" xmlns:p="http://schemas.openxmlformats.org/presentationml/2006/main">
   <p:cSld>
     <p:spTree>
@@ -1085,7 +758,7 @@
           <a:p>
             <a:fld id="{C119E7F2-498D-45ED-A645-8BBCF90873D0}" type="slidenum">
               <a:rPr lang="en-US" smtClean="0"/>
-              <a:t>16</a:t>
+              <a:t>13</a:t>
             </a:fld>
             <a:endParaRPr lang="en-US"/>
           </a:p>
@@ -1736,7 +1409,7 @@
         <p:cNvPr id="1" name="">
           <a:extLst>
             <a:ext uri="{FF2B5EF4-FFF2-40B4-BE49-F238E27FC236}">
-              <a16:creationId xmlns:a16="http://schemas.microsoft.com/office/drawing/2014/main" id="{81A47509-3C30-DEC6-5B50-FAA218DB695C}"/>
+              <a16:creationId xmlns:a16="http://schemas.microsoft.com/office/drawing/2014/main" id="{3F108448-B8B0-D313-353E-616DAB301DF8}"/>
             </a:ext>
           </a:extLst>
         </p:cNvPr>
@@ -1756,7 +1429,7 @@
           <p:cNvPr id="2" name="Slide Image Placeholder 1">
             <a:extLst>
               <a:ext uri="{FF2B5EF4-FFF2-40B4-BE49-F238E27FC236}">
-                <a16:creationId xmlns:a16="http://schemas.microsoft.com/office/drawing/2014/main" id="{56D2C9E5-8469-5859-34B0-AE19ADEC24C7}"/>
+                <a16:creationId xmlns:a16="http://schemas.microsoft.com/office/drawing/2014/main" id="{461BF45A-57FC-E02F-0E13-98B270F2E7E6}"/>
               </a:ext>
             </a:extLst>
           </p:cNvPr>
@@ -1774,7 +1447,7 @@
           <p:cNvPr id="3" name="Notes Placeholder 2">
             <a:extLst>
               <a:ext uri="{FF2B5EF4-FFF2-40B4-BE49-F238E27FC236}">
-                <a16:creationId xmlns:a16="http://schemas.microsoft.com/office/drawing/2014/main" id="{67838D90-E948-6E29-68D7-01333E7DC936}"/>
+                <a16:creationId xmlns:a16="http://schemas.microsoft.com/office/drawing/2014/main" id="{0DD0D77E-5AFF-628E-BA6B-5F8BFAABF2E7}"/>
               </a:ext>
             </a:extLst>
           </p:cNvPr>
@@ -1799,7 +1472,7 @@
           <p:cNvPr id="4" name="Slide Number Placeholder 3">
             <a:extLst>
               <a:ext uri="{FF2B5EF4-FFF2-40B4-BE49-F238E27FC236}">
-                <a16:creationId xmlns:a16="http://schemas.microsoft.com/office/drawing/2014/main" id="{AEABC21D-EE7C-BD2F-609F-623C8351C4F8}"/>
+                <a16:creationId xmlns:a16="http://schemas.microsoft.com/office/drawing/2014/main" id="{A4C16C0D-5708-C253-C2C7-3B59122C5DAD}"/>
               </a:ext>
             </a:extLst>
           </p:cNvPr>
@@ -1826,7 +1499,7 @@
     </p:spTree>
     <p:extLst>
       <p:ext uri="{BB962C8B-B14F-4D97-AF65-F5344CB8AC3E}">
-        <p14:creationId xmlns:p14="http://schemas.microsoft.com/office/powerpoint/2010/main" val="4051647361"/>
+        <p14:creationId xmlns:p14="http://schemas.microsoft.com/office/powerpoint/2010/main" val="2343315806"/>
       </p:ext>
     </p:extLst>
   </p:cSld>
@@ -1844,7 +1517,7 @@
         <p:cNvPr id="1" name="">
           <a:extLst>
             <a:ext uri="{FF2B5EF4-FFF2-40B4-BE49-F238E27FC236}">
-              <a16:creationId xmlns:a16="http://schemas.microsoft.com/office/drawing/2014/main" id="{6D025A2C-0FA8-EBBC-17B7-D666A281F58C}"/>
+              <a16:creationId xmlns:a16="http://schemas.microsoft.com/office/drawing/2014/main" id="{E18DF7F0-CC61-0DD1-055A-F106F796F212}"/>
             </a:ext>
           </a:extLst>
         </p:cNvPr>
@@ -1864,7 +1537,7 @@
           <p:cNvPr id="2" name="Slide Image Placeholder 1">
             <a:extLst>
               <a:ext uri="{FF2B5EF4-FFF2-40B4-BE49-F238E27FC236}">
-                <a16:creationId xmlns:a16="http://schemas.microsoft.com/office/drawing/2014/main" id="{EB53F317-D703-84E6-A80E-7B4863915625}"/>
+                <a16:creationId xmlns:a16="http://schemas.microsoft.com/office/drawing/2014/main" id="{6A58D146-8DAE-35FF-57CD-485C703338DA}"/>
               </a:ext>
             </a:extLst>
           </p:cNvPr>
@@ -1882,7 +1555,7 @@
           <p:cNvPr id="3" name="Notes Placeholder 2">
             <a:extLst>
               <a:ext uri="{FF2B5EF4-FFF2-40B4-BE49-F238E27FC236}">
-                <a16:creationId xmlns:a16="http://schemas.microsoft.com/office/drawing/2014/main" id="{277FAD2C-26F8-77EA-FE4D-350BEAB728BF}"/>
+                <a16:creationId xmlns:a16="http://schemas.microsoft.com/office/drawing/2014/main" id="{472C9F5A-2EBC-AF4C-8320-5FFC89BA34AA}"/>
               </a:ext>
             </a:extLst>
           </p:cNvPr>
@@ -1907,7 +1580,7 @@
           <p:cNvPr id="4" name="Slide Number Placeholder 3">
             <a:extLst>
               <a:ext uri="{FF2B5EF4-FFF2-40B4-BE49-F238E27FC236}">
-                <a16:creationId xmlns:a16="http://schemas.microsoft.com/office/drawing/2014/main" id="{49D77D52-6C1C-6B08-C411-B224E81EF0CB}"/>
+                <a16:creationId xmlns:a16="http://schemas.microsoft.com/office/drawing/2014/main" id="{297B2B5C-B1F1-431B-640B-7BDB9E1A2D3E}"/>
               </a:ext>
             </a:extLst>
           </p:cNvPr>
@@ -1934,7 +1607,7 @@
     </p:spTree>
     <p:extLst>
       <p:ext uri="{BB962C8B-B14F-4D97-AF65-F5344CB8AC3E}">
-        <p14:creationId xmlns:p14="http://schemas.microsoft.com/office/powerpoint/2010/main" val="4259835708"/>
+        <p14:creationId xmlns:p14="http://schemas.microsoft.com/office/powerpoint/2010/main" val="3394732606"/>
       </p:ext>
     </p:extLst>
   </p:cSld>
@@ -2091,7 +1764,7 @@
           <a:p>
             <a:fld id="{C198EE3F-C531-4F47-81BE-EB7857D8F039}" type="datetimeFigureOut">
               <a:rPr lang="en-US" smtClean="0"/>
-              <a:t>4/8/2026</a:t>
+              <a:t>4/9/2026</a:t>
             </a:fld>
             <a:endParaRPr lang="en-US"/>
           </a:p>
@@ -2289,7 +1962,7 @@
           <a:p>
             <a:fld id="{C198EE3F-C531-4F47-81BE-EB7857D8F039}" type="datetimeFigureOut">
               <a:rPr lang="en-US" smtClean="0"/>
-              <a:t>4/8/2026</a:t>
+              <a:t>4/9/2026</a:t>
             </a:fld>
             <a:endParaRPr lang="en-US"/>
           </a:p>
@@ -2497,7 +2170,7 @@
           <a:p>
             <a:fld id="{C198EE3F-C531-4F47-81BE-EB7857D8F039}" type="datetimeFigureOut">
               <a:rPr lang="en-US" smtClean="0"/>
-              <a:t>4/8/2026</a:t>
+              <a:t>4/9/2026</a:t>
             </a:fld>
             <a:endParaRPr lang="en-US"/>
           </a:p>
@@ -2695,7 +2368,7 @@
           <a:p>
             <a:fld id="{C198EE3F-C531-4F47-81BE-EB7857D8F039}" type="datetimeFigureOut">
               <a:rPr lang="en-US" smtClean="0"/>
-              <a:t>4/8/2026</a:t>
+              <a:t>4/9/2026</a:t>
             </a:fld>
             <a:endParaRPr lang="en-US"/>
           </a:p>
@@ -2970,7 +2643,7 @@
           <a:p>
             <a:fld id="{C198EE3F-C531-4F47-81BE-EB7857D8F039}" type="datetimeFigureOut">
               <a:rPr lang="en-US" smtClean="0"/>
-              <a:t>4/8/2026</a:t>
+              <a:t>4/9/2026</a:t>
             </a:fld>
             <a:endParaRPr lang="en-US"/>
           </a:p>
@@ -3235,7 +2908,7 @@
           <a:p>
             <a:fld id="{C198EE3F-C531-4F47-81BE-EB7857D8F039}" type="datetimeFigureOut">
               <a:rPr lang="en-US" smtClean="0"/>
-              <a:t>4/8/2026</a:t>
+              <a:t>4/9/2026</a:t>
             </a:fld>
             <a:endParaRPr lang="en-US"/>
           </a:p>
@@ -3647,7 +3320,7 @@
           <a:p>
             <a:fld id="{C198EE3F-C531-4F47-81BE-EB7857D8F039}" type="datetimeFigureOut">
               <a:rPr lang="en-US" smtClean="0"/>
-              <a:t>4/8/2026</a:t>
+              <a:t>4/9/2026</a:t>
             </a:fld>
             <a:endParaRPr lang="en-US"/>
           </a:p>
@@ -3788,7 +3461,7 @@
           <a:p>
             <a:fld id="{C198EE3F-C531-4F47-81BE-EB7857D8F039}" type="datetimeFigureOut">
               <a:rPr lang="en-US" smtClean="0"/>
-              <a:t>4/8/2026</a:t>
+              <a:t>4/9/2026</a:t>
             </a:fld>
             <a:endParaRPr lang="en-US"/>
           </a:p>
@@ -3901,7 +3574,7 @@
           <a:p>
             <a:fld id="{C198EE3F-C531-4F47-81BE-EB7857D8F039}" type="datetimeFigureOut">
               <a:rPr lang="en-US" smtClean="0"/>
-              <a:t>4/8/2026</a:t>
+              <a:t>4/9/2026</a:t>
             </a:fld>
             <a:endParaRPr lang="en-US"/>
           </a:p>
@@ -4212,7 +3885,7 @@
           <a:p>
             <a:fld id="{C198EE3F-C531-4F47-81BE-EB7857D8F039}" type="datetimeFigureOut">
               <a:rPr lang="en-US" smtClean="0"/>
-              <a:t>4/8/2026</a:t>
+              <a:t>4/9/2026</a:t>
             </a:fld>
             <a:endParaRPr lang="en-US"/>
           </a:p>
@@ -4500,7 +4173,7 @@
           <a:p>
             <a:fld id="{C198EE3F-C531-4F47-81BE-EB7857D8F039}" type="datetimeFigureOut">
               <a:rPr lang="en-US" smtClean="0"/>
-              <a:t>4/8/2026</a:t>
+              <a:t>4/9/2026</a:t>
             </a:fld>
             <a:endParaRPr lang="en-US"/>
           </a:p>
@@ -4741,7 +4414,7 @@
           <a:p>
             <a:fld id="{C198EE3F-C531-4F47-81BE-EB7857D8F039}" type="datetimeFigureOut">
               <a:rPr lang="en-US" smtClean="0"/>
-              <a:t>4/8/2026</a:t>
+              <a:t>4/9/2026</a:t>
             </a:fld>
             <a:endParaRPr lang="en-US"/>
           </a:p>
@@ -5401,988 +5074,6 @@
         <p:cNvPr id="1" name="">
           <a:extLst>
             <a:ext uri="{FF2B5EF4-FFF2-40B4-BE49-F238E27FC236}">
-              <a16:creationId xmlns:a16="http://schemas.microsoft.com/office/drawing/2014/main" id="{61AEB1FF-0DEE-8E69-16D6-27C30FC7E24F}"/>
-            </a:ext>
-          </a:extLst>
-        </p:cNvPr>
-        <p:cNvGrpSpPr/>
-        <p:nvPr/>
-      </p:nvGrpSpPr>
-      <p:grpSpPr>
-        <a:xfrm>
-          <a:off x="0" y="0"/>
-          <a:ext cx="0" cy="0"/>
-          <a:chOff x="0" y="0"/>
-          <a:chExt cx="0" cy="0"/>
-        </a:xfrm>
-      </p:grpSpPr>
-      <p:sp>
-        <p:nvSpPr>
-          <p:cNvPr id="2" name="TextBox 1">
-            <a:extLst>
-              <a:ext uri="{FF2B5EF4-FFF2-40B4-BE49-F238E27FC236}">
-                <a16:creationId xmlns:a16="http://schemas.microsoft.com/office/drawing/2014/main" id="{17D3DFF1-6C8E-4E00-38A6-15526C8A1849}"/>
-              </a:ext>
-            </a:extLst>
-          </p:cNvPr>
-          <p:cNvSpPr txBox="1"/>
-          <p:nvPr/>
-        </p:nvSpPr>
-        <p:spPr>
-          <a:xfrm>
-            <a:off x="265471" y="196645"/>
-            <a:ext cx="11661058" cy="523220"/>
-          </a:xfrm>
-          <a:prstGeom prst="rect">
-            <a:avLst/>
-          </a:prstGeom>
-          <a:noFill/>
-        </p:spPr>
-        <p:txBody>
-          <a:bodyPr wrap="square" rtlCol="0">
-            <a:spAutoFit/>
-          </a:bodyPr>
-          <a:lstStyle/>
-          <a:p>
-            <a:r>
-              <a:rPr lang="en-US" sz="2800" b="1" dirty="0"/>
-              <a:t>Technology Stack</a:t>
-            </a:r>
-          </a:p>
-        </p:txBody>
-      </p:sp>
-      <p:sp>
-        <p:nvSpPr>
-          <p:cNvPr id="3" name="TextBox 2">
-            <a:extLst>
-              <a:ext uri="{FF2B5EF4-FFF2-40B4-BE49-F238E27FC236}">
-                <a16:creationId xmlns:a16="http://schemas.microsoft.com/office/drawing/2014/main" id="{2A5B6ED7-B1C6-1D1F-0557-5F2E56CBFCB9}"/>
-              </a:ext>
-            </a:extLst>
-          </p:cNvPr>
-          <p:cNvSpPr txBox="1"/>
-          <p:nvPr/>
-        </p:nvSpPr>
-        <p:spPr>
-          <a:xfrm>
-            <a:off x="265471" y="792624"/>
-            <a:ext cx="11661058" cy="6647974"/>
-          </a:xfrm>
-          <a:prstGeom prst="rect">
-            <a:avLst/>
-          </a:prstGeom>
-          <a:noFill/>
-        </p:spPr>
-        <p:txBody>
-          <a:bodyPr wrap="square" rtlCol="0">
-            <a:spAutoFit/>
-          </a:bodyPr>
-          <a:lstStyle/>
-          <a:p>
-            <a:pPr marL="342900" indent="-342900">
-              <a:buFont typeface="Wingdings" panose="05000000000000000000" pitchFamily="2" charset="2"/>
-              <a:buChar char="Ø"/>
-            </a:pPr>
-            <a:r>
-              <a:rPr lang="en-US" sz="2000" b="1" dirty="0">
-                <a:latin typeface="Times New Roman" panose="02020603050405020304" pitchFamily="18" charset="0"/>
-                <a:cs typeface="Times New Roman" panose="02020603050405020304" pitchFamily="18" charset="0"/>
-              </a:rPr>
-              <a:t>Programming Language</a:t>
-            </a:r>
-          </a:p>
-          <a:p>
-            <a:pPr marL="342900" indent="-342900">
-              <a:buFont typeface="Wingdings" panose="05000000000000000000" pitchFamily="2" charset="2"/>
-              <a:buChar char="ü"/>
-            </a:pPr>
-            <a:r>
-              <a:rPr lang="en-US" sz="2000" dirty="0"/>
-              <a:t>Python 3.9+</a:t>
-            </a:r>
-          </a:p>
-          <a:p>
-            <a:pPr marL="342900" indent="-342900">
-              <a:buFont typeface="Wingdings" panose="05000000000000000000" pitchFamily="2" charset="2"/>
-              <a:buChar char="ü"/>
-            </a:pPr>
-            <a:endParaRPr lang="en-US" sz="2000" dirty="0">
-              <a:latin typeface="Times New Roman" panose="02020603050405020304" pitchFamily="18" charset="0"/>
-              <a:cs typeface="Times New Roman" panose="02020603050405020304" pitchFamily="18" charset="0"/>
-            </a:endParaRPr>
-          </a:p>
-          <a:p>
-            <a:pPr marL="342900" indent="-342900">
-              <a:buFont typeface="Wingdings" panose="05000000000000000000" pitchFamily="2" charset="2"/>
-              <a:buChar char="Ø"/>
-            </a:pPr>
-            <a:r>
-              <a:rPr lang="en-US" sz="2000" b="1" dirty="0">
-                <a:latin typeface="Times New Roman" panose="02020603050405020304" pitchFamily="18" charset="0"/>
-                <a:cs typeface="Times New Roman" panose="02020603050405020304" pitchFamily="18" charset="0"/>
-              </a:rPr>
-              <a:t>Backend Development</a:t>
-            </a:r>
-          </a:p>
-          <a:p>
-            <a:pPr marL="342900" indent="-342900">
-              <a:buFont typeface="Wingdings" panose="05000000000000000000" pitchFamily="2" charset="2"/>
-              <a:buChar char="ü"/>
-            </a:pPr>
-            <a:r>
-              <a:rPr lang="en-US" sz="2000" dirty="0">
-                <a:latin typeface="Times New Roman" panose="02020603050405020304" pitchFamily="18" charset="0"/>
-                <a:cs typeface="Times New Roman" panose="02020603050405020304" pitchFamily="18" charset="0"/>
-              </a:rPr>
-              <a:t>Flask (Web Framework)</a:t>
-            </a:r>
-          </a:p>
-          <a:p>
-            <a:pPr marL="342900" indent="-342900">
-              <a:buFont typeface="Wingdings" panose="05000000000000000000" pitchFamily="2" charset="2"/>
-              <a:buChar char="ü"/>
-            </a:pPr>
-            <a:r>
-              <a:rPr lang="en-US" sz="2000" dirty="0">
-                <a:latin typeface="Times New Roman" panose="02020603050405020304" pitchFamily="18" charset="0"/>
-                <a:cs typeface="Times New Roman" panose="02020603050405020304" pitchFamily="18" charset="0"/>
-              </a:rPr>
-              <a:t>Flask-CORS</a:t>
-            </a:r>
-          </a:p>
-          <a:p>
-            <a:pPr marL="342900" indent="-342900">
-              <a:buFont typeface="Wingdings" panose="05000000000000000000" pitchFamily="2" charset="2"/>
-              <a:buChar char="ü"/>
-            </a:pPr>
-            <a:r>
-              <a:rPr lang="en-US" sz="2000" dirty="0" err="1">
-                <a:latin typeface="Times New Roman" panose="02020603050405020304" pitchFamily="18" charset="0"/>
-                <a:cs typeface="Times New Roman" panose="02020603050405020304" pitchFamily="18" charset="0"/>
-              </a:rPr>
-              <a:t>dotenv</a:t>
-            </a:r>
-            <a:r>
-              <a:rPr lang="en-US" sz="2000" dirty="0">
-                <a:latin typeface="Times New Roman" panose="02020603050405020304" pitchFamily="18" charset="0"/>
-                <a:cs typeface="Times New Roman" panose="02020603050405020304" pitchFamily="18" charset="0"/>
-              </a:rPr>
-              <a:t> (Environment variable management)</a:t>
-            </a:r>
-          </a:p>
-          <a:p>
-            <a:pPr marL="342900" indent="-342900">
-              <a:buFont typeface="Wingdings" panose="05000000000000000000" pitchFamily="2" charset="2"/>
-              <a:buChar char="ü"/>
-            </a:pPr>
-            <a:r>
-              <a:rPr lang="en-US" dirty="0" err="1">
-                <a:latin typeface="Times New Roman" panose="02020603050405020304" pitchFamily="18" charset="0"/>
-                <a:cs typeface="Times New Roman" panose="02020603050405020304" pitchFamily="18" charset="0"/>
-              </a:rPr>
-              <a:t>Werkzeug</a:t>
-            </a:r>
-            <a:r>
-              <a:rPr lang="en-US" dirty="0">
-                <a:latin typeface="Times New Roman" panose="02020603050405020304" pitchFamily="18" charset="0"/>
-                <a:cs typeface="Times New Roman" panose="02020603050405020304" pitchFamily="18" charset="0"/>
-              </a:rPr>
-              <a:t> </a:t>
-            </a:r>
-          </a:p>
-          <a:p>
-            <a:pPr marL="342900" indent="-342900">
-              <a:buFont typeface="Wingdings" panose="05000000000000000000" pitchFamily="2" charset="2"/>
-              <a:buChar char="ü"/>
-            </a:pPr>
-            <a:r>
-              <a:rPr lang="en-US" dirty="0">
-                <a:latin typeface="Times New Roman" panose="02020603050405020304" pitchFamily="18" charset="0"/>
-                <a:cs typeface="Times New Roman" panose="02020603050405020304" pitchFamily="18" charset="0"/>
-              </a:rPr>
-              <a:t>Requests </a:t>
-            </a:r>
-          </a:p>
-          <a:p>
-            <a:pPr marL="342900" indent="-342900">
-              <a:buFont typeface="Wingdings" panose="05000000000000000000" pitchFamily="2" charset="2"/>
-              <a:buChar char="ü"/>
-            </a:pPr>
-            <a:r>
-              <a:rPr lang="en-US" dirty="0" err="1">
-                <a:latin typeface="Times New Roman" panose="02020603050405020304" pitchFamily="18" charset="0"/>
-                <a:cs typeface="Times New Roman" panose="02020603050405020304" pitchFamily="18" charset="0"/>
-              </a:rPr>
-              <a:t>bcrypt</a:t>
-            </a:r>
-            <a:endParaRPr lang="en-US" dirty="0">
-              <a:latin typeface="Times New Roman" panose="02020603050405020304" pitchFamily="18" charset="0"/>
-              <a:cs typeface="Times New Roman" panose="02020603050405020304" pitchFamily="18" charset="0"/>
-            </a:endParaRPr>
-          </a:p>
-          <a:p>
-            <a:pPr marL="342900" indent="-342900">
-              <a:buFont typeface="Wingdings" panose="05000000000000000000" pitchFamily="2" charset="2"/>
-              <a:buChar char="ü"/>
-            </a:pPr>
-            <a:r>
-              <a:rPr lang="en-US" dirty="0" err="1">
-                <a:latin typeface="Times New Roman" panose="02020603050405020304" pitchFamily="18" charset="0"/>
-                <a:cs typeface="Times New Roman" panose="02020603050405020304" pitchFamily="18" charset="0"/>
-              </a:rPr>
-              <a:t>joblib</a:t>
-            </a:r>
-            <a:r>
-              <a:rPr lang="en-US" dirty="0">
-                <a:latin typeface="Times New Roman" panose="02020603050405020304" pitchFamily="18" charset="0"/>
-                <a:cs typeface="Times New Roman" panose="02020603050405020304" pitchFamily="18" charset="0"/>
-              </a:rPr>
-              <a:t> </a:t>
-            </a:r>
-          </a:p>
-          <a:p>
-            <a:pPr marL="342900" indent="-342900">
-              <a:buFont typeface="Wingdings" panose="05000000000000000000" pitchFamily="2" charset="2"/>
-              <a:buChar char="ü"/>
-            </a:pPr>
-            <a:r>
-              <a:rPr lang="en-US" dirty="0" err="1">
-                <a:latin typeface="Times New Roman" panose="02020603050405020304" pitchFamily="18" charset="0"/>
-                <a:cs typeface="Times New Roman" panose="02020603050405020304" pitchFamily="18" charset="0"/>
-              </a:rPr>
-              <a:t>smtplib</a:t>
-            </a:r>
-            <a:r>
-              <a:rPr lang="en-US" dirty="0">
-                <a:latin typeface="Times New Roman" panose="02020603050405020304" pitchFamily="18" charset="0"/>
-                <a:cs typeface="Times New Roman" panose="02020603050405020304" pitchFamily="18" charset="0"/>
-              </a:rPr>
-              <a:t> + </a:t>
-            </a:r>
-            <a:r>
-              <a:rPr lang="en-US" dirty="0" err="1">
-                <a:latin typeface="Times New Roman" panose="02020603050405020304" pitchFamily="18" charset="0"/>
-                <a:cs typeface="Times New Roman" panose="02020603050405020304" pitchFamily="18" charset="0"/>
-              </a:rPr>
-              <a:t>ssl</a:t>
-            </a:r>
-            <a:r>
-              <a:rPr lang="en-US" dirty="0">
-                <a:latin typeface="Times New Roman" panose="02020603050405020304" pitchFamily="18" charset="0"/>
-                <a:cs typeface="Times New Roman" panose="02020603050405020304" pitchFamily="18" charset="0"/>
-              </a:rPr>
-              <a:t> </a:t>
-            </a:r>
-          </a:p>
-          <a:p>
-            <a:pPr marL="342900" indent="-342900">
-              <a:buFont typeface="Wingdings" panose="05000000000000000000" pitchFamily="2" charset="2"/>
-              <a:buChar char="ü"/>
-            </a:pPr>
-            <a:r>
-              <a:rPr lang="en-US" dirty="0">
-                <a:latin typeface="Times New Roman" panose="02020603050405020304" pitchFamily="18" charset="0"/>
-                <a:cs typeface="Times New Roman" panose="02020603050405020304" pitchFamily="18" charset="0"/>
-              </a:rPr>
-              <a:t>SMTP / Gmail</a:t>
-            </a:r>
-          </a:p>
-          <a:p>
-            <a:pPr marL="342900" indent="-342900">
-              <a:buFont typeface="Wingdings" panose="05000000000000000000" pitchFamily="2" charset="2"/>
-              <a:buChar char="ü"/>
-            </a:pPr>
-            <a:endParaRPr lang="en-US" b="1" dirty="0"/>
-          </a:p>
-          <a:p>
-            <a:pPr marL="342900" indent="-342900">
-              <a:buFont typeface="Wingdings" panose="05000000000000000000" pitchFamily="2" charset="2"/>
-              <a:buChar char="Ø"/>
-            </a:pPr>
-            <a:r>
-              <a:rPr lang="en-US" sz="2000" b="1" dirty="0">
-                <a:latin typeface="Times New Roman" panose="02020603050405020304" pitchFamily="18" charset="0"/>
-                <a:cs typeface="Times New Roman" panose="02020603050405020304" pitchFamily="18" charset="0"/>
-              </a:rPr>
-              <a:t>Machine Learning &amp; Deep Learning</a:t>
-            </a:r>
-          </a:p>
-          <a:p>
-            <a:pPr marL="342900" indent="-342900">
-              <a:buFont typeface="Wingdings" panose="05000000000000000000" pitchFamily="2" charset="2"/>
-              <a:buChar char="ü"/>
-            </a:pPr>
-            <a:r>
-              <a:rPr lang="en-US" sz="2000" dirty="0">
-                <a:latin typeface="Times New Roman" panose="02020603050405020304" pitchFamily="18" charset="0"/>
-                <a:cs typeface="Times New Roman" panose="02020603050405020304" pitchFamily="18" charset="0"/>
-              </a:rPr>
-              <a:t>TensorFlow</a:t>
-            </a:r>
-          </a:p>
-          <a:p>
-            <a:pPr marL="342900" indent="-342900">
-              <a:buFont typeface="Wingdings" panose="05000000000000000000" pitchFamily="2" charset="2"/>
-              <a:buChar char="ü"/>
-            </a:pPr>
-            <a:r>
-              <a:rPr lang="en-US" sz="2000" dirty="0" err="1">
-                <a:latin typeface="Times New Roman" panose="02020603050405020304" pitchFamily="18" charset="0"/>
-                <a:cs typeface="Times New Roman" panose="02020603050405020304" pitchFamily="18" charset="0"/>
-              </a:rPr>
-              <a:t>KerasLSTM</a:t>
-            </a:r>
-            <a:r>
-              <a:rPr lang="en-US" sz="2000" dirty="0">
-                <a:latin typeface="Times New Roman" panose="02020603050405020304" pitchFamily="18" charset="0"/>
-                <a:cs typeface="Times New Roman" panose="02020603050405020304" pitchFamily="18" charset="0"/>
-              </a:rPr>
-              <a:t> (Long Short-Term Memory Neural Network)</a:t>
-            </a:r>
-          </a:p>
-          <a:p>
-            <a:pPr marL="342900" indent="-342900">
-              <a:buFont typeface="Wingdings" panose="05000000000000000000" pitchFamily="2" charset="2"/>
-              <a:buChar char="ü"/>
-            </a:pPr>
-            <a:r>
-              <a:rPr lang="en-US" sz="2000" dirty="0">
-                <a:latin typeface="Times New Roman" panose="02020603050405020304" pitchFamily="18" charset="0"/>
-                <a:cs typeface="Times New Roman" panose="02020603050405020304" pitchFamily="18" charset="0"/>
-              </a:rPr>
-              <a:t>Scikit-learn</a:t>
-            </a:r>
-          </a:p>
-          <a:p>
-            <a:pPr marL="342900" indent="-342900">
-              <a:buFont typeface="Wingdings" panose="05000000000000000000" pitchFamily="2" charset="2"/>
-              <a:buChar char="ü"/>
-            </a:pPr>
-            <a:r>
-              <a:rPr lang="en-US" sz="2000" dirty="0">
-                <a:latin typeface="Times New Roman" panose="02020603050405020304" pitchFamily="18" charset="0"/>
-                <a:cs typeface="Times New Roman" panose="02020603050405020304" pitchFamily="18" charset="0"/>
-              </a:rPr>
-              <a:t>SMOTE (for class imbalance handling)</a:t>
-            </a:r>
-          </a:p>
-          <a:p>
-            <a:pPr marL="342900" indent="-342900">
-              <a:buFont typeface="Wingdings" panose="05000000000000000000" pitchFamily="2" charset="2"/>
-              <a:buChar char="ü"/>
-            </a:pPr>
-            <a:endParaRPr lang="en-US" sz="2000" dirty="0">
-              <a:latin typeface="Times New Roman" panose="02020603050405020304" pitchFamily="18" charset="0"/>
-              <a:cs typeface="Times New Roman" panose="02020603050405020304" pitchFamily="18" charset="0"/>
-            </a:endParaRPr>
-          </a:p>
-          <a:p>
-            <a:endParaRPr lang="en-US" sz="2000" dirty="0">
-              <a:latin typeface="Times New Roman" panose="02020603050405020304" pitchFamily="18" charset="0"/>
-              <a:cs typeface="Times New Roman" panose="02020603050405020304" pitchFamily="18" charset="0"/>
-            </a:endParaRPr>
-          </a:p>
-          <a:p>
-            <a:pPr marL="342900" indent="-342900">
-              <a:buFont typeface="Wingdings" panose="05000000000000000000" pitchFamily="2" charset="2"/>
-              <a:buChar char="Ø"/>
-            </a:pPr>
-            <a:endParaRPr lang="en-US" sz="2000" dirty="0">
-              <a:latin typeface="Times New Roman" panose="02020603050405020304" pitchFamily="18" charset="0"/>
-              <a:cs typeface="Times New Roman" panose="02020603050405020304" pitchFamily="18" charset="0"/>
-            </a:endParaRPr>
-          </a:p>
-        </p:txBody>
-      </p:sp>
-    </p:spTree>
-    <p:extLst>
-      <p:ext uri="{BB962C8B-B14F-4D97-AF65-F5344CB8AC3E}">
-        <p14:creationId xmlns:p14="http://schemas.microsoft.com/office/powerpoint/2010/main" val="2232911322"/>
-      </p:ext>
-    </p:extLst>
-  </p:cSld>
-  <p:clrMapOvr>
-    <a:masterClrMapping/>
-  </p:clrMapOvr>
-</p:sld>
-</file>
-
-<file path=ppt/slides/slide11.xml><?xml version="1.0" encoding="utf-8"?>
-<p:sld xmlns:a="http://schemas.openxmlformats.org/drawingml/2006/main" xmlns:r="http://schemas.openxmlformats.org/officeDocument/2006/relationships" xmlns:p="http://schemas.openxmlformats.org/presentationml/2006/main">
-  <p:cSld>
-    <p:spTree>
-      <p:nvGrpSpPr>
-        <p:cNvPr id="1" name="">
-          <a:extLst>
-            <a:ext uri="{FF2B5EF4-FFF2-40B4-BE49-F238E27FC236}">
-              <a16:creationId xmlns:a16="http://schemas.microsoft.com/office/drawing/2014/main" id="{E88DE268-9F6D-A81F-5378-7FA45AA68F64}"/>
-            </a:ext>
-          </a:extLst>
-        </p:cNvPr>
-        <p:cNvGrpSpPr/>
-        <p:nvPr/>
-      </p:nvGrpSpPr>
-      <p:grpSpPr>
-        <a:xfrm>
-          <a:off x="0" y="0"/>
-          <a:ext cx="0" cy="0"/>
-          <a:chOff x="0" y="0"/>
-          <a:chExt cx="0" cy="0"/>
-        </a:xfrm>
-      </p:grpSpPr>
-      <p:sp>
-        <p:nvSpPr>
-          <p:cNvPr id="2" name="TextBox 1">
-            <a:extLst>
-              <a:ext uri="{FF2B5EF4-FFF2-40B4-BE49-F238E27FC236}">
-                <a16:creationId xmlns:a16="http://schemas.microsoft.com/office/drawing/2014/main" id="{5D53F026-F5DB-DDE2-43F2-F834CBE92A42}"/>
-              </a:ext>
-            </a:extLst>
-          </p:cNvPr>
-          <p:cNvSpPr txBox="1"/>
-          <p:nvPr/>
-        </p:nvSpPr>
-        <p:spPr>
-          <a:xfrm>
-            <a:off x="265471" y="196645"/>
-            <a:ext cx="11661058" cy="523220"/>
-          </a:xfrm>
-          <a:prstGeom prst="rect">
-            <a:avLst/>
-          </a:prstGeom>
-          <a:noFill/>
-        </p:spPr>
-        <p:txBody>
-          <a:bodyPr wrap="square" rtlCol="0">
-            <a:spAutoFit/>
-          </a:bodyPr>
-          <a:lstStyle/>
-          <a:p>
-            <a:r>
-              <a:rPr lang="en-US" sz="2800" b="1" dirty="0"/>
-              <a:t>Technology Stack</a:t>
-            </a:r>
-          </a:p>
-        </p:txBody>
-      </p:sp>
-      <p:sp>
-        <p:nvSpPr>
-          <p:cNvPr id="3" name="TextBox 2">
-            <a:extLst>
-              <a:ext uri="{FF2B5EF4-FFF2-40B4-BE49-F238E27FC236}">
-                <a16:creationId xmlns:a16="http://schemas.microsoft.com/office/drawing/2014/main" id="{565F52EF-E9A8-F732-260A-5D982A1CF5E3}"/>
-              </a:ext>
-            </a:extLst>
-          </p:cNvPr>
-          <p:cNvSpPr txBox="1"/>
-          <p:nvPr/>
-        </p:nvSpPr>
-        <p:spPr>
-          <a:xfrm>
-            <a:off x="265470" y="2563818"/>
-            <a:ext cx="11661058" cy="4093428"/>
-          </a:xfrm>
-          <a:prstGeom prst="rect">
-            <a:avLst/>
-          </a:prstGeom>
-          <a:noFill/>
-        </p:spPr>
-        <p:txBody>
-          <a:bodyPr wrap="square" rtlCol="0">
-            <a:spAutoFit/>
-          </a:bodyPr>
-          <a:lstStyle/>
-          <a:p>
-            <a:pPr marL="342900" indent="-342900">
-              <a:buFont typeface="Wingdings" panose="05000000000000000000" pitchFamily="2" charset="2"/>
-              <a:buChar char="Ø"/>
-            </a:pPr>
-            <a:r>
-              <a:rPr lang="en-US" sz="2000" b="1" dirty="0">
-                <a:latin typeface="Times New Roman" panose="02020603050405020304" pitchFamily="18" charset="0"/>
-                <a:cs typeface="Times New Roman" panose="02020603050405020304" pitchFamily="18" charset="0"/>
-              </a:rPr>
-              <a:t>Data Processing &amp; Analysis</a:t>
-            </a:r>
-          </a:p>
-          <a:p>
-            <a:pPr marL="342900" indent="-342900">
-              <a:buFont typeface="Wingdings" panose="05000000000000000000" pitchFamily="2" charset="2"/>
-              <a:buChar char="ü"/>
-            </a:pPr>
-            <a:r>
-              <a:rPr lang="en-US" sz="2000" dirty="0">
-                <a:latin typeface="Times New Roman" panose="02020603050405020304" pitchFamily="18" charset="0"/>
-                <a:cs typeface="Times New Roman" panose="02020603050405020304" pitchFamily="18" charset="0"/>
-              </a:rPr>
-              <a:t>Pandas</a:t>
-            </a:r>
-          </a:p>
-          <a:p>
-            <a:pPr marL="342900" indent="-342900">
-              <a:buFont typeface="Wingdings" panose="05000000000000000000" pitchFamily="2" charset="2"/>
-              <a:buChar char="ü"/>
-            </a:pPr>
-            <a:r>
-              <a:rPr lang="en-US" sz="2000" dirty="0">
-                <a:latin typeface="Times New Roman" panose="02020603050405020304" pitchFamily="18" charset="0"/>
-                <a:cs typeface="Times New Roman" panose="02020603050405020304" pitchFamily="18" charset="0"/>
-              </a:rPr>
-              <a:t>NumPy</a:t>
-            </a:r>
-          </a:p>
-          <a:p>
-            <a:pPr marL="342900" indent="-342900">
-              <a:buFont typeface="Wingdings" panose="05000000000000000000" pitchFamily="2" charset="2"/>
-              <a:buChar char="ü"/>
-            </a:pPr>
-            <a:r>
-              <a:rPr lang="en-US" sz="2000" dirty="0" err="1">
-                <a:latin typeface="Times New Roman" panose="02020603050405020304" pitchFamily="18" charset="0"/>
-                <a:cs typeface="Times New Roman" panose="02020603050405020304" pitchFamily="18" charset="0"/>
-              </a:rPr>
-              <a:t>Jupyter</a:t>
-            </a:r>
-            <a:r>
-              <a:rPr lang="en-US" sz="2000" dirty="0">
-                <a:latin typeface="Times New Roman" panose="02020603050405020304" pitchFamily="18" charset="0"/>
-                <a:cs typeface="Times New Roman" panose="02020603050405020304" pitchFamily="18" charset="0"/>
-              </a:rPr>
-              <a:t> Notebook</a:t>
-            </a:r>
-          </a:p>
-          <a:p>
-            <a:pPr marL="342900" indent="-342900">
-              <a:buFont typeface="Wingdings" panose="05000000000000000000" pitchFamily="2" charset="2"/>
-              <a:buChar char="ü"/>
-            </a:pPr>
-            <a:endParaRPr lang="en-US" sz="2000" dirty="0">
-              <a:latin typeface="Times New Roman" panose="02020603050405020304" pitchFamily="18" charset="0"/>
-              <a:cs typeface="Times New Roman" panose="02020603050405020304" pitchFamily="18" charset="0"/>
-            </a:endParaRPr>
-          </a:p>
-          <a:p>
-            <a:pPr marL="342900" indent="-342900">
-              <a:buFont typeface="Wingdings" panose="05000000000000000000" pitchFamily="2" charset="2"/>
-              <a:buChar char="Ø"/>
-            </a:pPr>
-            <a:r>
-              <a:rPr lang="en-US" sz="2000" b="1" dirty="0">
-                <a:latin typeface="Times New Roman" panose="02020603050405020304" pitchFamily="18" charset="0"/>
-                <a:cs typeface="Times New Roman" panose="02020603050405020304" pitchFamily="18" charset="0"/>
-              </a:rPr>
-              <a:t>Frontend Development</a:t>
-            </a:r>
-          </a:p>
-          <a:p>
-            <a:pPr marL="342900" indent="-342900">
-              <a:buFont typeface="Wingdings" panose="05000000000000000000" pitchFamily="2" charset="2"/>
-              <a:buChar char="ü"/>
-            </a:pPr>
-            <a:r>
-              <a:rPr lang="en-US" sz="2000" dirty="0">
-                <a:latin typeface="Times New Roman" panose="02020603050405020304" pitchFamily="18" charset="0"/>
-                <a:cs typeface="Times New Roman" panose="02020603050405020304" pitchFamily="18" charset="0"/>
-              </a:rPr>
-              <a:t>HTML</a:t>
-            </a:r>
-          </a:p>
-          <a:p>
-            <a:pPr marL="342900" indent="-342900">
-              <a:buFont typeface="Wingdings" panose="05000000000000000000" pitchFamily="2" charset="2"/>
-              <a:buChar char="ü"/>
-            </a:pPr>
-            <a:r>
-              <a:rPr lang="en-US" sz="2000" dirty="0">
-                <a:latin typeface="Times New Roman" panose="02020603050405020304" pitchFamily="18" charset="0"/>
-                <a:cs typeface="Times New Roman" panose="02020603050405020304" pitchFamily="18" charset="0"/>
-              </a:rPr>
-              <a:t>CSS</a:t>
-            </a:r>
-          </a:p>
-          <a:p>
-            <a:pPr marL="342900" indent="-342900">
-              <a:buFont typeface="Wingdings" panose="05000000000000000000" pitchFamily="2" charset="2"/>
-              <a:buChar char="ü"/>
-            </a:pPr>
-            <a:r>
-              <a:rPr lang="en-US" sz="2000" dirty="0" err="1">
-                <a:latin typeface="Times New Roman" panose="02020603050405020304" pitchFamily="18" charset="0"/>
-                <a:cs typeface="Times New Roman" panose="02020603050405020304" pitchFamily="18" charset="0"/>
-              </a:rPr>
-              <a:t>Javascript</a:t>
-            </a:r>
-            <a:endParaRPr lang="en-US" sz="2000" dirty="0">
-              <a:latin typeface="Times New Roman" panose="02020603050405020304" pitchFamily="18" charset="0"/>
-              <a:cs typeface="Times New Roman" panose="02020603050405020304" pitchFamily="18" charset="0"/>
-            </a:endParaRPr>
-          </a:p>
-          <a:p>
-            <a:pPr marL="342900" indent="-342900">
-              <a:buFont typeface="Wingdings" panose="05000000000000000000" pitchFamily="2" charset="2"/>
-              <a:buChar char="ü"/>
-            </a:pPr>
-            <a:endParaRPr lang="en-US" sz="2000" dirty="0">
-              <a:latin typeface="Times New Roman" panose="02020603050405020304" pitchFamily="18" charset="0"/>
-              <a:cs typeface="Times New Roman" panose="02020603050405020304" pitchFamily="18" charset="0"/>
-            </a:endParaRPr>
-          </a:p>
-          <a:p>
-            <a:pPr marL="342900" indent="-342900">
-              <a:buFont typeface="Wingdings" panose="05000000000000000000" pitchFamily="2" charset="2"/>
-              <a:buChar char="Ø"/>
-            </a:pPr>
-            <a:r>
-              <a:rPr lang="en-US" sz="2000" b="1" dirty="0">
-                <a:latin typeface="Times New Roman" panose="02020603050405020304" pitchFamily="18" charset="0"/>
-                <a:cs typeface="Times New Roman" panose="02020603050405020304" pitchFamily="18" charset="0"/>
-              </a:rPr>
-              <a:t>Visualization</a:t>
-            </a:r>
-          </a:p>
-          <a:p>
-            <a:pPr marL="342900" indent="-342900">
-              <a:buFont typeface="Wingdings" panose="05000000000000000000" pitchFamily="2" charset="2"/>
-              <a:buChar char="ü"/>
-            </a:pPr>
-            <a:r>
-              <a:rPr lang="en-US" sz="2000" dirty="0"/>
-              <a:t>Tableau Public</a:t>
-            </a:r>
-          </a:p>
-          <a:p>
-            <a:endParaRPr lang="en-US" sz="2000" dirty="0">
-              <a:latin typeface="Times New Roman" panose="02020603050405020304" pitchFamily="18" charset="0"/>
-              <a:cs typeface="Times New Roman" panose="02020603050405020304" pitchFamily="18" charset="0"/>
-            </a:endParaRPr>
-          </a:p>
-        </p:txBody>
-      </p:sp>
-      <p:sp>
-        <p:nvSpPr>
-          <p:cNvPr id="4" name="TextBox 3">
-            <a:extLst>
-              <a:ext uri="{FF2B5EF4-FFF2-40B4-BE49-F238E27FC236}">
-                <a16:creationId xmlns:a16="http://schemas.microsoft.com/office/drawing/2014/main" id="{0375B4EA-9D8E-1A99-132E-87A8629B9F85}"/>
-              </a:ext>
-            </a:extLst>
-          </p:cNvPr>
-          <p:cNvSpPr txBox="1"/>
-          <p:nvPr/>
-        </p:nvSpPr>
-        <p:spPr>
-          <a:xfrm>
-            <a:off x="265470" y="815048"/>
-            <a:ext cx="11661058" cy="707886"/>
-          </a:xfrm>
-          <a:prstGeom prst="rect">
-            <a:avLst/>
-          </a:prstGeom>
-          <a:noFill/>
-        </p:spPr>
-        <p:txBody>
-          <a:bodyPr wrap="square" rtlCol="0">
-            <a:spAutoFit/>
-          </a:bodyPr>
-          <a:lstStyle/>
-          <a:p>
-            <a:pPr marL="285750" indent="-285750">
-              <a:buFont typeface="Wingdings" panose="05000000000000000000" pitchFamily="2" charset="2"/>
-              <a:buChar char="Ø"/>
-            </a:pPr>
-            <a:r>
-              <a:rPr lang="en-US" sz="2000" b="1" dirty="0">
-                <a:latin typeface="Times New Roman" panose="02020603050405020304" pitchFamily="18" charset="0"/>
-                <a:cs typeface="Times New Roman" panose="02020603050405020304" pitchFamily="18" charset="0"/>
-              </a:rPr>
-              <a:t>Cloud &amp; Database</a:t>
-            </a:r>
-          </a:p>
-          <a:p>
-            <a:pPr marL="342900" indent="-342900">
-              <a:buFont typeface="Wingdings" panose="05000000000000000000" pitchFamily="2" charset="2"/>
-              <a:buChar char="ü"/>
-            </a:pPr>
-            <a:r>
-              <a:rPr lang="en-US" sz="2000" dirty="0" err="1"/>
-              <a:t>Supabase</a:t>
-            </a:r>
-            <a:endParaRPr lang="en-US" sz="2000" dirty="0">
-              <a:latin typeface="Times New Roman" panose="02020603050405020304" pitchFamily="18" charset="0"/>
-              <a:cs typeface="Times New Roman" panose="02020603050405020304" pitchFamily="18" charset="0"/>
-            </a:endParaRPr>
-          </a:p>
-        </p:txBody>
-      </p:sp>
-      <p:sp>
-        <p:nvSpPr>
-          <p:cNvPr id="5" name="TextBox 4">
-            <a:extLst>
-              <a:ext uri="{FF2B5EF4-FFF2-40B4-BE49-F238E27FC236}">
-                <a16:creationId xmlns:a16="http://schemas.microsoft.com/office/drawing/2014/main" id="{3276B693-3FB5-31F7-B40B-15F91AF78375}"/>
-              </a:ext>
-            </a:extLst>
-          </p:cNvPr>
-          <p:cNvSpPr txBox="1"/>
-          <p:nvPr/>
-        </p:nvSpPr>
-        <p:spPr>
-          <a:xfrm>
-            <a:off x="648929" y="1522934"/>
-            <a:ext cx="11277599" cy="923330"/>
-          </a:xfrm>
-          <a:prstGeom prst="rect">
-            <a:avLst/>
-          </a:prstGeom>
-          <a:noFill/>
-        </p:spPr>
-        <p:txBody>
-          <a:bodyPr wrap="square" rtlCol="0">
-            <a:spAutoFit/>
-          </a:bodyPr>
-          <a:lstStyle/>
-          <a:p>
-            <a:pPr marL="285750" indent="-285750">
-              <a:buFont typeface="Arial" panose="020B0604020202020204" pitchFamily="34" charset="0"/>
-              <a:buChar char="•"/>
-            </a:pPr>
-            <a:r>
-              <a:rPr lang="en-US" dirty="0" err="1"/>
-              <a:t>Supabase</a:t>
-            </a:r>
-            <a:r>
-              <a:rPr lang="en-US" dirty="0"/>
-              <a:t> PostgreSQL (Database)</a:t>
-            </a:r>
-          </a:p>
-          <a:p>
-            <a:pPr marL="285750" indent="-285750">
-              <a:buFont typeface="Arial" panose="020B0604020202020204" pitchFamily="34" charset="0"/>
-              <a:buChar char="•"/>
-            </a:pPr>
-            <a:r>
-              <a:rPr lang="en-US" dirty="0" err="1"/>
-              <a:t>Supabase</a:t>
-            </a:r>
-            <a:r>
-              <a:rPr lang="en-US" dirty="0"/>
-              <a:t> Storage (Cloud Storage)</a:t>
-            </a:r>
-          </a:p>
-          <a:p>
-            <a:pPr marL="285750" indent="-285750">
-              <a:buFont typeface="Arial" panose="020B0604020202020204" pitchFamily="34" charset="0"/>
-              <a:buChar char="•"/>
-            </a:pPr>
-            <a:r>
-              <a:rPr lang="en-US" dirty="0" err="1"/>
-              <a:t>Supabase</a:t>
-            </a:r>
-            <a:r>
-              <a:rPr lang="en-US" dirty="0"/>
-              <a:t> Auth (Authentication)</a:t>
-            </a:r>
-          </a:p>
-        </p:txBody>
-      </p:sp>
-    </p:spTree>
-    <p:extLst>
-      <p:ext uri="{BB962C8B-B14F-4D97-AF65-F5344CB8AC3E}">
-        <p14:creationId xmlns:p14="http://schemas.microsoft.com/office/powerpoint/2010/main" val="3005237376"/>
-      </p:ext>
-    </p:extLst>
-  </p:cSld>
-  <p:clrMapOvr>
-    <a:masterClrMapping/>
-  </p:clrMapOvr>
-</p:sld>
-</file>
-
-<file path=ppt/slides/slide12.xml><?xml version="1.0" encoding="utf-8"?>
-<p:sld xmlns:a="http://schemas.openxmlformats.org/drawingml/2006/main" xmlns:r="http://schemas.openxmlformats.org/officeDocument/2006/relationships" xmlns:p="http://schemas.openxmlformats.org/presentationml/2006/main">
-  <p:cSld>
-    <p:spTree>
-      <p:nvGrpSpPr>
-        <p:cNvPr id="1" name="">
-          <a:extLst>
-            <a:ext uri="{FF2B5EF4-FFF2-40B4-BE49-F238E27FC236}">
-              <a16:creationId xmlns:a16="http://schemas.microsoft.com/office/drawing/2014/main" id="{6E68B785-70A1-FE73-7CB4-D80FEBDF6441}"/>
-            </a:ext>
-          </a:extLst>
-        </p:cNvPr>
-        <p:cNvGrpSpPr/>
-        <p:nvPr/>
-      </p:nvGrpSpPr>
-      <p:grpSpPr>
-        <a:xfrm>
-          <a:off x="0" y="0"/>
-          <a:ext cx="0" cy="0"/>
-          <a:chOff x="0" y="0"/>
-          <a:chExt cx="0" cy="0"/>
-        </a:xfrm>
-      </p:grpSpPr>
-      <p:sp>
-        <p:nvSpPr>
-          <p:cNvPr id="2" name="TextBox 1">
-            <a:extLst>
-              <a:ext uri="{FF2B5EF4-FFF2-40B4-BE49-F238E27FC236}">
-                <a16:creationId xmlns:a16="http://schemas.microsoft.com/office/drawing/2014/main" id="{98F204D3-8311-111B-B37A-C77025B300C5}"/>
-              </a:ext>
-            </a:extLst>
-          </p:cNvPr>
-          <p:cNvSpPr txBox="1"/>
-          <p:nvPr/>
-        </p:nvSpPr>
-        <p:spPr>
-          <a:xfrm>
-            <a:off x="265471" y="196645"/>
-            <a:ext cx="11661058" cy="523220"/>
-          </a:xfrm>
-          <a:prstGeom prst="rect">
-            <a:avLst/>
-          </a:prstGeom>
-          <a:noFill/>
-        </p:spPr>
-        <p:txBody>
-          <a:bodyPr wrap="square" rtlCol="0">
-            <a:spAutoFit/>
-          </a:bodyPr>
-          <a:lstStyle/>
-          <a:p>
-            <a:r>
-              <a:rPr lang="en-US" sz="2800" b="1" dirty="0"/>
-              <a:t>Technology Stack</a:t>
-            </a:r>
-          </a:p>
-        </p:txBody>
-      </p:sp>
-      <p:sp>
-        <p:nvSpPr>
-          <p:cNvPr id="3" name="TextBox 2">
-            <a:extLst>
-              <a:ext uri="{FF2B5EF4-FFF2-40B4-BE49-F238E27FC236}">
-                <a16:creationId xmlns:a16="http://schemas.microsoft.com/office/drawing/2014/main" id="{3217FF82-EC34-378F-BF4D-20907721855C}"/>
-              </a:ext>
-            </a:extLst>
-          </p:cNvPr>
-          <p:cNvSpPr txBox="1"/>
-          <p:nvPr/>
-        </p:nvSpPr>
-        <p:spPr>
-          <a:xfrm>
-            <a:off x="265470" y="815048"/>
-            <a:ext cx="11661058" cy="2246769"/>
-          </a:xfrm>
-          <a:prstGeom prst="rect">
-            <a:avLst/>
-          </a:prstGeom>
-          <a:noFill/>
-        </p:spPr>
-        <p:txBody>
-          <a:bodyPr wrap="square" rtlCol="0">
-            <a:spAutoFit/>
-          </a:bodyPr>
-          <a:lstStyle/>
-          <a:p>
-            <a:pPr marL="342900" indent="-342900">
-              <a:buFont typeface="Wingdings" panose="05000000000000000000" pitchFamily="2" charset="2"/>
-              <a:buChar char="Ø"/>
-            </a:pPr>
-            <a:r>
-              <a:rPr lang="en-US" sz="2000" b="1" dirty="0">
-                <a:latin typeface="Times New Roman" panose="02020603050405020304" pitchFamily="18" charset="0"/>
-                <a:cs typeface="Times New Roman" panose="02020603050405020304" pitchFamily="18" charset="0"/>
-              </a:rPr>
-              <a:t>Version Control</a:t>
-            </a:r>
-          </a:p>
-          <a:p>
-            <a:pPr marL="342900" indent="-342900">
-              <a:buFont typeface="Wingdings" panose="05000000000000000000" pitchFamily="2" charset="2"/>
-              <a:buChar char="ü"/>
-            </a:pPr>
-            <a:r>
-              <a:rPr lang="en-US" sz="2000" dirty="0">
-                <a:latin typeface="Times New Roman" panose="02020603050405020304" pitchFamily="18" charset="0"/>
-                <a:cs typeface="Times New Roman" panose="02020603050405020304" pitchFamily="18" charset="0"/>
-              </a:rPr>
-              <a:t>Git</a:t>
-            </a:r>
-          </a:p>
-          <a:p>
-            <a:endParaRPr lang="en-US" sz="2000" dirty="0">
-              <a:latin typeface="Times New Roman" panose="02020603050405020304" pitchFamily="18" charset="0"/>
-              <a:cs typeface="Times New Roman" panose="02020603050405020304" pitchFamily="18" charset="0"/>
-            </a:endParaRPr>
-          </a:p>
-          <a:p>
-            <a:pPr marL="342900" indent="-342900">
-              <a:buFont typeface="Wingdings" panose="05000000000000000000" pitchFamily="2" charset="2"/>
-              <a:buChar char="Ø"/>
-            </a:pPr>
-            <a:r>
-              <a:rPr lang="en-US" sz="2000" b="1" dirty="0">
-                <a:latin typeface="Times New Roman" panose="02020603050405020304" pitchFamily="18" charset="0"/>
-                <a:cs typeface="Times New Roman" panose="02020603050405020304" pitchFamily="18" charset="0"/>
-              </a:rPr>
-              <a:t>Development Tools</a:t>
-            </a:r>
-            <a:endParaRPr lang="en-US" sz="2000" b="1" dirty="0"/>
-          </a:p>
-          <a:p>
-            <a:pPr marL="342900" indent="-342900">
-              <a:buFont typeface="Wingdings" panose="05000000000000000000" pitchFamily="2" charset="2"/>
-              <a:buChar char="ü"/>
-            </a:pPr>
-            <a:r>
-              <a:rPr lang="en-US" sz="2000" dirty="0"/>
-              <a:t>VS Code</a:t>
-            </a:r>
-          </a:p>
-          <a:p>
-            <a:pPr marL="342900" indent="-342900">
-              <a:buFont typeface="Wingdings" panose="05000000000000000000" pitchFamily="2" charset="2"/>
-              <a:buChar char="ü"/>
-            </a:pPr>
-            <a:r>
-              <a:rPr lang="en-US" sz="2000" dirty="0" err="1"/>
-              <a:t>Jupyter</a:t>
-            </a:r>
-            <a:r>
-              <a:rPr lang="en-US" sz="2000" dirty="0"/>
-              <a:t> Notebook</a:t>
-            </a:r>
-          </a:p>
-          <a:p>
-            <a:pPr marL="342900" indent="-342900">
-              <a:buFont typeface="Wingdings" panose="05000000000000000000" pitchFamily="2" charset="2"/>
-              <a:buChar char="Ø"/>
-            </a:pPr>
-            <a:endParaRPr lang="en-US" sz="2000" dirty="0"/>
-          </a:p>
-        </p:txBody>
-      </p:sp>
-    </p:spTree>
-    <p:extLst>
-      <p:ext uri="{BB962C8B-B14F-4D97-AF65-F5344CB8AC3E}">
-        <p14:creationId xmlns:p14="http://schemas.microsoft.com/office/powerpoint/2010/main" val="4500555"/>
-      </p:ext>
-    </p:extLst>
-  </p:cSld>
-  <p:clrMapOvr>
-    <a:masterClrMapping/>
-  </p:clrMapOvr>
-</p:sld>
-</file>
-
-<file path=ppt/slides/slide13.xml><?xml version="1.0" encoding="utf-8"?>
-<p:sld xmlns:a="http://schemas.openxmlformats.org/drawingml/2006/main" xmlns:r="http://schemas.openxmlformats.org/officeDocument/2006/relationships" xmlns:p="http://schemas.openxmlformats.org/presentationml/2006/main">
-  <p:cSld>
-    <p:spTree>
-      <p:nvGrpSpPr>
-        <p:cNvPr id="1" name="">
-          <a:extLst>
-            <a:ext uri="{FF2B5EF4-FFF2-40B4-BE49-F238E27FC236}">
               <a16:creationId xmlns:a16="http://schemas.microsoft.com/office/drawing/2014/main" id="{C093F5B6-0A81-ED91-3840-230D805A7644}"/>
             </a:ext>
           </a:extLst>
@@ -6649,7 +5340,7 @@
 </p:sld>
 </file>
 
-<file path=ppt/slides/slide14.xml><?xml version="1.0" encoding="utf-8"?>
+<file path=ppt/slides/slide11.xml><?xml version="1.0" encoding="utf-8"?>
 <p:sld xmlns:a="http://schemas.openxmlformats.org/drawingml/2006/main" xmlns:r="http://schemas.openxmlformats.org/officeDocument/2006/relationships" xmlns:p="http://schemas.openxmlformats.org/presentationml/2006/main">
   <p:cSld>
     <p:spTree>
@@ -6831,7 +5522,7 @@
 </p:sld>
 </file>
 
-<file path=ppt/slides/slide15.xml><?xml version="1.0" encoding="utf-8"?>
+<file path=ppt/slides/slide12.xml><?xml version="1.0" encoding="utf-8"?>
 <p:sld xmlns:a="http://schemas.openxmlformats.org/drawingml/2006/main" xmlns:r="http://schemas.openxmlformats.org/officeDocument/2006/relationships" xmlns:p="http://schemas.openxmlformats.org/presentationml/2006/main">
   <p:cSld>
     <p:spTree>
@@ -7000,7 +5691,7 @@
 </p:sld>
 </file>
 
-<file path=ppt/slides/slide16.xml><?xml version="1.0" encoding="utf-8"?>
+<file path=ppt/slides/slide13.xml><?xml version="1.0" encoding="utf-8"?>
 <p:sld xmlns:a="http://schemas.openxmlformats.org/drawingml/2006/main" xmlns:r="http://schemas.openxmlformats.org/officeDocument/2006/relationships" xmlns:p="http://schemas.openxmlformats.org/presentationml/2006/main">
   <p:cSld>
     <p:spTree>
@@ -7136,7 +5827,7 @@
 </p:sld>
 </file>
 
-<file path=ppt/slides/slide17.xml><?xml version="1.0" encoding="utf-8"?>
+<file path=ppt/slides/slide14.xml><?xml version="1.0" encoding="utf-8"?>
 <p:sld xmlns:a="http://schemas.openxmlformats.org/drawingml/2006/main" xmlns:r="http://schemas.openxmlformats.org/officeDocument/2006/relationships" xmlns:p="http://schemas.openxmlformats.org/presentationml/2006/main">
   <p:cSld>
     <p:spTree>

--- a/docs/Clg 2nd review.pptx
+++ b/docs/Clg 2nd review.pptx
@@ -213,7 +213,7 @@
           <a:p>
             <a:fld id="{C1BED7E8-5420-4F73-BA32-34A7030FE7D8}" type="datetimeFigureOut">
               <a:rPr lang="en-US" smtClean="0"/>
-              <a:t>4/8/2026</a:t>
+              <a:t>4/6/2026</a:t>
             </a:fld>
             <a:endParaRPr lang="en-US"/>
           </a:p>
@@ -2091,7 +2091,7 @@
           <a:p>
             <a:fld id="{C198EE3F-C531-4F47-81BE-EB7857D8F039}" type="datetimeFigureOut">
               <a:rPr lang="en-US" smtClean="0"/>
-              <a:t>4/8/2026</a:t>
+              <a:t>4/6/2026</a:t>
             </a:fld>
             <a:endParaRPr lang="en-US"/>
           </a:p>
@@ -2289,7 +2289,7 @@
           <a:p>
             <a:fld id="{C198EE3F-C531-4F47-81BE-EB7857D8F039}" type="datetimeFigureOut">
               <a:rPr lang="en-US" smtClean="0"/>
-              <a:t>4/8/2026</a:t>
+              <a:t>4/6/2026</a:t>
             </a:fld>
             <a:endParaRPr lang="en-US"/>
           </a:p>
@@ -2497,7 +2497,7 @@
           <a:p>
             <a:fld id="{C198EE3F-C531-4F47-81BE-EB7857D8F039}" type="datetimeFigureOut">
               <a:rPr lang="en-US" smtClean="0"/>
-              <a:t>4/8/2026</a:t>
+              <a:t>4/6/2026</a:t>
             </a:fld>
             <a:endParaRPr lang="en-US"/>
           </a:p>
@@ -2695,7 +2695,7 @@
           <a:p>
             <a:fld id="{C198EE3F-C531-4F47-81BE-EB7857D8F039}" type="datetimeFigureOut">
               <a:rPr lang="en-US" smtClean="0"/>
-              <a:t>4/8/2026</a:t>
+              <a:t>4/6/2026</a:t>
             </a:fld>
             <a:endParaRPr lang="en-US"/>
           </a:p>
@@ -2970,7 +2970,7 @@
           <a:p>
             <a:fld id="{C198EE3F-C531-4F47-81BE-EB7857D8F039}" type="datetimeFigureOut">
               <a:rPr lang="en-US" smtClean="0"/>
-              <a:t>4/8/2026</a:t>
+              <a:t>4/6/2026</a:t>
             </a:fld>
             <a:endParaRPr lang="en-US"/>
           </a:p>
@@ -3235,7 +3235,7 @@
           <a:p>
             <a:fld id="{C198EE3F-C531-4F47-81BE-EB7857D8F039}" type="datetimeFigureOut">
               <a:rPr lang="en-US" smtClean="0"/>
-              <a:t>4/8/2026</a:t>
+              <a:t>4/6/2026</a:t>
             </a:fld>
             <a:endParaRPr lang="en-US"/>
           </a:p>
@@ -3647,7 +3647,7 @@
           <a:p>
             <a:fld id="{C198EE3F-C531-4F47-81BE-EB7857D8F039}" type="datetimeFigureOut">
               <a:rPr lang="en-US" smtClean="0"/>
-              <a:t>4/8/2026</a:t>
+              <a:t>4/6/2026</a:t>
             </a:fld>
             <a:endParaRPr lang="en-US"/>
           </a:p>
@@ -3788,7 +3788,7 @@
           <a:p>
             <a:fld id="{C198EE3F-C531-4F47-81BE-EB7857D8F039}" type="datetimeFigureOut">
               <a:rPr lang="en-US" smtClean="0"/>
-              <a:t>4/8/2026</a:t>
+              <a:t>4/6/2026</a:t>
             </a:fld>
             <a:endParaRPr lang="en-US"/>
           </a:p>
@@ -3901,7 +3901,7 @@
           <a:p>
             <a:fld id="{C198EE3F-C531-4F47-81BE-EB7857D8F039}" type="datetimeFigureOut">
               <a:rPr lang="en-US" smtClean="0"/>
-              <a:t>4/8/2026</a:t>
+              <a:t>4/6/2026</a:t>
             </a:fld>
             <a:endParaRPr lang="en-US"/>
           </a:p>
@@ -4212,7 +4212,7 @@
           <a:p>
             <a:fld id="{C198EE3F-C531-4F47-81BE-EB7857D8F039}" type="datetimeFigureOut">
               <a:rPr lang="en-US" smtClean="0"/>
-              <a:t>4/8/2026</a:t>
+              <a:t>4/6/2026</a:t>
             </a:fld>
             <a:endParaRPr lang="en-US"/>
           </a:p>
@@ -4500,7 +4500,7 @@
           <a:p>
             <a:fld id="{C198EE3F-C531-4F47-81BE-EB7857D8F039}" type="datetimeFigureOut">
               <a:rPr lang="en-US" smtClean="0"/>
-              <a:t>4/8/2026</a:t>
+              <a:t>4/6/2026</a:t>
             </a:fld>
             <a:endParaRPr lang="en-US"/>
           </a:p>
@@ -4741,7 +4741,7 @@
           <a:p>
             <a:fld id="{C198EE3F-C531-4F47-81BE-EB7857D8F039}" type="datetimeFigureOut">
               <a:rPr lang="en-US" smtClean="0"/>
-              <a:t>4/8/2026</a:t>
+              <a:t>4/6/2026</a:t>
             </a:fld>
             <a:endParaRPr lang="en-US"/>
           </a:p>
@@ -6722,7 +6722,7 @@
         <p:spPr>
           <a:xfrm>
             <a:off x="265471" y="792624"/>
-            <a:ext cx="11661058" cy="4401205"/>
+            <a:ext cx="11661058" cy="4093428"/>
           </a:xfrm>
           <a:prstGeom prst="rect">
             <a:avLst/>
@@ -6744,7 +6744,7 @@
                 <a:latin typeface="Times New Roman" panose="02020603050405020304" pitchFamily="18" charset="0"/>
                 <a:cs typeface="Times New Roman" panose="02020603050405020304" pitchFamily="18" charset="0"/>
               </a:rPr>
-              <a:t>Proactive Failure Prevention &amp; Asset Longevity: Reduces unexpected breakdowns and significantly increases equipment lifespan by continuously monitoring performance to detect early degradation and predict potential failures in advance.</a:t>
+              <a:t>Reduces unexpected breakdowns by predicting potential failures in advance and enabling timely preventive maintenance actions.</a:t>
             </a:r>
           </a:p>
           <a:p>
@@ -6752,10 +6752,13 @@
               <a:buFont typeface="Wingdings" panose="05000000000000000000" pitchFamily="2" charset="2"/>
               <a:buChar char="Ø"/>
             </a:pPr>
-            <a:endParaRPr lang="en-US" sz="2000" dirty="0">
-              <a:latin typeface="Times New Roman" panose="02020603050405020304" pitchFamily="18" charset="0"/>
-              <a:cs typeface="Times New Roman" panose="02020603050405020304" pitchFamily="18" charset="0"/>
-            </a:endParaRPr>
+            <a:r>
+              <a:rPr lang="en-US" sz="2000" dirty="0">
+                <a:latin typeface="Times New Roman" panose="02020603050405020304" pitchFamily="18" charset="0"/>
+                <a:cs typeface="Times New Roman" panose="02020603050405020304" pitchFamily="18" charset="0"/>
+              </a:rPr>
+              <a:t>Minimizes maintenance costs by shifting from reactive repairs to planned maintenance based on equipment condition.</a:t>
+            </a:r>
           </a:p>
           <a:p>
             <a:pPr marL="342900" indent="-342900" algn="just">
@@ -6767,7 +6770,7 @@
                 <a:latin typeface="Times New Roman" panose="02020603050405020304" pitchFamily="18" charset="0"/>
                 <a:cs typeface="Times New Roman" panose="02020603050405020304" pitchFamily="18" charset="0"/>
               </a:rPr>
-              <a:t>Cost Optimization &amp; Operational Efficiency: Minimizes maintenance costs and improves overall efficiency by shifting from reactive repairs to planned, condition-based maintenance, optimizing schedules, and reducing production downtime.</a:t>
+              <a:t>Increases equipment lifespan through continuous monitoring and early detection of performance degradation.</a:t>
             </a:r>
           </a:p>
           <a:p>
@@ -6775,10 +6778,13 @@
               <a:buFont typeface="Wingdings" panose="05000000000000000000" pitchFamily="2" charset="2"/>
               <a:buChar char="Ø"/>
             </a:pPr>
-            <a:endParaRPr lang="en-US" sz="2000" dirty="0">
-              <a:latin typeface="Times New Roman" panose="02020603050405020304" pitchFamily="18" charset="0"/>
-              <a:cs typeface="Times New Roman" panose="02020603050405020304" pitchFamily="18" charset="0"/>
-            </a:endParaRPr>
+            <a:r>
+              <a:rPr lang="en-US" sz="2000" dirty="0">
+                <a:latin typeface="Times New Roman" panose="02020603050405020304" pitchFamily="18" charset="0"/>
+                <a:cs typeface="Times New Roman" panose="02020603050405020304" pitchFamily="18" charset="0"/>
+              </a:rPr>
+              <a:t>Provides real-time monitoring of equipment health parameters for faster decision-making and operational control.</a:t>
+            </a:r>
           </a:p>
           <a:p>
             <a:pPr marL="342900" indent="-342900" algn="just">
@@ -6790,7 +6796,7 @@
                 <a:latin typeface="Times New Roman" panose="02020603050405020304" pitchFamily="18" charset="0"/>
                 <a:cs typeface="Times New Roman" panose="02020603050405020304" pitchFamily="18" charset="0"/>
               </a:rPr>
-              <a:t>Real-Time Monitoring &amp; Agile Decision-Making: Provides real-time visibility into vital equipment health parameters, enabling faster, data-driven decision-making and enhanced operational control.</a:t>
+              <a:t>Ensures cloud scalability, allowing the system to handle increasing data volume and multiple equipment units efficiently.</a:t>
             </a:r>
           </a:p>
           <a:p>
@@ -6798,10 +6804,13 @@
               <a:buFont typeface="Wingdings" panose="05000000000000000000" pitchFamily="2" charset="2"/>
               <a:buChar char="Ø"/>
             </a:pPr>
-            <a:endParaRPr lang="en-US" sz="2000" dirty="0">
-              <a:latin typeface="Times New Roman" panose="02020603050405020304" pitchFamily="18" charset="0"/>
-              <a:cs typeface="Times New Roman" panose="02020603050405020304" pitchFamily="18" charset="0"/>
-            </a:endParaRPr>
+            <a:r>
+              <a:rPr lang="en-US" sz="2000" dirty="0">
+                <a:latin typeface="Times New Roman" panose="02020603050405020304" pitchFamily="18" charset="0"/>
+                <a:cs typeface="Times New Roman" panose="02020603050405020304" pitchFamily="18" charset="0"/>
+              </a:rPr>
+              <a:t>Offers secure data storage with authentication and controlled access to protect sensitive operational information.</a:t>
+            </a:r>
           </a:p>
           <a:p>
             <a:pPr marL="342900" indent="-342900" algn="just">
@@ -6813,7 +6822,7 @@
                 <a:latin typeface="Times New Roman" panose="02020603050405020304" pitchFamily="18" charset="0"/>
                 <a:cs typeface="Times New Roman" panose="02020603050405020304" pitchFamily="18" charset="0"/>
               </a:rPr>
-              <a:t>Scalable &amp; Secure Cloud Infrastructure: Leverages scalable cloud capabilities to efficiently handle increasing data volumes and multiple equipment units, while protecting sensitive operational information through secure data storage, authentication, and controlled access.</a:t>
+              <a:t>Improves overall operational efficiency by optimizing maintenance scheduling and reducing production downtime.</a:t>
             </a:r>
           </a:p>
         </p:txBody>
@@ -6926,7 +6935,7 @@
                 <a:latin typeface="Times New Roman" panose="02020603050405020304" pitchFamily="18" charset="0"/>
                 <a:cs typeface="Times New Roman" panose="02020603050405020304" pitchFamily="18" charset="0"/>
               </a:rPr>
-              <a:t>Data Quality &amp; Model Reliability: The effectiveness and accuracy of the machine learning model heavily depend on the quality of its training data; accurate, balanced historical data is essential to ensure reliable failure predictions.</a:t>
+              <a:t>Requires accurate historical data to train the machine learning model effectively and ensure reliable failure predictions.</a:t>
             </a:r>
           </a:p>
           <a:p>
@@ -6934,10 +6943,13 @@
               <a:buFont typeface="Wingdings" panose="05000000000000000000" pitchFamily="2" charset="2"/>
               <a:buChar char="Ø"/>
             </a:pPr>
-            <a:endParaRPr lang="en-US" sz="2000" dirty="0">
-              <a:latin typeface="Times New Roman" panose="02020603050405020304" pitchFamily="18" charset="0"/>
-              <a:cs typeface="Times New Roman" panose="02020603050405020304" pitchFamily="18" charset="0"/>
-            </a:endParaRPr>
+            <a:r>
+              <a:rPr lang="en-US" sz="2000" dirty="0">
+                <a:latin typeface="Times New Roman" panose="02020603050405020304" pitchFamily="18" charset="0"/>
+                <a:cs typeface="Times New Roman" panose="02020603050405020304" pitchFamily="18" charset="0"/>
+              </a:rPr>
+              <a:t>Initial setup cost is high, as it involves cloud infrastructure configuration, system development, and model training.</a:t>
+            </a:r>
           </a:p>
           <a:p>
             <a:pPr marL="342900" indent="-342900" algn="just">
@@ -6949,7 +6961,7 @@
                 <a:latin typeface="Times New Roman" panose="02020603050405020304" pitchFamily="18" charset="0"/>
                 <a:cs typeface="Times New Roman" panose="02020603050405020304" pitchFamily="18" charset="0"/>
               </a:rPr>
-              <a:t>High Initial Investment: Implementing the system involves significant upfront costs related to configuring cloud infrastructure, system development, and initial model training.</a:t>
+              <a:t>Model accuracy depends on training data quality, and poor or imbalanced data can reduce prediction performance.</a:t>
             </a:r>
           </a:p>
           <a:p>
@@ -6957,10 +6969,13 @@
               <a:buFont typeface="Wingdings" panose="05000000000000000000" pitchFamily="2" charset="2"/>
               <a:buChar char="Ø"/>
             </a:pPr>
-            <a:endParaRPr lang="en-US" sz="2000" dirty="0">
-              <a:latin typeface="Times New Roman" panose="02020603050405020304" pitchFamily="18" charset="0"/>
-              <a:cs typeface="Times New Roman" panose="02020603050405020304" pitchFamily="18" charset="0"/>
-            </a:endParaRPr>
+            <a:r>
+              <a:rPr lang="en-US" sz="2000" dirty="0">
+                <a:latin typeface="Times New Roman" panose="02020603050405020304" pitchFamily="18" charset="0"/>
+                <a:cs typeface="Times New Roman" panose="02020603050405020304" pitchFamily="18" charset="0"/>
+              </a:rPr>
+              <a:t>Requires stable internet connectivity for continuous cloud access, real-time monitoring, and data synchronization.</a:t>
+            </a:r>
           </a:p>
           <a:p>
             <a:pPr marL="342900" indent="-342900" algn="just">
@@ -6972,18 +6987,8 @@
                 <a:latin typeface="Times New Roman" panose="02020603050405020304" pitchFamily="18" charset="0"/>
                 <a:cs typeface="Times New Roman" panose="02020603050405020304" pitchFamily="18" charset="0"/>
               </a:rPr>
-              <a:t>Continuous Connectivity Requirement: The system strictly requires stable, uninterrupted internet connectivity to facilitate continuous cloud access, real-time monitoring, and seamless data synchronization.</a:t>
-            </a:r>
-          </a:p>
-          <a:p>
-            <a:pPr marL="342900" indent="-342900" algn="just">
-              <a:buFont typeface="Wingdings" panose="05000000000000000000" pitchFamily="2" charset="2"/>
-              <a:buChar char="Ø"/>
-            </a:pPr>
-            <a:endParaRPr lang="en-US" sz="2000" dirty="0">
-              <a:latin typeface="Times New Roman" panose="02020603050405020304" pitchFamily="18" charset="0"/>
-              <a:cs typeface="Times New Roman" panose="02020603050405020304" pitchFamily="18" charset="0"/>
-            </a:endParaRPr>
+              <a:t>Needs periodic model retraining to adapt to new failure patterns, changing equipment behavior, and updated operational conditions.</a:t>
+            </a:r>
           </a:p>
         </p:txBody>
       </p:sp>
@@ -7724,7 +7729,7 @@
                 <a:latin typeface="Times New Roman" panose="02020603050405020304" pitchFamily="18" charset="0"/>
                 <a:cs typeface="Times New Roman" panose="02020603050405020304" pitchFamily="18" charset="0"/>
               </a:rPr>
-              <a:t>The Flaws of Reactive Maintenance: Heavy reliance on traditional maintenance—repairing equipment only after it fails—results in unexpected breakdowns, significant production losses, high repair costs, and increased safety risks.</a:t>
+              <a:t>Unexpected equipment failures cause production loss, downtime, and high maintenance costs in many industries.</a:t>
             </a:r>
           </a:p>
           <a:p>
@@ -7732,10 +7737,41 @@
               <a:buFont typeface="Wingdings" panose="05000000000000000000" pitchFamily="2" charset="2"/>
               <a:buChar char="ü"/>
             </a:pPr>
-            <a:endParaRPr lang="en-US" sz="2000" dirty="0">
-              <a:latin typeface="Times New Roman" panose="02020603050405020304" pitchFamily="18" charset="0"/>
-              <a:cs typeface="Times New Roman" panose="02020603050405020304" pitchFamily="18" charset="0"/>
-            </a:endParaRPr>
+            <a:r>
+              <a:rPr lang="en-US" sz="2000" dirty="0">
+                <a:latin typeface="Times New Roman" panose="02020603050405020304" pitchFamily="18" charset="0"/>
+                <a:cs typeface="Times New Roman" panose="02020603050405020304" pitchFamily="18" charset="0"/>
+              </a:rPr>
+              <a:t>Traditional maintenance happens after equipment fails. This causes production </a:t>
+            </a:r>
+            <a:r>
+              <a:rPr lang="en-US" sz="2000" dirty="0" err="1">
+                <a:latin typeface="Times New Roman" panose="02020603050405020304" pitchFamily="18" charset="0"/>
+                <a:cs typeface="Times New Roman" panose="02020603050405020304" pitchFamily="18" charset="0"/>
+              </a:rPr>
+              <a:t>loss,repair</a:t>
+            </a:r>
+            <a:r>
+              <a:rPr lang="en-US" sz="2000" dirty="0">
+                <a:latin typeface="Times New Roman" panose="02020603050405020304" pitchFamily="18" charset="0"/>
+                <a:cs typeface="Times New Roman" panose="02020603050405020304" pitchFamily="18" charset="0"/>
+              </a:rPr>
+              <a:t> </a:t>
+            </a:r>
+            <a:r>
+              <a:rPr lang="en-US" sz="2000" dirty="0" err="1">
+                <a:latin typeface="Times New Roman" panose="02020603050405020304" pitchFamily="18" charset="0"/>
+                <a:cs typeface="Times New Roman" panose="02020603050405020304" pitchFamily="18" charset="0"/>
+              </a:rPr>
+              <a:t>cost,and</a:t>
+            </a:r>
+            <a:r>
+              <a:rPr lang="en-US" sz="2000" dirty="0">
+                <a:latin typeface="Times New Roman" panose="02020603050405020304" pitchFamily="18" charset="0"/>
+                <a:cs typeface="Times New Roman" panose="02020603050405020304" pitchFamily="18" charset="0"/>
+              </a:rPr>
+              <a:t> safety risk.</a:t>
+            </a:r>
           </a:p>
           <a:p>
             <a:pPr marL="342900" indent="-342900" algn="just">
@@ -7747,7 +7783,7 @@
                 <a:latin typeface="Times New Roman" panose="02020603050405020304" pitchFamily="18" charset="0"/>
                 <a:cs typeface="Times New Roman" panose="02020603050405020304" pitchFamily="18" charset="0"/>
               </a:rPr>
-              <a:t>Operational Bottlenecks Without Analytics: The absence of intelligent analytics makes it extremely difficult for industries to optimize their maintenance planning, efficiently allocate resources, and manage spare parts effectively.</a:t>
+              <a:t>A smart system that uses analytics and cloud computing to continuously monitor equipment health and anticipate failures early is required.</a:t>
             </a:r>
           </a:p>
           <a:p>
@@ -7755,10 +7791,13 @@
               <a:buFont typeface="Wingdings" panose="05000000000000000000" pitchFamily="2" charset="2"/>
               <a:buChar char="ü"/>
             </a:pPr>
-            <a:endParaRPr lang="en-US" sz="2000" dirty="0">
-              <a:latin typeface="Times New Roman" panose="02020603050405020304" pitchFamily="18" charset="0"/>
-              <a:cs typeface="Times New Roman" panose="02020603050405020304" pitchFamily="18" charset="0"/>
-            </a:endParaRPr>
+            <a:r>
+              <a:rPr lang="en-US" sz="2000" dirty="0">
+                <a:latin typeface="Times New Roman" panose="02020603050405020304" pitchFamily="18" charset="0"/>
+                <a:cs typeface="Times New Roman" panose="02020603050405020304" pitchFamily="18" charset="0"/>
+              </a:rPr>
+              <a:t>Without intelligent analytics, industries struggle to optimize maintenance planning, resource allocation, and spare part management.</a:t>
+            </a:r>
           </a:p>
           <a:p>
             <a:pPr marL="342900" indent="-342900" algn="just">
@@ -7770,7 +7809,7 @@
                 <a:latin typeface="Times New Roman" panose="02020603050405020304" pitchFamily="18" charset="0"/>
                 <a:cs typeface="Times New Roman" panose="02020603050405020304" pitchFamily="18" charset="0"/>
               </a:rPr>
-              <a:t>The Need for Proactive Systems: To prevent unexpected failures, industries require a smart system powered by cloud computing and analytics to continuously monitor equipment health and anticipate issues early.</a:t>
+              <a:t>The absence of centralized cloud-based data storage limits historical data analysis and prevents data-driven maintenance decision-making.</a:t>
             </a:r>
           </a:p>
         </p:txBody>
@@ -7907,7 +7946,7 @@
         <p:spPr>
           <a:xfrm>
             <a:off x="265471" y="792624"/>
-            <a:ext cx="11661058" cy="3139321"/>
+            <a:ext cx="11661058" cy="4401205"/>
           </a:xfrm>
           <a:prstGeom prst="rect">
             <a:avLst/>
@@ -7920,85 +7959,94 @@
           </a:bodyPr>
           <a:lstStyle/>
           <a:p>
-            <a:pPr marL="285750" indent="-285750" algn="just">
+            <a:pPr marL="342900" indent="-342900" algn="just">
               <a:buFont typeface="Wingdings" panose="05000000000000000000" pitchFamily="2" charset="2"/>
               <a:buChar char="Ø"/>
             </a:pPr>
             <a:r>
-              <a:rPr lang="en-US" dirty="0">
-                <a:latin typeface="Times New Roman" panose="02020603050405020304" pitchFamily="18" charset="0"/>
-                <a:cs typeface="Times New Roman" panose="02020603050405020304" pitchFamily="18" charset="0"/>
-              </a:rPr>
-              <a:t>Secure Data Collection &amp; Cloud Infrastructure: Develop a secure, cloud-based platform to continuously collect, process, and store vital equipment data (such as temperature, vibration, and load) for remote, real-time health monitoring.</a:t>
-            </a:r>
-          </a:p>
-          <a:p>
-            <a:pPr marL="285750" indent="-285750" algn="just">
+              <a:rPr lang="en-US" sz="2000" dirty="0">
+                <a:latin typeface="Times New Roman" panose="02020603050405020304" pitchFamily="18" charset="0"/>
+                <a:cs typeface="Times New Roman" panose="02020603050405020304" pitchFamily="18" charset="0"/>
+              </a:rPr>
+              <a:t>To develop a cloud-based predictive maintenance system that enables continuous monitoring and intelligent analysis of equipment performance from any location.</a:t>
+            </a:r>
+          </a:p>
+          <a:p>
+            <a:pPr marL="342900" indent="-342900" algn="just">
               <a:buFont typeface="Wingdings" panose="05000000000000000000" pitchFamily="2" charset="2"/>
               <a:buChar char="Ø"/>
             </a:pPr>
-            <a:endParaRPr lang="en-US" dirty="0">
-              <a:latin typeface="Times New Roman" panose="02020603050405020304" pitchFamily="18" charset="0"/>
-              <a:cs typeface="Times New Roman" panose="02020603050405020304" pitchFamily="18" charset="0"/>
-            </a:endParaRPr>
-          </a:p>
-          <a:p>
-            <a:pPr marL="285750" indent="-285750" algn="just">
+            <a:r>
+              <a:rPr lang="en-US" sz="2000" dirty="0">
+                <a:latin typeface="Times New Roman" panose="02020603050405020304" pitchFamily="18" charset="0"/>
+                <a:cs typeface="Times New Roman" panose="02020603050405020304" pitchFamily="18" charset="0"/>
+              </a:rPr>
+              <a:t>To collect and process motor equipment data such as temperature, vibration, and load parameters to assess operational health accurately.</a:t>
+            </a:r>
+          </a:p>
+          <a:p>
+            <a:pPr marL="342900" indent="-342900" algn="just">
               <a:buFont typeface="Wingdings" panose="05000000000000000000" pitchFamily="2" charset="2"/>
               <a:buChar char="Ø"/>
             </a:pPr>
             <a:r>
-              <a:rPr lang="en-US" dirty="0">
-                <a:latin typeface="Times New Roman" panose="02020603050405020304" pitchFamily="18" charset="0"/>
-                <a:cs typeface="Times New Roman" panose="02020603050405020304" pitchFamily="18" charset="0"/>
-              </a:rPr>
-              <a:t>Predictive Analytics &amp; Machine Learning: Apply advanced machine learning algorithms to analyze operational data, extract meaningful insights, and identify early warning signs to predict and prevent unexpected failures.</a:t>
-            </a:r>
-          </a:p>
-          <a:p>
-            <a:pPr marL="285750" indent="-285750" algn="just">
+              <a:rPr lang="en-US" sz="2000" dirty="0">
+                <a:latin typeface="Times New Roman" panose="02020603050405020304" pitchFamily="18" charset="0"/>
+                <a:cs typeface="Times New Roman" panose="02020603050405020304" pitchFamily="18" charset="0"/>
+              </a:rPr>
+              <a:t>To apply Machine Learning algorithms for failure prediction in order to identify early warning signs and prevent unexpected equipment breakdowns.</a:t>
+            </a:r>
+          </a:p>
+          <a:p>
+            <a:pPr marL="342900" indent="-342900" algn="just">
               <a:buFont typeface="Wingdings" panose="05000000000000000000" pitchFamily="2" charset="2"/>
               <a:buChar char="Ø"/>
             </a:pPr>
-            <a:endParaRPr lang="en-US" dirty="0">
-              <a:latin typeface="Times New Roman" panose="02020603050405020304" pitchFamily="18" charset="0"/>
-              <a:cs typeface="Times New Roman" panose="02020603050405020304" pitchFamily="18" charset="0"/>
-            </a:endParaRPr>
-          </a:p>
-          <a:p>
-            <a:pPr marL="285750" indent="-285750" algn="just">
+            <a:r>
+              <a:rPr lang="en-US" sz="2000" dirty="0">
+                <a:latin typeface="Times New Roman" panose="02020603050405020304" pitchFamily="18" charset="0"/>
+                <a:cs typeface="Times New Roman" panose="02020603050405020304" pitchFamily="18" charset="0"/>
+              </a:rPr>
+              <a:t>To provide a real-time monitoring dashboard that visually represents equipment status, predictions, and historical trends for better decision-making.</a:t>
+            </a:r>
+          </a:p>
+          <a:p>
+            <a:pPr marL="342900" indent="-342900" algn="just">
               <a:buFont typeface="Wingdings" panose="05000000000000000000" pitchFamily="2" charset="2"/>
               <a:buChar char="Ø"/>
             </a:pPr>
             <a:r>
-              <a:rPr lang="en-US" dirty="0">
-                <a:latin typeface="Times New Roman" panose="02020603050405020304" pitchFamily="18" charset="0"/>
-                <a:cs typeface="Times New Roman" panose="02020603050405020304" pitchFamily="18" charset="0"/>
-              </a:rPr>
-              <a:t>Real-Time Visualization: Deliver an intuitive, real-time dashboard that visually represents equipment status, predictive alerts, and historical trends to facilitate rapid, data-driven decision-making.</a:t>
-            </a:r>
-          </a:p>
-          <a:p>
-            <a:pPr marL="285750" indent="-285750" algn="just">
+              <a:rPr lang="en-US" sz="2000" dirty="0">
+                <a:latin typeface="Times New Roman" panose="02020603050405020304" pitchFamily="18" charset="0"/>
+                <a:cs typeface="Times New Roman" panose="02020603050405020304" pitchFamily="18" charset="0"/>
+              </a:rPr>
+              <a:t>To reduce downtime and maintenance costs by shifting from reactive maintenance to a proactive and predictive approach.</a:t>
+            </a:r>
+          </a:p>
+          <a:p>
+            <a:pPr marL="342900" indent="-342900" algn="just">
               <a:buFont typeface="Wingdings" panose="05000000000000000000" pitchFamily="2" charset="2"/>
               <a:buChar char="Ø"/>
             </a:pPr>
-            <a:endParaRPr lang="en-US" dirty="0">
-              <a:latin typeface="Times New Roman" panose="02020603050405020304" pitchFamily="18" charset="0"/>
-              <a:cs typeface="Times New Roman" panose="02020603050405020304" pitchFamily="18" charset="0"/>
-            </a:endParaRPr>
-          </a:p>
-          <a:p>
-            <a:pPr marL="285750" indent="-285750" algn="just">
+            <a:r>
+              <a:rPr lang="en-US" sz="2000" dirty="0">
+                <a:latin typeface="Times New Roman" panose="02020603050405020304" pitchFamily="18" charset="0"/>
+                <a:cs typeface="Times New Roman" panose="02020603050405020304" pitchFamily="18" charset="0"/>
+              </a:rPr>
+              <a:t>To securely store logs and system data ensuring data integrity, confidentiality, and easy retrieval for future analysis.</a:t>
+            </a:r>
+          </a:p>
+          <a:p>
+            <a:pPr marL="342900" indent="-342900" algn="just">
               <a:buFont typeface="Wingdings" panose="05000000000000000000" pitchFamily="2" charset="2"/>
               <a:buChar char="Ø"/>
             </a:pPr>
             <a:r>
-              <a:rPr lang="en-US" dirty="0">
-                <a:latin typeface="Times New Roman" panose="02020603050405020304" pitchFamily="18" charset="0"/>
-                <a:cs typeface="Times New Roman" panose="02020603050405020304" pitchFamily="18" charset="0"/>
-              </a:rPr>
-              <a:t>Proactive Maintenance &amp; Cost Reduction: Transition from reactive repairs to a proactive, predictive maintenance strategy, significantly reducing unexpected operational downtime and long-term maintenance costs.</a:t>
+              <a:rPr lang="en-US" sz="2000" dirty="0">
+                <a:latin typeface="Times New Roman" panose="02020603050405020304" pitchFamily="18" charset="0"/>
+                <a:cs typeface="Times New Roman" panose="02020603050405020304" pitchFamily="18" charset="0"/>
+              </a:rPr>
+              <a:t>To analyze equipment data using advanced analytics models to extract meaningful insights and improve maintenance planning.</a:t>
             </a:r>
           </a:p>
         </p:txBody>
@@ -8089,7 +8137,7 @@
         <p:spPr>
           <a:xfrm>
             <a:off x="265471" y="792624"/>
-            <a:ext cx="11661058" cy="4708981"/>
+            <a:ext cx="11661058" cy="5016758"/>
           </a:xfrm>
           <a:prstGeom prst="rect">
             <a:avLst/>
@@ -8124,7 +8172,7 @@
                 <a:latin typeface="Times New Roman" panose="02020603050405020304" pitchFamily="18" charset="0"/>
                 <a:cs typeface="Times New Roman" panose="02020603050405020304" pitchFamily="18" charset="0"/>
               </a:rPr>
-              <a:t>Real-Time IoT Monitoring &amp; Data Collection: Integrate smart sensors and industrial IoT devices to continuously track vital operational parameters—such as temperature, vibration, and load—in real time.</a:t>
+              <a:t>To track the condition of equipment in real time by continuously monitoring operational parameters such as temperature, vibration, and load.</a:t>
             </a:r>
           </a:p>
           <a:p>
@@ -8132,6 +8180,33 @@
               <a:buFont typeface="Wingdings" panose="05000000000000000000" pitchFamily="2" charset="2"/>
               <a:buChar char="ü"/>
             </a:pPr>
+            <a:r>
+              <a:rPr lang="en-US" sz="2000" dirty="0">
+                <a:latin typeface="Times New Roman" panose="02020603050405020304" pitchFamily="18" charset="0"/>
+                <a:cs typeface="Times New Roman" panose="02020603050405020304" pitchFamily="18" charset="0"/>
+              </a:rPr>
+              <a:t>To predict equipment failures before they occur using data-driven models that analyze patterns and detect early warning signs.</a:t>
+            </a:r>
+          </a:p>
+          <a:p>
+            <a:pPr marL="342900" indent="-342900" algn="just">
+              <a:buFont typeface="Wingdings" panose="05000000000000000000" pitchFamily="2" charset="2"/>
+              <a:buChar char="ü"/>
+            </a:pPr>
+            <a:r>
+              <a:rPr lang="en-US" sz="2000" dirty="0">
+                <a:latin typeface="Times New Roman" panose="02020603050405020304" pitchFamily="18" charset="0"/>
+                <a:cs typeface="Times New Roman" panose="02020603050405020304" pitchFamily="18" charset="0"/>
+              </a:rPr>
+              <a:t>To enable remote monitoring through cloud integration, allowing users to access system data and predictions from any </a:t>
+            </a:r>
+            <a:r>
+              <a:rPr lang="en-US" sz="2000" dirty="0" err="1">
+                <a:latin typeface="Times New Roman" panose="02020603050405020304" pitchFamily="18" charset="0"/>
+                <a:cs typeface="Times New Roman" panose="02020603050405020304" pitchFamily="18" charset="0"/>
+              </a:rPr>
+              <a:t>location.a</a:t>
+            </a:r>
             <a:endParaRPr lang="en-US" sz="2000" dirty="0">
               <a:latin typeface="Times New Roman" panose="02020603050405020304" pitchFamily="18" charset="0"/>
               <a:cs typeface="Times New Roman" panose="02020603050405020304" pitchFamily="18" charset="0"/>
@@ -8147,7 +8222,7 @@
                 <a:latin typeface="Times New Roman" panose="02020603050405020304" pitchFamily="18" charset="0"/>
                 <a:cs typeface="Times New Roman" panose="02020603050405020304" pitchFamily="18" charset="0"/>
               </a:rPr>
-              <a:t>Scalable Cloud Architecture &amp; Remote Access: Leverage cloud deployment to efficiently manage increasing data volumes and multiple equipment units, allowing users to monitor systems and access predictions remotely from any location.</a:t>
+              <a:t>Applicable in manufacturing industries, where continuous machine operation and preventive maintenance are critical for productivity.</a:t>
             </a:r>
           </a:p>
           <a:p>
@@ -8155,10 +8230,13 @@
               <a:buFont typeface="Wingdings" panose="05000000000000000000" pitchFamily="2" charset="2"/>
               <a:buChar char="ü"/>
             </a:pPr>
-            <a:endParaRPr lang="en-US" sz="2000" dirty="0">
-              <a:latin typeface="Times New Roman" panose="02020603050405020304" pitchFamily="18" charset="0"/>
-              <a:cs typeface="Times New Roman" panose="02020603050405020304" pitchFamily="18" charset="0"/>
-            </a:endParaRPr>
+            <a:r>
+              <a:rPr lang="en-US" sz="2000" dirty="0">
+                <a:latin typeface="Times New Roman" panose="02020603050405020304" pitchFamily="18" charset="0"/>
+                <a:cs typeface="Times New Roman" panose="02020603050405020304" pitchFamily="18" charset="0"/>
+              </a:rPr>
+              <a:t>Can be implemented in power plants and heavy machinery systems to monitor critical assets and reduce operational risks.</a:t>
+            </a:r>
           </a:p>
           <a:p>
             <a:pPr marL="342900" indent="-342900" algn="just">
@@ -8170,7 +8248,7 @@
                 <a:latin typeface="Times New Roman" panose="02020603050405020304" pitchFamily="18" charset="0"/>
                 <a:cs typeface="Times New Roman" panose="02020603050405020304" pitchFamily="18" charset="0"/>
               </a:rPr>
-              <a:t>Predictive Analytics &amp; Proactive Decision-Making: Utilize data-driven models to analyze equipment patterns, detect early warning signs, and predict failures before they occur, empowering maintenance teams with faster, proactive decision-making.</a:t>
+              <a:t>Supports cloud deployment for scalability, enabling the system to handle increasing volumes of data and multiple equipment units efficiently.</a:t>
             </a:r>
           </a:p>
           <a:p>
@@ -8178,10 +8256,13 @@
               <a:buFont typeface="Wingdings" panose="05000000000000000000" pitchFamily="2" charset="2"/>
               <a:buChar char="ü"/>
             </a:pPr>
-            <a:endParaRPr lang="en-US" sz="2000" dirty="0">
-              <a:latin typeface="Times New Roman" panose="02020603050405020304" pitchFamily="18" charset="0"/>
-              <a:cs typeface="Times New Roman" panose="02020603050405020304" pitchFamily="18" charset="0"/>
-            </a:endParaRPr>
+            <a:r>
+              <a:rPr lang="en-US" sz="2000" dirty="0">
+                <a:latin typeface="Times New Roman" panose="02020603050405020304" pitchFamily="18" charset="0"/>
+                <a:cs typeface="Times New Roman" panose="02020603050405020304" pitchFamily="18" charset="0"/>
+              </a:rPr>
+              <a:t>Enables real-time monitoring from anywhere, improving accessibility and faster decision-making for maintenance teams.</a:t>
+            </a:r>
           </a:p>
           <a:p>
             <a:pPr marL="342900" indent="-342900" algn="just">
@@ -8193,7 +8274,7 @@
                 <a:latin typeface="Times New Roman" panose="02020603050405020304" pitchFamily="18" charset="0"/>
                 <a:cs typeface="Times New Roman" panose="02020603050405020304" pitchFamily="18" charset="0"/>
               </a:rPr>
-              <a:t>Cross-Industry Application &amp; Risk Mitigation: Implement the system across manufacturing, power plants, and heavy machinery environments to maintain continuous productivity, support preventive maintenance, and reduce overall operational risks.</a:t>
+              <a:t>Can be extended with IoT integration, allowing direct connection with smart sensors and industrial devices.</a:t>
             </a:r>
           </a:p>
         </p:txBody>

--- a/docs/Clg 2nd review.pptx
+++ b/docs/Clg 2nd review.pptx
@@ -5,7 +5,7 @@
     <p:sldMasterId id="2147483648" r:id="rId1"/>
   </p:sldMasterIdLst>
   <p:notesMasterIdLst>
-    <p:notesMasterId r:id="rId19"/>
+    <p:notesMasterId r:id="rId16"/>
   </p:notesMasterIdLst>
   <p:sldIdLst>
     <p:sldId id="263" r:id="rId2"/>
@@ -17,14 +17,11 @@
     <p:sldId id="269" r:id="rId8"/>
     <p:sldId id="277" r:id="rId9"/>
     <p:sldId id="268" r:id="rId10"/>
-    <p:sldId id="271" r:id="rId11"/>
-    <p:sldId id="272" r:id="rId12"/>
-    <p:sldId id="278" r:id="rId13"/>
-    <p:sldId id="276" r:id="rId14"/>
-    <p:sldId id="275" r:id="rId15"/>
-    <p:sldId id="273" r:id="rId16"/>
-    <p:sldId id="274" r:id="rId17"/>
-    <p:sldId id="264" r:id="rId18"/>
+    <p:sldId id="276" r:id="rId11"/>
+    <p:sldId id="275" r:id="rId12"/>
+    <p:sldId id="273" r:id="rId13"/>
+    <p:sldId id="274" r:id="rId14"/>
+    <p:sldId id="264" r:id="rId15"/>
   </p:sldIdLst>
   <p:sldSz cx="12192000" cy="6858000"/>
   <p:notesSz cx="6858000" cy="9144000"/>
@@ -213,7 +210,7 @@
           <a:p>
             <a:fld id="{C1BED7E8-5420-4F73-BA32-34A7030FE7D8}" type="datetimeFigureOut">
               <a:rPr lang="en-US" smtClean="0"/>
-              <a:t>4/6/2026</a:t>
+              <a:t>4/13/2026</a:t>
             </a:fld>
             <a:endParaRPr lang="en-US"/>
           </a:p>
@@ -572,330 +569,6 @@
         <p:cNvPr id="1" name="">
           <a:extLst>
             <a:ext uri="{FF2B5EF4-FFF2-40B4-BE49-F238E27FC236}">
-              <a16:creationId xmlns:a16="http://schemas.microsoft.com/office/drawing/2014/main" id="{F6ADB6BE-7B61-383A-C39D-2D85EE02A9B7}"/>
-            </a:ext>
-          </a:extLst>
-        </p:cNvPr>
-        <p:cNvGrpSpPr/>
-        <p:nvPr/>
-      </p:nvGrpSpPr>
-      <p:grpSpPr>
-        <a:xfrm>
-          <a:off x="0" y="0"/>
-          <a:ext cx="0" cy="0"/>
-          <a:chOff x="0" y="0"/>
-          <a:chExt cx="0" cy="0"/>
-        </a:xfrm>
-      </p:grpSpPr>
-      <p:sp>
-        <p:nvSpPr>
-          <p:cNvPr id="2" name="Slide Image Placeholder 1">
-            <a:extLst>
-              <a:ext uri="{FF2B5EF4-FFF2-40B4-BE49-F238E27FC236}">
-                <a16:creationId xmlns:a16="http://schemas.microsoft.com/office/drawing/2014/main" id="{D888A89B-735F-1709-E22B-684965A93192}"/>
-              </a:ext>
-            </a:extLst>
-          </p:cNvPr>
-          <p:cNvSpPr>
-            <a:spLocks noGrp="1" noRot="1" noChangeAspect="1"/>
-          </p:cNvSpPr>
-          <p:nvPr>
-            <p:ph type="sldImg"/>
-          </p:nvPr>
-        </p:nvSpPr>
-        <p:spPr/>
-      </p:sp>
-      <p:sp>
-        <p:nvSpPr>
-          <p:cNvPr id="3" name="Notes Placeholder 2">
-            <a:extLst>
-              <a:ext uri="{FF2B5EF4-FFF2-40B4-BE49-F238E27FC236}">
-                <a16:creationId xmlns:a16="http://schemas.microsoft.com/office/drawing/2014/main" id="{F7C90FD8-4B6F-3D43-0874-F0235CA03544}"/>
-              </a:ext>
-            </a:extLst>
-          </p:cNvPr>
-          <p:cNvSpPr>
-            <a:spLocks noGrp="1"/>
-          </p:cNvSpPr>
-          <p:nvPr>
-            <p:ph type="body" idx="1"/>
-          </p:nvPr>
-        </p:nvSpPr>
-        <p:spPr/>
-        <p:txBody>
-          <a:bodyPr/>
-          <a:lstStyle/>
-          <a:p>
-            <a:endParaRPr lang="en-US" dirty="0"/>
-          </a:p>
-        </p:txBody>
-      </p:sp>
-      <p:sp>
-        <p:nvSpPr>
-          <p:cNvPr id="4" name="Slide Number Placeholder 3">
-            <a:extLst>
-              <a:ext uri="{FF2B5EF4-FFF2-40B4-BE49-F238E27FC236}">
-                <a16:creationId xmlns:a16="http://schemas.microsoft.com/office/drawing/2014/main" id="{8BF56310-FCF6-B947-5012-D8E086D8C5B0}"/>
-              </a:ext>
-            </a:extLst>
-          </p:cNvPr>
-          <p:cNvSpPr>
-            <a:spLocks noGrp="1"/>
-          </p:cNvSpPr>
-          <p:nvPr>
-            <p:ph type="sldNum" sz="quarter" idx="5"/>
-          </p:nvPr>
-        </p:nvSpPr>
-        <p:spPr/>
-        <p:txBody>
-          <a:bodyPr/>
-          <a:lstStyle/>
-          <a:p>
-            <a:fld id="{C119E7F2-498D-45ED-A645-8BBCF90873D0}" type="slidenum">
-              <a:rPr lang="en-US" smtClean="0"/>
-              <a:t>12</a:t>
-            </a:fld>
-            <a:endParaRPr lang="en-US"/>
-          </a:p>
-        </p:txBody>
-      </p:sp>
-    </p:spTree>
-    <p:extLst>
-      <p:ext uri="{BB962C8B-B14F-4D97-AF65-F5344CB8AC3E}">
-        <p14:creationId xmlns:p14="http://schemas.microsoft.com/office/powerpoint/2010/main" val="779290196"/>
-      </p:ext>
-    </p:extLst>
-  </p:cSld>
-  <p:clrMapOvr>
-    <a:masterClrMapping/>
-  </p:clrMapOvr>
-</p:notes>
-</file>
-
-<file path=ppt/notesSlides/notesSlide11.xml><?xml version="1.0" encoding="utf-8"?>
-<p:notes xmlns:a="http://schemas.openxmlformats.org/drawingml/2006/main" xmlns:r="http://schemas.openxmlformats.org/officeDocument/2006/relationships" xmlns:p="http://schemas.openxmlformats.org/presentationml/2006/main">
-  <p:cSld>
-    <p:spTree>
-      <p:nvGrpSpPr>
-        <p:cNvPr id="1" name="">
-          <a:extLst>
-            <a:ext uri="{FF2B5EF4-FFF2-40B4-BE49-F238E27FC236}">
-              <a16:creationId xmlns:a16="http://schemas.microsoft.com/office/drawing/2014/main" id="{3F108448-B8B0-D313-353E-616DAB301DF8}"/>
-            </a:ext>
-          </a:extLst>
-        </p:cNvPr>
-        <p:cNvGrpSpPr/>
-        <p:nvPr/>
-      </p:nvGrpSpPr>
-      <p:grpSpPr>
-        <a:xfrm>
-          <a:off x="0" y="0"/>
-          <a:ext cx="0" cy="0"/>
-          <a:chOff x="0" y="0"/>
-          <a:chExt cx="0" cy="0"/>
-        </a:xfrm>
-      </p:grpSpPr>
-      <p:sp>
-        <p:nvSpPr>
-          <p:cNvPr id="2" name="Slide Image Placeholder 1">
-            <a:extLst>
-              <a:ext uri="{FF2B5EF4-FFF2-40B4-BE49-F238E27FC236}">
-                <a16:creationId xmlns:a16="http://schemas.microsoft.com/office/drawing/2014/main" id="{461BF45A-57FC-E02F-0E13-98B270F2E7E6}"/>
-              </a:ext>
-            </a:extLst>
-          </p:cNvPr>
-          <p:cNvSpPr>
-            <a:spLocks noGrp="1" noRot="1" noChangeAspect="1"/>
-          </p:cNvSpPr>
-          <p:nvPr>
-            <p:ph type="sldImg"/>
-          </p:nvPr>
-        </p:nvSpPr>
-        <p:spPr/>
-      </p:sp>
-      <p:sp>
-        <p:nvSpPr>
-          <p:cNvPr id="3" name="Notes Placeholder 2">
-            <a:extLst>
-              <a:ext uri="{FF2B5EF4-FFF2-40B4-BE49-F238E27FC236}">
-                <a16:creationId xmlns:a16="http://schemas.microsoft.com/office/drawing/2014/main" id="{0DD0D77E-5AFF-628E-BA6B-5F8BFAABF2E7}"/>
-              </a:ext>
-            </a:extLst>
-          </p:cNvPr>
-          <p:cNvSpPr>
-            <a:spLocks noGrp="1"/>
-          </p:cNvSpPr>
-          <p:nvPr>
-            <p:ph type="body" idx="1"/>
-          </p:nvPr>
-        </p:nvSpPr>
-        <p:spPr/>
-        <p:txBody>
-          <a:bodyPr/>
-          <a:lstStyle/>
-          <a:p>
-            <a:endParaRPr lang="en-US" dirty="0"/>
-          </a:p>
-        </p:txBody>
-      </p:sp>
-      <p:sp>
-        <p:nvSpPr>
-          <p:cNvPr id="4" name="Slide Number Placeholder 3">
-            <a:extLst>
-              <a:ext uri="{FF2B5EF4-FFF2-40B4-BE49-F238E27FC236}">
-                <a16:creationId xmlns:a16="http://schemas.microsoft.com/office/drawing/2014/main" id="{A4C16C0D-5708-C253-C2C7-3B59122C5DAD}"/>
-              </a:ext>
-            </a:extLst>
-          </p:cNvPr>
-          <p:cNvSpPr>
-            <a:spLocks noGrp="1"/>
-          </p:cNvSpPr>
-          <p:nvPr>
-            <p:ph type="sldNum" sz="quarter" idx="5"/>
-          </p:nvPr>
-        </p:nvSpPr>
-        <p:spPr/>
-        <p:txBody>
-          <a:bodyPr/>
-          <a:lstStyle/>
-          <a:p>
-            <a:fld id="{C119E7F2-498D-45ED-A645-8BBCF90873D0}" type="slidenum">
-              <a:rPr lang="en-US" smtClean="0"/>
-              <a:t>13</a:t>
-            </a:fld>
-            <a:endParaRPr lang="en-US"/>
-          </a:p>
-        </p:txBody>
-      </p:sp>
-    </p:spTree>
-    <p:extLst>
-      <p:ext uri="{BB962C8B-B14F-4D97-AF65-F5344CB8AC3E}">
-        <p14:creationId xmlns:p14="http://schemas.microsoft.com/office/powerpoint/2010/main" val="2343315806"/>
-      </p:ext>
-    </p:extLst>
-  </p:cSld>
-  <p:clrMapOvr>
-    <a:masterClrMapping/>
-  </p:clrMapOvr>
-</p:notes>
-</file>
-
-<file path=ppt/notesSlides/notesSlide12.xml><?xml version="1.0" encoding="utf-8"?>
-<p:notes xmlns:a="http://schemas.openxmlformats.org/drawingml/2006/main" xmlns:r="http://schemas.openxmlformats.org/officeDocument/2006/relationships" xmlns:p="http://schemas.openxmlformats.org/presentationml/2006/main">
-  <p:cSld>
-    <p:spTree>
-      <p:nvGrpSpPr>
-        <p:cNvPr id="1" name="">
-          <a:extLst>
-            <a:ext uri="{FF2B5EF4-FFF2-40B4-BE49-F238E27FC236}">
-              <a16:creationId xmlns:a16="http://schemas.microsoft.com/office/drawing/2014/main" id="{E18DF7F0-CC61-0DD1-055A-F106F796F212}"/>
-            </a:ext>
-          </a:extLst>
-        </p:cNvPr>
-        <p:cNvGrpSpPr/>
-        <p:nvPr/>
-      </p:nvGrpSpPr>
-      <p:grpSpPr>
-        <a:xfrm>
-          <a:off x="0" y="0"/>
-          <a:ext cx="0" cy="0"/>
-          <a:chOff x="0" y="0"/>
-          <a:chExt cx="0" cy="0"/>
-        </a:xfrm>
-      </p:grpSpPr>
-      <p:sp>
-        <p:nvSpPr>
-          <p:cNvPr id="2" name="Slide Image Placeholder 1">
-            <a:extLst>
-              <a:ext uri="{FF2B5EF4-FFF2-40B4-BE49-F238E27FC236}">
-                <a16:creationId xmlns:a16="http://schemas.microsoft.com/office/drawing/2014/main" id="{6A58D146-8DAE-35FF-57CD-485C703338DA}"/>
-              </a:ext>
-            </a:extLst>
-          </p:cNvPr>
-          <p:cNvSpPr>
-            <a:spLocks noGrp="1" noRot="1" noChangeAspect="1"/>
-          </p:cNvSpPr>
-          <p:nvPr>
-            <p:ph type="sldImg"/>
-          </p:nvPr>
-        </p:nvSpPr>
-        <p:spPr/>
-      </p:sp>
-      <p:sp>
-        <p:nvSpPr>
-          <p:cNvPr id="3" name="Notes Placeholder 2">
-            <a:extLst>
-              <a:ext uri="{FF2B5EF4-FFF2-40B4-BE49-F238E27FC236}">
-                <a16:creationId xmlns:a16="http://schemas.microsoft.com/office/drawing/2014/main" id="{472C9F5A-2EBC-AF4C-8320-5FFC89BA34AA}"/>
-              </a:ext>
-            </a:extLst>
-          </p:cNvPr>
-          <p:cNvSpPr>
-            <a:spLocks noGrp="1"/>
-          </p:cNvSpPr>
-          <p:nvPr>
-            <p:ph type="body" idx="1"/>
-          </p:nvPr>
-        </p:nvSpPr>
-        <p:spPr/>
-        <p:txBody>
-          <a:bodyPr/>
-          <a:lstStyle/>
-          <a:p>
-            <a:endParaRPr lang="en-US" dirty="0"/>
-          </a:p>
-        </p:txBody>
-      </p:sp>
-      <p:sp>
-        <p:nvSpPr>
-          <p:cNvPr id="4" name="Slide Number Placeholder 3">
-            <a:extLst>
-              <a:ext uri="{FF2B5EF4-FFF2-40B4-BE49-F238E27FC236}">
-                <a16:creationId xmlns:a16="http://schemas.microsoft.com/office/drawing/2014/main" id="{297B2B5C-B1F1-431B-640B-7BDB9E1A2D3E}"/>
-              </a:ext>
-            </a:extLst>
-          </p:cNvPr>
-          <p:cNvSpPr>
-            <a:spLocks noGrp="1"/>
-          </p:cNvSpPr>
-          <p:nvPr>
-            <p:ph type="sldNum" sz="quarter" idx="5"/>
-          </p:nvPr>
-        </p:nvSpPr>
-        <p:spPr/>
-        <p:txBody>
-          <a:bodyPr/>
-          <a:lstStyle/>
-          <a:p>
-            <a:fld id="{C119E7F2-498D-45ED-A645-8BBCF90873D0}" type="slidenum">
-              <a:rPr lang="en-US" smtClean="0"/>
-              <a:t>14</a:t>
-            </a:fld>
-            <a:endParaRPr lang="en-US"/>
-          </a:p>
-        </p:txBody>
-      </p:sp>
-    </p:spTree>
-    <p:extLst>
-      <p:ext uri="{BB962C8B-B14F-4D97-AF65-F5344CB8AC3E}">
-        <p14:creationId xmlns:p14="http://schemas.microsoft.com/office/powerpoint/2010/main" val="3394732606"/>
-      </p:ext>
-    </p:extLst>
-  </p:cSld>
-  <p:clrMapOvr>
-    <a:masterClrMapping/>
-  </p:clrMapOvr>
-</p:notes>
-</file>
-
-<file path=ppt/notesSlides/notesSlide13.xml><?xml version="1.0" encoding="utf-8"?>
-<p:notes xmlns:a="http://schemas.openxmlformats.org/drawingml/2006/main" xmlns:r="http://schemas.openxmlformats.org/officeDocument/2006/relationships" xmlns:p="http://schemas.openxmlformats.org/presentationml/2006/main">
-  <p:cSld>
-    <p:spTree>
-      <p:nvGrpSpPr>
-        <p:cNvPr id="1" name="">
-          <a:extLst>
-            <a:ext uri="{FF2B5EF4-FFF2-40B4-BE49-F238E27FC236}">
               <a16:creationId xmlns:a16="http://schemas.microsoft.com/office/drawing/2014/main" id="{11929C80-4B9D-BEE6-6F02-16BB3B296F85}"/>
             </a:ext>
           </a:extLst>
@@ -977,7 +650,7 @@
           <a:p>
             <a:fld id="{C119E7F2-498D-45ED-A645-8BBCF90873D0}" type="slidenum">
               <a:rPr lang="en-US" smtClean="0"/>
-              <a:t>15</a:t>
+              <a:t>12</a:t>
             </a:fld>
             <a:endParaRPr lang="en-US"/>
           </a:p>
@@ -996,7 +669,7 @@
 </p:notes>
 </file>
 
-<file path=ppt/notesSlides/notesSlide14.xml><?xml version="1.0" encoding="utf-8"?>
+<file path=ppt/notesSlides/notesSlide11.xml><?xml version="1.0" encoding="utf-8"?>
 <p:notes xmlns:a="http://schemas.openxmlformats.org/drawingml/2006/main" xmlns:r="http://schemas.openxmlformats.org/officeDocument/2006/relationships" xmlns:p="http://schemas.openxmlformats.org/presentationml/2006/main">
   <p:cSld>
     <p:spTree>
@@ -1085,7 +758,7 @@
           <a:p>
             <a:fld id="{C119E7F2-498D-45ED-A645-8BBCF90873D0}" type="slidenum">
               <a:rPr lang="en-US" smtClean="0"/>
-              <a:t>16</a:t>
+              <a:t>13</a:t>
             </a:fld>
             <a:endParaRPr lang="en-US"/>
           </a:p>
@@ -1736,7 +1409,7 @@
         <p:cNvPr id="1" name="">
           <a:extLst>
             <a:ext uri="{FF2B5EF4-FFF2-40B4-BE49-F238E27FC236}">
-              <a16:creationId xmlns:a16="http://schemas.microsoft.com/office/drawing/2014/main" id="{81A47509-3C30-DEC6-5B50-FAA218DB695C}"/>
+              <a16:creationId xmlns:a16="http://schemas.microsoft.com/office/drawing/2014/main" id="{3F108448-B8B0-D313-353E-616DAB301DF8}"/>
             </a:ext>
           </a:extLst>
         </p:cNvPr>
@@ -1756,7 +1429,7 @@
           <p:cNvPr id="2" name="Slide Image Placeholder 1">
             <a:extLst>
               <a:ext uri="{FF2B5EF4-FFF2-40B4-BE49-F238E27FC236}">
-                <a16:creationId xmlns:a16="http://schemas.microsoft.com/office/drawing/2014/main" id="{56D2C9E5-8469-5859-34B0-AE19ADEC24C7}"/>
+                <a16:creationId xmlns:a16="http://schemas.microsoft.com/office/drawing/2014/main" id="{461BF45A-57FC-E02F-0E13-98B270F2E7E6}"/>
               </a:ext>
             </a:extLst>
           </p:cNvPr>
@@ -1774,7 +1447,7 @@
           <p:cNvPr id="3" name="Notes Placeholder 2">
             <a:extLst>
               <a:ext uri="{FF2B5EF4-FFF2-40B4-BE49-F238E27FC236}">
-                <a16:creationId xmlns:a16="http://schemas.microsoft.com/office/drawing/2014/main" id="{67838D90-E948-6E29-68D7-01333E7DC936}"/>
+                <a16:creationId xmlns:a16="http://schemas.microsoft.com/office/drawing/2014/main" id="{0DD0D77E-5AFF-628E-BA6B-5F8BFAABF2E7}"/>
               </a:ext>
             </a:extLst>
           </p:cNvPr>
@@ -1799,7 +1472,7 @@
           <p:cNvPr id="4" name="Slide Number Placeholder 3">
             <a:extLst>
               <a:ext uri="{FF2B5EF4-FFF2-40B4-BE49-F238E27FC236}">
-                <a16:creationId xmlns:a16="http://schemas.microsoft.com/office/drawing/2014/main" id="{AEABC21D-EE7C-BD2F-609F-623C8351C4F8}"/>
+                <a16:creationId xmlns:a16="http://schemas.microsoft.com/office/drawing/2014/main" id="{A4C16C0D-5708-C253-C2C7-3B59122C5DAD}"/>
               </a:ext>
             </a:extLst>
           </p:cNvPr>
@@ -1826,7 +1499,7 @@
     </p:spTree>
     <p:extLst>
       <p:ext uri="{BB962C8B-B14F-4D97-AF65-F5344CB8AC3E}">
-        <p14:creationId xmlns:p14="http://schemas.microsoft.com/office/powerpoint/2010/main" val="4051647361"/>
+        <p14:creationId xmlns:p14="http://schemas.microsoft.com/office/powerpoint/2010/main" val="2343315806"/>
       </p:ext>
     </p:extLst>
   </p:cSld>
@@ -1844,7 +1517,7 @@
         <p:cNvPr id="1" name="">
           <a:extLst>
             <a:ext uri="{FF2B5EF4-FFF2-40B4-BE49-F238E27FC236}">
-              <a16:creationId xmlns:a16="http://schemas.microsoft.com/office/drawing/2014/main" id="{6D025A2C-0FA8-EBBC-17B7-D666A281F58C}"/>
+              <a16:creationId xmlns:a16="http://schemas.microsoft.com/office/drawing/2014/main" id="{E18DF7F0-CC61-0DD1-055A-F106F796F212}"/>
             </a:ext>
           </a:extLst>
         </p:cNvPr>
@@ -1864,7 +1537,7 @@
           <p:cNvPr id="2" name="Slide Image Placeholder 1">
             <a:extLst>
               <a:ext uri="{FF2B5EF4-FFF2-40B4-BE49-F238E27FC236}">
-                <a16:creationId xmlns:a16="http://schemas.microsoft.com/office/drawing/2014/main" id="{EB53F317-D703-84E6-A80E-7B4863915625}"/>
+                <a16:creationId xmlns:a16="http://schemas.microsoft.com/office/drawing/2014/main" id="{6A58D146-8DAE-35FF-57CD-485C703338DA}"/>
               </a:ext>
             </a:extLst>
           </p:cNvPr>
@@ -1882,7 +1555,7 @@
           <p:cNvPr id="3" name="Notes Placeholder 2">
             <a:extLst>
               <a:ext uri="{FF2B5EF4-FFF2-40B4-BE49-F238E27FC236}">
-                <a16:creationId xmlns:a16="http://schemas.microsoft.com/office/drawing/2014/main" id="{277FAD2C-26F8-77EA-FE4D-350BEAB728BF}"/>
+                <a16:creationId xmlns:a16="http://schemas.microsoft.com/office/drawing/2014/main" id="{472C9F5A-2EBC-AF4C-8320-5FFC89BA34AA}"/>
               </a:ext>
             </a:extLst>
           </p:cNvPr>
@@ -1907,7 +1580,7 @@
           <p:cNvPr id="4" name="Slide Number Placeholder 3">
             <a:extLst>
               <a:ext uri="{FF2B5EF4-FFF2-40B4-BE49-F238E27FC236}">
-                <a16:creationId xmlns:a16="http://schemas.microsoft.com/office/drawing/2014/main" id="{49D77D52-6C1C-6B08-C411-B224E81EF0CB}"/>
+                <a16:creationId xmlns:a16="http://schemas.microsoft.com/office/drawing/2014/main" id="{297B2B5C-B1F1-431B-640B-7BDB9E1A2D3E}"/>
               </a:ext>
             </a:extLst>
           </p:cNvPr>
@@ -1934,7 +1607,7 @@
     </p:spTree>
     <p:extLst>
       <p:ext uri="{BB962C8B-B14F-4D97-AF65-F5344CB8AC3E}">
-        <p14:creationId xmlns:p14="http://schemas.microsoft.com/office/powerpoint/2010/main" val="4259835708"/>
+        <p14:creationId xmlns:p14="http://schemas.microsoft.com/office/powerpoint/2010/main" val="3394732606"/>
       </p:ext>
     </p:extLst>
   </p:cSld>
@@ -2091,7 +1764,7 @@
           <a:p>
             <a:fld id="{C198EE3F-C531-4F47-81BE-EB7857D8F039}" type="datetimeFigureOut">
               <a:rPr lang="en-US" smtClean="0"/>
-              <a:t>4/6/2026</a:t>
+              <a:t>4/13/2026</a:t>
             </a:fld>
             <a:endParaRPr lang="en-US"/>
           </a:p>
@@ -2289,7 +1962,7 @@
           <a:p>
             <a:fld id="{C198EE3F-C531-4F47-81BE-EB7857D8F039}" type="datetimeFigureOut">
               <a:rPr lang="en-US" smtClean="0"/>
-              <a:t>4/6/2026</a:t>
+              <a:t>4/13/2026</a:t>
             </a:fld>
             <a:endParaRPr lang="en-US"/>
           </a:p>
@@ -2497,7 +2170,7 @@
           <a:p>
             <a:fld id="{C198EE3F-C531-4F47-81BE-EB7857D8F039}" type="datetimeFigureOut">
               <a:rPr lang="en-US" smtClean="0"/>
-              <a:t>4/6/2026</a:t>
+              <a:t>4/13/2026</a:t>
             </a:fld>
             <a:endParaRPr lang="en-US"/>
           </a:p>
@@ -2695,7 +2368,7 @@
           <a:p>
             <a:fld id="{C198EE3F-C531-4F47-81BE-EB7857D8F039}" type="datetimeFigureOut">
               <a:rPr lang="en-US" smtClean="0"/>
-              <a:t>4/6/2026</a:t>
+              <a:t>4/13/2026</a:t>
             </a:fld>
             <a:endParaRPr lang="en-US"/>
           </a:p>
@@ -2970,7 +2643,7 @@
           <a:p>
             <a:fld id="{C198EE3F-C531-4F47-81BE-EB7857D8F039}" type="datetimeFigureOut">
               <a:rPr lang="en-US" smtClean="0"/>
-              <a:t>4/6/2026</a:t>
+              <a:t>4/13/2026</a:t>
             </a:fld>
             <a:endParaRPr lang="en-US"/>
           </a:p>
@@ -3235,7 +2908,7 @@
           <a:p>
             <a:fld id="{C198EE3F-C531-4F47-81BE-EB7857D8F039}" type="datetimeFigureOut">
               <a:rPr lang="en-US" smtClean="0"/>
-              <a:t>4/6/2026</a:t>
+              <a:t>4/13/2026</a:t>
             </a:fld>
             <a:endParaRPr lang="en-US"/>
           </a:p>
@@ -3647,7 +3320,7 @@
           <a:p>
             <a:fld id="{C198EE3F-C531-4F47-81BE-EB7857D8F039}" type="datetimeFigureOut">
               <a:rPr lang="en-US" smtClean="0"/>
-              <a:t>4/6/2026</a:t>
+              <a:t>4/13/2026</a:t>
             </a:fld>
             <a:endParaRPr lang="en-US"/>
           </a:p>
@@ -3788,7 +3461,7 @@
           <a:p>
             <a:fld id="{C198EE3F-C531-4F47-81BE-EB7857D8F039}" type="datetimeFigureOut">
               <a:rPr lang="en-US" smtClean="0"/>
-              <a:t>4/6/2026</a:t>
+              <a:t>4/13/2026</a:t>
             </a:fld>
             <a:endParaRPr lang="en-US"/>
           </a:p>
@@ -3901,7 +3574,7 @@
           <a:p>
             <a:fld id="{C198EE3F-C531-4F47-81BE-EB7857D8F039}" type="datetimeFigureOut">
               <a:rPr lang="en-US" smtClean="0"/>
-              <a:t>4/6/2026</a:t>
+              <a:t>4/13/2026</a:t>
             </a:fld>
             <a:endParaRPr lang="en-US"/>
           </a:p>
@@ -4212,7 +3885,7 @@
           <a:p>
             <a:fld id="{C198EE3F-C531-4F47-81BE-EB7857D8F039}" type="datetimeFigureOut">
               <a:rPr lang="en-US" smtClean="0"/>
-              <a:t>4/6/2026</a:t>
+              <a:t>4/13/2026</a:t>
             </a:fld>
             <a:endParaRPr lang="en-US"/>
           </a:p>
@@ -4500,7 +4173,7 @@
           <a:p>
             <a:fld id="{C198EE3F-C531-4F47-81BE-EB7857D8F039}" type="datetimeFigureOut">
               <a:rPr lang="en-US" smtClean="0"/>
-              <a:t>4/6/2026</a:t>
+              <a:t>4/13/2026</a:t>
             </a:fld>
             <a:endParaRPr lang="en-US"/>
           </a:p>
@@ -4741,7 +4414,7 @@
           <a:p>
             <a:fld id="{C198EE3F-C531-4F47-81BE-EB7857D8F039}" type="datetimeFigureOut">
               <a:rPr lang="en-US" smtClean="0"/>
-              <a:t>4/6/2026</a:t>
+              <a:t>4/13/2026</a:t>
             </a:fld>
             <a:endParaRPr lang="en-US"/>
           </a:p>
@@ -5401,988 +5074,6 @@
         <p:cNvPr id="1" name="">
           <a:extLst>
             <a:ext uri="{FF2B5EF4-FFF2-40B4-BE49-F238E27FC236}">
-              <a16:creationId xmlns:a16="http://schemas.microsoft.com/office/drawing/2014/main" id="{61AEB1FF-0DEE-8E69-16D6-27C30FC7E24F}"/>
-            </a:ext>
-          </a:extLst>
-        </p:cNvPr>
-        <p:cNvGrpSpPr/>
-        <p:nvPr/>
-      </p:nvGrpSpPr>
-      <p:grpSpPr>
-        <a:xfrm>
-          <a:off x="0" y="0"/>
-          <a:ext cx="0" cy="0"/>
-          <a:chOff x="0" y="0"/>
-          <a:chExt cx="0" cy="0"/>
-        </a:xfrm>
-      </p:grpSpPr>
-      <p:sp>
-        <p:nvSpPr>
-          <p:cNvPr id="2" name="TextBox 1">
-            <a:extLst>
-              <a:ext uri="{FF2B5EF4-FFF2-40B4-BE49-F238E27FC236}">
-                <a16:creationId xmlns:a16="http://schemas.microsoft.com/office/drawing/2014/main" id="{17D3DFF1-6C8E-4E00-38A6-15526C8A1849}"/>
-              </a:ext>
-            </a:extLst>
-          </p:cNvPr>
-          <p:cNvSpPr txBox="1"/>
-          <p:nvPr/>
-        </p:nvSpPr>
-        <p:spPr>
-          <a:xfrm>
-            <a:off x="265471" y="196645"/>
-            <a:ext cx="11661058" cy="523220"/>
-          </a:xfrm>
-          <a:prstGeom prst="rect">
-            <a:avLst/>
-          </a:prstGeom>
-          <a:noFill/>
-        </p:spPr>
-        <p:txBody>
-          <a:bodyPr wrap="square" rtlCol="0">
-            <a:spAutoFit/>
-          </a:bodyPr>
-          <a:lstStyle/>
-          <a:p>
-            <a:r>
-              <a:rPr lang="en-US" sz="2800" b="1" dirty="0"/>
-              <a:t>Technology Stack</a:t>
-            </a:r>
-          </a:p>
-        </p:txBody>
-      </p:sp>
-      <p:sp>
-        <p:nvSpPr>
-          <p:cNvPr id="3" name="TextBox 2">
-            <a:extLst>
-              <a:ext uri="{FF2B5EF4-FFF2-40B4-BE49-F238E27FC236}">
-                <a16:creationId xmlns:a16="http://schemas.microsoft.com/office/drawing/2014/main" id="{2A5B6ED7-B1C6-1D1F-0557-5F2E56CBFCB9}"/>
-              </a:ext>
-            </a:extLst>
-          </p:cNvPr>
-          <p:cNvSpPr txBox="1"/>
-          <p:nvPr/>
-        </p:nvSpPr>
-        <p:spPr>
-          <a:xfrm>
-            <a:off x="265471" y="792624"/>
-            <a:ext cx="11661058" cy="6647974"/>
-          </a:xfrm>
-          <a:prstGeom prst="rect">
-            <a:avLst/>
-          </a:prstGeom>
-          <a:noFill/>
-        </p:spPr>
-        <p:txBody>
-          <a:bodyPr wrap="square" rtlCol="0">
-            <a:spAutoFit/>
-          </a:bodyPr>
-          <a:lstStyle/>
-          <a:p>
-            <a:pPr marL="342900" indent="-342900">
-              <a:buFont typeface="Wingdings" panose="05000000000000000000" pitchFamily="2" charset="2"/>
-              <a:buChar char="Ø"/>
-            </a:pPr>
-            <a:r>
-              <a:rPr lang="en-US" sz="2000" b="1" dirty="0">
-                <a:latin typeface="Times New Roman" panose="02020603050405020304" pitchFamily="18" charset="0"/>
-                <a:cs typeface="Times New Roman" panose="02020603050405020304" pitchFamily="18" charset="0"/>
-              </a:rPr>
-              <a:t>Programming Language</a:t>
-            </a:r>
-          </a:p>
-          <a:p>
-            <a:pPr marL="342900" indent="-342900">
-              <a:buFont typeface="Wingdings" panose="05000000000000000000" pitchFamily="2" charset="2"/>
-              <a:buChar char="ü"/>
-            </a:pPr>
-            <a:r>
-              <a:rPr lang="en-US" sz="2000" dirty="0"/>
-              <a:t>Python 3.9+</a:t>
-            </a:r>
-          </a:p>
-          <a:p>
-            <a:pPr marL="342900" indent="-342900">
-              <a:buFont typeface="Wingdings" panose="05000000000000000000" pitchFamily="2" charset="2"/>
-              <a:buChar char="ü"/>
-            </a:pPr>
-            <a:endParaRPr lang="en-US" sz="2000" dirty="0">
-              <a:latin typeface="Times New Roman" panose="02020603050405020304" pitchFamily="18" charset="0"/>
-              <a:cs typeface="Times New Roman" panose="02020603050405020304" pitchFamily="18" charset="0"/>
-            </a:endParaRPr>
-          </a:p>
-          <a:p>
-            <a:pPr marL="342900" indent="-342900">
-              <a:buFont typeface="Wingdings" panose="05000000000000000000" pitchFamily="2" charset="2"/>
-              <a:buChar char="Ø"/>
-            </a:pPr>
-            <a:r>
-              <a:rPr lang="en-US" sz="2000" b="1" dirty="0">
-                <a:latin typeface="Times New Roman" panose="02020603050405020304" pitchFamily="18" charset="0"/>
-                <a:cs typeface="Times New Roman" panose="02020603050405020304" pitchFamily="18" charset="0"/>
-              </a:rPr>
-              <a:t>Backend Development</a:t>
-            </a:r>
-          </a:p>
-          <a:p>
-            <a:pPr marL="342900" indent="-342900">
-              <a:buFont typeface="Wingdings" panose="05000000000000000000" pitchFamily="2" charset="2"/>
-              <a:buChar char="ü"/>
-            </a:pPr>
-            <a:r>
-              <a:rPr lang="en-US" sz="2000" dirty="0">
-                <a:latin typeface="Times New Roman" panose="02020603050405020304" pitchFamily="18" charset="0"/>
-                <a:cs typeface="Times New Roman" panose="02020603050405020304" pitchFamily="18" charset="0"/>
-              </a:rPr>
-              <a:t>Flask (Web Framework)</a:t>
-            </a:r>
-          </a:p>
-          <a:p>
-            <a:pPr marL="342900" indent="-342900">
-              <a:buFont typeface="Wingdings" panose="05000000000000000000" pitchFamily="2" charset="2"/>
-              <a:buChar char="ü"/>
-            </a:pPr>
-            <a:r>
-              <a:rPr lang="en-US" sz="2000" dirty="0">
-                <a:latin typeface="Times New Roman" panose="02020603050405020304" pitchFamily="18" charset="0"/>
-                <a:cs typeface="Times New Roman" panose="02020603050405020304" pitchFamily="18" charset="0"/>
-              </a:rPr>
-              <a:t>Flask-CORS</a:t>
-            </a:r>
-          </a:p>
-          <a:p>
-            <a:pPr marL="342900" indent="-342900">
-              <a:buFont typeface="Wingdings" panose="05000000000000000000" pitchFamily="2" charset="2"/>
-              <a:buChar char="ü"/>
-            </a:pPr>
-            <a:r>
-              <a:rPr lang="en-US" sz="2000" dirty="0" err="1">
-                <a:latin typeface="Times New Roman" panose="02020603050405020304" pitchFamily="18" charset="0"/>
-                <a:cs typeface="Times New Roman" panose="02020603050405020304" pitchFamily="18" charset="0"/>
-              </a:rPr>
-              <a:t>dotenv</a:t>
-            </a:r>
-            <a:r>
-              <a:rPr lang="en-US" sz="2000" dirty="0">
-                <a:latin typeface="Times New Roman" panose="02020603050405020304" pitchFamily="18" charset="0"/>
-                <a:cs typeface="Times New Roman" panose="02020603050405020304" pitchFamily="18" charset="0"/>
-              </a:rPr>
-              <a:t> (Environment variable management)</a:t>
-            </a:r>
-          </a:p>
-          <a:p>
-            <a:pPr marL="342900" indent="-342900">
-              <a:buFont typeface="Wingdings" panose="05000000000000000000" pitchFamily="2" charset="2"/>
-              <a:buChar char="ü"/>
-            </a:pPr>
-            <a:r>
-              <a:rPr lang="en-US" dirty="0" err="1">
-                <a:latin typeface="Times New Roman" panose="02020603050405020304" pitchFamily="18" charset="0"/>
-                <a:cs typeface="Times New Roman" panose="02020603050405020304" pitchFamily="18" charset="0"/>
-              </a:rPr>
-              <a:t>Werkzeug</a:t>
-            </a:r>
-            <a:r>
-              <a:rPr lang="en-US" dirty="0">
-                <a:latin typeface="Times New Roman" panose="02020603050405020304" pitchFamily="18" charset="0"/>
-                <a:cs typeface="Times New Roman" panose="02020603050405020304" pitchFamily="18" charset="0"/>
-              </a:rPr>
-              <a:t> </a:t>
-            </a:r>
-          </a:p>
-          <a:p>
-            <a:pPr marL="342900" indent="-342900">
-              <a:buFont typeface="Wingdings" panose="05000000000000000000" pitchFamily="2" charset="2"/>
-              <a:buChar char="ü"/>
-            </a:pPr>
-            <a:r>
-              <a:rPr lang="en-US" dirty="0">
-                <a:latin typeface="Times New Roman" panose="02020603050405020304" pitchFamily="18" charset="0"/>
-                <a:cs typeface="Times New Roman" panose="02020603050405020304" pitchFamily="18" charset="0"/>
-              </a:rPr>
-              <a:t>Requests </a:t>
-            </a:r>
-          </a:p>
-          <a:p>
-            <a:pPr marL="342900" indent="-342900">
-              <a:buFont typeface="Wingdings" panose="05000000000000000000" pitchFamily="2" charset="2"/>
-              <a:buChar char="ü"/>
-            </a:pPr>
-            <a:r>
-              <a:rPr lang="en-US" dirty="0" err="1">
-                <a:latin typeface="Times New Roman" panose="02020603050405020304" pitchFamily="18" charset="0"/>
-                <a:cs typeface="Times New Roman" panose="02020603050405020304" pitchFamily="18" charset="0"/>
-              </a:rPr>
-              <a:t>bcrypt</a:t>
-            </a:r>
-            <a:endParaRPr lang="en-US" dirty="0">
-              <a:latin typeface="Times New Roman" panose="02020603050405020304" pitchFamily="18" charset="0"/>
-              <a:cs typeface="Times New Roman" panose="02020603050405020304" pitchFamily="18" charset="0"/>
-            </a:endParaRPr>
-          </a:p>
-          <a:p>
-            <a:pPr marL="342900" indent="-342900">
-              <a:buFont typeface="Wingdings" panose="05000000000000000000" pitchFamily="2" charset="2"/>
-              <a:buChar char="ü"/>
-            </a:pPr>
-            <a:r>
-              <a:rPr lang="en-US" dirty="0" err="1">
-                <a:latin typeface="Times New Roman" panose="02020603050405020304" pitchFamily="18" charset="0"/>
-                <a:cs typeface="Times New Roman" panose="02020603050405020304" pitchFamily="18" charset="0"/>
-              </a:rPr>
-              <a:t>joblib</a:t>
-            </a:r>
-            <a:r>
-              <a:rPr lang="en-US" dirty="0">
-                <a:latin typeface="Times New Roman" panose="02020603050405020304" pitchFamily="18" charset="0"/>
-                <a:cs typeface="Times New Roman" panose="02020603050405020304" pitchFamily="18" charset="0"/>
-              </a:rPr>
-              <a:t> </a:t>
-            </a:r>
-          </a:p>
-          <a:p>
-            <a:pPr marL="342900" indent="-342900">
-              <a:buFont typeface="Wingdings" panose="05000000000000000000" pitchFamily="2" charset="2"/>
-              <a:buChar char="ü"/>
-            </a:pPr>
-            <a:r>
-              <a:rPr lang="en-US" dirty="0" err="1">
-                <a:latin typeface="Times New Roman" panose="02020603050405020304" pitchFamily="18" charset="0"/>
-                <a:cs typeface="Times New Roman" panose="02020603050405020304" pitchFamily="18" charset="0"/>
-              </a:rPr>
-              <a:t>smtplib</a:t>
-            </a:r>
-            <a:r>
-              <a:rPr lang="en-US" dirty="0">
-                <a:latin typeface="Times New Roman" panose="02020603050405020304" pitchFamily="18" charset="0"/>
-                <a:cs typeface="Times New Roman" panose="02020603050405020304" pitchFamily="18" charset="0"/>
-              </a:rPr>
-              <a:t> + </a:t>
-            </a:r>
-            <a:r>
-              <a:rPr lang="en-US" dirty="0" err="1">
-                <a:latin typeface="Times New Roman" panose="02020603050405020304" pitchFamily="18" charset="0"/>
-                <a:cs typeface="Times New Roman" panose="02020603050405020304" pitchFamily="18" charset="0"/>
-              </a:rPr>
-              <a:t>ssl</a:t>
-            </a:r>
-            <a:r>
-              <a:rPr lang="en-US" dirty="0">
-                <a:latin typeface="Times New Roman" panose="02020603050405020304" pitchFamily="18" charset="0"/>
-                <a:cs typeface="Times New Roman" panose="02020603050405020304" pitchFamily="18" charset="0"/>
-              </a:rPr>
-              <a:t> </a:t>
-            </a:r>
-          </a:p>
-          <a:p>
-            <a:pPr marL="342900" indent="-342900">
-              <a:buFont typeface="Wingdings" panose="05000000000000000000" pitchFamily="2" charset="2"/>
-              <a:buChar char="ü"/>
-            </a:pPr>
-            <a:r>
-              <a:rPr lang="en-US" dirty="0">
-                <a:latin typeface="Times New Roman" panose="02020603050405020304" pitchFamily="18" charset="0"/>
-                <a:cs typeface="Times New Roman" panose="02020603050405020304" pitchFamily="18" charset="0"/>
-              </a:rPr>
-              <a:t>SMTP / Gmail</a:t>
-            </a:r>
-          </a:p>
-          <a:p>
-            <a:pPr marL="342900" indent="-342900">
-              <a:buFont typeface="Wingdings" panose="05000000000000000000" pitchFamily="2" charset="2"/>
-              <a:buChar char="ü"/>
-            </a:pPr>
-            <a:endParaRPr lang="en-US" b="1" dirty="0"/>
-          </a:p>
-          <a:p>
-            <a:pPr marL="342900" indent="-342900">
-              <a:buFont typeface="Wingdings" panose="05000000000000000000" pitchFamily="2" charset="2"/>
-              <a:buChar char="Ø"/>
-            </a:pPr>
-            <a:r>
-              <a:rPr lang="en-US" sz="2000" b="1" dirty="0">
-                <a:latin typeface="Times New Roman" panose="02020603050405020304" pitchFamily="18" charset="0"/>
-                <a:cs typeface="Times New Roman" panose="02020603050405020304" pitchFamily="18" charset="0"/>
-              </a:rPr>
-              <a:t>Machine Learning &amp; Deep Learning</a:t>
-            </a:r>
-          </a:p>
-          <a:p>
-            <a:pPr marL="342900" indent="-342900">
-              <a:buFont typeface="Wingdings" panose="05000000000000000000" pitchFamily="2" charset="2"/>
-              <a:buChar char="ü"/>
-            </a:pPr>
-            <a:r>
-              <a:rPr lang="en-US" sz="2000" dirty="0">
-                <a:latin typeface="Times New Roman" panose="02020603050405020304" pitchFamily="18" charset="0"/>
-                <a:cs typeface="Times New Roman" panose="02020603050405020304" pitchFamily="18" charset="0"/>
-              </a:rPr>
-              <a:t>TensorFlow</a:t>
-            </a:r>
-          </a:p>
-          <a:p>
-            <a:pPr marL="342900" indent="-342900">
-              <a:buFont typeface="Wingdings" panose="05000000000000000000" pitchFamily="2" charset="2"/>
-              <a:buChar char="ü"/>
-            </a:pPr>
-            <a:r>
-              <a:rPr lang="en-US" sz="2000" dirty="0" err="1">
-                <a:latin typeface="Times New Roman" panose="02020603050405020304" pitchFamily="18" charset="0"/>
-                <a:cs typeface="Times New Roman" panose="02020603050405020304" pitchFamily="18" charset="0"/>
-              </a:rPr>
-              <a:t>KerasLSTM</a:t>
-            </a:r>
-            <a:r>
-              <a:rPr lang="en-US" sz="2000" dirty="0">
-                <a:latin typeface="Times New Roman" panose="02020603050405020304" pitchFamily="18" charset="0"/>
-                <a:cs typeface="Times New Roman" panose="02020603050405020304" pitchFamily="18" charset="0"/>
-              </a:rPr>
-              <a:t> (Long Short-Term Memory Neural Network)</a:t>
-            </a:r>
-          </a:p>
-          <a:p>
-            <a:pPr marL="342900" indent="-342900">
-              <a:buFont typeface="Wingdings" panose="05000000000000000000" pitchFamily="2" charset="2"/>
-              <a:buChar char="ü"/>
-            </a:pPr>
-            <a:r>
-              <a:rPr lang="en-US" sz="2000" dirty="0">
-                <a:latin typeface="Times New Roman" panose="02020603050405020304" pitchFamily="18" charset="0"/>
-                <a:cs typeface="Times New Roman" panose="02020603050405020304" pitchFamily="18" charset="0"/>
-              </a:rPr>
-              <a:t>Scikit-learn</a:t>
-            </a:r>
-          </a:p>
-          <a:p>
-            <a:pPr marL="342900" indent="-342900">
-              <a:buFont typeface="Wingdings" panose="05000000000000000000" pitchFamily="2" charset="2"/>
-              <a:buChar char="ü"/>
-            </a:pPr>
-            <a:r>
-              <a:rPr lang="en-US" sz="2000" dirty="0">
-                <a:latin typeface="Times New Roman" panose="02020603050405020304" pitchFamily="18" charset="0"/>
-                <a:cs typeface="Times New Roman" panose="02020603050405020304" pitchFamily="18" charset="0"/>
-              </a:rPr>
-              <a:t>SMOTE (for class imbalance handling)</a:t>
-            </a:r>
-          </a:p>
-          <a:p>
-            <a:pPr marL="342900" indent="-342900">
-              <a:buFont typeface="Wingdings" panose="05000000000000000000" pitchFamily="2" charset="2"/>
-              <a:buChar char="ü"/>
-            </a:pPr>
-            <a:endParaRPr lang="en-US" sz="2000" dirty="0">
-              <a:latin typeface="Times New Roman" panose="02020603050405020304" pitchFamily="18" charset="0"/>
-              <a:cs typeface="Times New Roman" panose="02020603050405020304" pitchFamily="18" charset="0"/>
-            </a:endParaRPr>
-          </a:p>
-          <a:p>
-            <a:endParaRPr lang="en-US" sz="2000" dirty="0">
-              <a:latin typeface="Times New Roman" panose="02020603050405020304" pitchFamily="18" charset="0"/>
-              <a:cs typeface="Times New Roman" panose="02020603050405020304" pitchFamily="18" charset="0"/>
-            </a:endParaRPr>
-          </a:p>
-          <a:p>
-            <a:pPr marL="342900" indent="-342900">
-              <a:buFont typeface="Wingdings" panose="05000000000000000000" pitchFamily="2" charset="2"/>
-              <a:buChar char="Ø"/>
-            </a:pPr>
-            <a:endParaRPr lang="en-US" sz="2000" dirty="0">
-              <a:latin typeface="Times New Roman" panose="02020603050405020304" pitchFamily="18" charset="0"/>
-              <a:cs typeface="Times New Roman" panose="02020603050405020304" pitchFamily="18" charset="0"/>
-            </a:endParaRPr>
-          </a:p>
-        </p:txBody>
-      </p:sp>
-    </p:spTree>
-    <p:extLst>
-      <p:ext uri="{BB962C8B-B14F-4D97-AF65-F5344CB8AC3E}">
-        <p14:creationId xmlns:p14="http://schemas.microsoft.com/office/powerpoint/2010/main" val="2232911322"/>
-      </p:ext>
-    </p:extLst>
-  </p:cSld>
-  <p:clrMapOvr>
-    <a:masterClrMapping/>
-  </p:clrMapOvr>
-</p:sld>
-</file>
-
-<file path=ppt/slides/slide11.xml><?xml version="1.0" encoding="utf-8"?>
-<p:sld xmlns:a="http://schemas.openxmlformats.org/drawingml/2006/main" xmlns:r="http://schemas.openxmlformats.org/officeDocument/2006/relationships" xmlns:p="http://schemas.openxmlformats.org/presentationml/2006/main">
-  <p:cSld>
-    <p:spTree>
-      <p:nvGrpSpPr>
-        <p:cNvPr id="1" name="">
-          <a:extLst>
-            <a:ext uri="{FF2B5EF4-FFF2-40B4-BE49-F238E27FC236}">
-              <a16:creationId xmlns:a16="http://schemas.microsoft.com/office/drawing/2014/main" id="{E88DE268-9F6D-A81F-5378-7FA45AA68F64}"/>
-            </a:ext>
-          </a:extLst>
-        </p:cNvPr>
-        <p:cNvGrpSpPr/>
-        <p:nvPr/>
-      </p:nvGrpSpPr>
-      <p:grpSpPr>
-        <a:xfrm>
-          <a:off x="0" y="0"/>
-          <a:ext cx="0" cy="0"/>
-          <a:chOff x="0" y="0"/>
-          <a:chExt cx="0" cy="0"/>
-        </a:xfrm>
-      </p:grpSpPr>
-      <p:sp>
-        <p:nvSpPr>
-          <p:cNvPr id="2" name="TextBox 1">
-            <a:extLst>
-              <a:ext uri="{FF2B5EF4-FFF2-40B4-BE49-F238E27FC236}">
-                <a16:creationId xmlns:a16="http://schemas.microsoft.com/office/drawing/2014/main" id="{5D53F026-F5DB-DDE2-43F2-F834CBE92A42}"/>
-              </a:ext>
-            </a:extLst>
-          </p:cNvPr>
-          <p:cNvSpPr txBox="1"/>
-          <p:nvPr/>
-        </p:nvSpPr>
-        <p:spPr>
-          <a:xfrm>
-            <a:off x="265471" y="196645"/>
-            <a:ext cx="11661058" cy="523220"/>
-          </a:xfrm>
-          <a:prstGeom prst="rect">
-            <a:avLst/>
-          </a:prstGeom>
-          <a:noFill/>
-        </p:spPr>
-        <p:txBody>
-          <a:bodyPr wrap="square" rtlCol="0">
-            <a:spAutoFit/>
-          </a:bodyPr>
-          <a:lstStyle/>
-          <a:p>
-            <a:r>
-              <a:rPr lang="en-US" sz="2800" b="1" dirty="0"/>
-              <a:t>Technology Stack</a:t>
-            </a:r>
-          </a:p>
-        </p:txBody>
-      </p:sp>
-      <p:sp>
-        <p:nvSpPr>
-          <p:cNvPr id="3" name="TextBox 2">
-            <a:extLst>
-              <a:ext uri="{FF2B5EF4-FFF2-40B4-BE49-F238E27FC236}">
-                <a16:creationId xmlns:a16="http://schemas.microsoft.com/office/drawing/2014/main" id="{565F52EF-E9A8-F732-260A-5D982A1CF5E3}"/>
-              </a:ext>
-            </a:extLst>
-          </p:cNvPr>
-          <p:cNvSpPr txBox="1"/>
-          <p:nvPr/>
-        </p:nvSpPr>
-        <p:spPr>
-          <a:xfrm>
-            <a:off x="265470" y="2563818"/>
-            <a:ext cx="11661058" cy="4093428"/>
-          </a:xfrm>
-          <a:prstGeom prst="rect">
-            <a:avLst/>
-          </a:prstGeom>
-          <a:noFill/>
-        </p:spPr>
-        <p:txBody>
-          <a:bodyPr wrap="square" rtlCol="0">
-            <a:spAutoFit/>
-          </a:bodyPr>
-          <a:lstStyle/>
-          <a:p>
-            <a:pPr marL="342900" indent="-342900">
-              <a:buFont typeface="Wingdings" panose="05000000000000000000" pitchFamily="2" charset="2"/>
-              <a:buChar char="Ø"/>
-            </a:pPr>
-            <a:r>
-              <a:rPr lang="en-US" sz="2000" b="1" dirty="0">
-                <a:latin typeface="Times New Roman" panose="02020603050405020304" pitchFamily="18" charset="0"/>
-                <a:cs typeface="Times New Roman" panose="02020603050405020304" pitchFamily="18" charset="0"/>
-              </a:rPr>
-              <a:t>Data Processing &amp; Analysis</a:t>
-            </a:r>
-          </a:p>
-          <a:p>
-            <a:pPr marL="342900" indent="-342900">
-              <a:buFont typeface="Wingdings" panose="05000000000000000000" pitchFamily="2" charset="2"/>
-              <a:buChar char="ü"/>
-            </a:pPr>
-            <a:r>
-              <a:rPr lang="en-US" sz="2000" dirty="0">
-                <a:latin typeface="Times New Roman" panose="02020603050405020304" pitchFamily="18" charset="0"/>
-                <a:cs typeface="Times New Roman" panose="02020603050405020304" pitchFamily="18" charset="0"/>
-              </a:rPr>
-              <a:t>Pandas</a:t>
-            </a:r>
-          </a:p>
-          <a:p>
-            <a:pPr marL="342900" indent="-342900">
-              <a:buFont typeface="Wingdings" panose="05000000000000000000" pitchFamily="2" charset="2"/>
-              <a:buChar char="ü"/>
-            </a:pPr>
-            <a:r>
-              <a:rPr lang="en-US" sz="2000" dirty="0">
-                <a:latin typeface="Times New Roman" panose="02020603050405020304" pitchFamily="18" charset="0"/>
-                <a:cs typeface="Times New Roman" panose="02020603050405020304" pitchFamily="18" charset="0"/>
-              </a:rPr>
-              <a:t>NumPy</a:t>
-            </a:r>
-          </a:p>
-          <a:p>
-            <a:pPr marL="342900" indent="-342900">
-              <a:buFont typeface="Wingdings" panose="05000000000000000000" pitchFamily="2" charset="2"/>
-              <a:buChar char="ü"/>
-            </a:pPr>
-            <a:r>
-              <a:rPr lang="en-US" sz="2000" dirty="0" err="1">
-                <a:latin typeface="Times New Roman" panose="02020603050405020304" pitchFamily="18" charset="0"/>
-                <a:cs typeface="Times New Roman" panose="02020603050405020304" pitchFamily="18" charset="0"/>
-              </a:rPr>
-              <a:t>Jupyter</a:t>
-            </a:r>
-            <a:r>
-              <a:rPr lang="en-US" sz="2000" dirty="0">
-                <a:latin typeface="Times New Roman" panose="02020603050405020304" pitchFamily="18" charset="0"/>
-                <a:cs typeface="Times New Roman" panose="02020603050405020304" pitchFamily="18" charset="0"/>
-              </a:rPr>
-              <a:t> Notebook</a:t>
-            </a:r>
-          </a:p>
-          <a:p>
-            <a:pPr marL="342900" indent="-342900">
-              <a:buFont typeface="Wingdings" panose="05000000000000000000" pitchFamily="2" charset="2"/>
-              <a:buChar char="ü"/>
-            </a:pPr>
-            <a:endParaRPr lang="en-US" sz="2000" dirty="0">
-              <a:latin typeface="Times New Roman" panose="02020603050405020304" pitchFamily="18" charset="0"/>
-              <a:cs typeface="Times New Roman" panose="02020603050405020304" pitchFamily="18" charset="0"/>
-            </a:endParaRPr>
-          </a:p>
-          <a:p>
-            <a:pPr marL="342900" indent="-342900">
-              <a:buFont typeface="Wingdings" panose="05000000000000000000" pitchFamily="2" charset="2"/>
-              <a:buChar char="Ø"/>
-            </a:pPr>
-            <a:r>
-              <a:rPr lang="en-US" sz="2000" b="1" dirty="0">
-                <a:latin typeface="Times New Roman" panose="02020603050405020304" pitchFamily="18" charset="0"/>
-                <a:cs typeface="Times New Roman" panose="02020603050405020304" pitchFamily="18" charset="0"/>
-              </a:rPr>
-              <a:t>Frontend Development</a:t>
-            </a:r>
-          </a:p>
-          <a:p>
-            <a:pPr marL="342900" indent="-342900">
-              <a:buFont typeface="Wingdings" panose="05000000000000000000" pitchFamily="2" charset="2"/>
-              <a:buChar char="ü"/>
-            </a:pPr>
-            <a:r>
-              <a:rPr lang="en-US" sz="2000" dirty="0">
-                <a:latin typeface="Times New Roman" panose="02020603050405020304" pitchFamily="18" charset="0"/>
-                <a:cs typeface="Times New Roman" panose="02020603050405020304" pitchFamily="18" charset="0"/>
-              </a:rPr>
-              <a:t>HTML</a:t>
-            </a:r>
-          </a:p>
-          <a:p>
-            <a:pPr marL="342900" indent="-342900">
-              <a:buFont typeface="Wingdings" panose="05000000000000000000" pitchFamily="2" charset="2"/>
-              <a:buChar char="ü"/>
-            </a:pPr>
-            <a:r>
-              <a:rPr lang="en-US" sz="2000" dirty="0">
-                <a:latin typeface="Times New Roman" panose="02020603050405020304" pitchFamily="18" charset="0"/>
-                <a:cs typeface="Times New Roman" panose="02020603050405020304" pitchFamily="18" charset="0"/>
-              </a:rPr>
-              <a:t>CSS</a:t>
-            </a:r>
-          </a:p>
-          <a:p>
-            <a:pPr marL="342900" indent="-342900">
-              <a:buFont typeface="Wingdings" panose="05000000000000000000" pitchFamily="2" charset="2"/>
-              <a:buChar char="ü"/>
-            </a:pPr>
-            <a:r>
-              <a:rPr lang="en-US" sz="2000" dirty="0" err="1">
-                <a:latin typeface="Times New Roman" panose="02020603050405020304" pitchFamily="18" charset="0"/>
-                <a:cs typeface="Times New Roman" panose="02020603050405020304" pitchFamily="18" charset="0"/>
-              </a:rPr>
-              <a:t>Javascript</a:t>
-            </a:r>
-            <a:endParaRPr lang="en-US" sz="2000" dirty="0">
-              <a:latin typeface="Times New Roman" panose="02020603050405020304" pitchFamily="18" charset="0"/>
-              <a:cs typeface="Times New Roman" panose="02020603050405020304" pitchFamily="18" charset="0"/>
-            </a:endParaRPr>
-          </a:p>
-          <a:p>
-            <a:pPr marL="342900" indent="-342900">
-              <a:buFont typeface="Wingdings" panose="05000000000000000000" pitchFamily="2" charset="2"/>
-              <a:buChar char="ü"/>
-            </a:pPr>
-            <a:endParaRPr lang="en-US" sz="2000" dirty="0">
-              <a:latin typeface="Times New Roman" panose="02020603050405020304" pitchFamily="18" charset="0"/>
-              <a:cs typeface="Times New Roman" panose="02020603050405020304" pitchFamily="18" charset="0"/>
-            </a:endParaRPr>
-          </a:p>
-          <a:p>
-            <a:pPr marL="342900" indent="-342900">
-              <a:buFont typeface="Wingdings" panose="05000000000000000000" pitchFamily="2" charset="2"/>
-              <a:buChar char="Ø"/>
-            </a:pPr>
-            <a:r>
-              <a:rPr lang="en-US" sz="2000" b="1" dirty="0">
-                <a:latin typeface="Times New Roman" panose="02020603050405020304" pitchFamily="18" charset="0"/>
-                <a:cs typeface="Times New Roman" panose="02020603050405020304" pitchFamily="18" charset="0"/>
-              </a:rPr>
-              <a:t>Visualization</a:t>
-            </a:r>
-          </a:p>
-          <a:p>
-            <a:pPr marL="342900" indent="-342900">
-              <a:buFont typeface="Wingdings" panose="05000000000000000000" pitchFamily="2" charset="2"/>
-              <a:buChar char="ü"/>
-            </a:pPr>
-            <a:r>
-              <a:rPr lang="en-US" sz="2000" dirty="0"/>
-              <a:t>Tableau Public</a:t>
-            </a:r>
-          </a:p>
-          <a:p>
-            <a:endParaRPr lang="en-US" sz="2000" dirty="0">
-              <a:latin typeface="Times New Roman" panose="02020603050405020304" pitchFamily="18" charset="0"/>
-              <a:cs typeface="Times New Roman" panose="02020603050405020304" pitchFamily="18" charset="0"/>
-            </a:endParaRPr>
-          </a:p>
-        </p:txBody>
-      </p:sp>
-      <p:sp>
-        <p:nvSpPr>
-          <p:cNvPr id="4" name="TextBox 3">
-            <a:extLst>
-              <a:ext uri="{FF2B5EF4-FFF2-40B4-BE49-F238E27FC236}">
-                <a16:creationId xmlns:a16="http://schemas.microsoft.com/office/drawing/2014/main" id="{0375B4EA-9D8E-1A99-132E-87A8629B9F85}"/>
-              </a:ext>
-            </a:extLst>
-          </p:cNvPr>
-          <p:cNvSpPr txBox="1"/>
-          <p:nvPr/>
-        </p:nvSpPr>
-        <p:spPr>
-          <a:xfrm>
-            <a:off x="265470" y="815048"/>
-            <a:ext cx="11661058" cy="707886"/>
-          </a:xfrm>
-          <a:prstGeom prst="rect">
-            <a:avLst/>
-          </a:prstGeom>
-          <a:noFill/>
-        </p:spPr>
-        <p:txBody>
-          <a:bodyPr wrap="square" rtlCol="0">
-            <a:spAutoFit/>
-          </a:bodyPr>
-          <a:lstStyle/>
-          <a:p>
-            <a:pPr marL="285750" indent="-285750">
-              <a:buFont typeface="Wingdings" panose="05000000000000000000" pitchFamily="2" charset="2"/>
-              <a:buChar char="Ø"/>
-            </a:pPr>
-            <a:r>
-              <a:rPr lang="en-US" sz="2000" b="1" dirty="0">
-                <a:latin typeface="Times New Roman" panose="02020603050405020304" pitchFamily="18" charset="0"/>
-                <a:cs typeface="Times New Roman" panose="02020603050405020304" pitchFamily="18" charset="0"/>
-              </a:rPr>
-              <a:t>Cloud &amp; Database</a:t>
-            </a:r>
-          </a:p>
-          <a:p>
-            <a:pPr marL="342900" indent="-342900">
-              <a:buFont typeface="Wingdings" panose="05000000000000000000" pitchFamily="2" charset="2"/>
-              <a:buChar char="ü"/>
-            </a:pPr>
-            <a:r>
-              <a:rPr lang="en-US" sz="2000" dirty="0" err="1"/>
-              <a:t>Supabase</a:t>
-            </a:r>
-            <a:endParaRPr lang="en-US" sz="2000" dirty="0">
-              <a:latin typeface="Times New Roman" panose="02020603050405020304" pitchFamily="18" charset="0"/>
-              <a:cs typeface="Times New Roman" panose="02020603050405020304" pitchFamily="18" charset="0"/>
-            </a:endParaRPr>
-          </a:p>
-        </p:txBody>
-      </p:sp>
-      <p:sp>
-        <p:nvSpPr>
-          <p:cNvPr id="5" name="TextBox 4">
-            <a:extLst>
-              <a:ext uri="{FF2B5EF4-FFF2-40B4-BE49-F238E27FC236}">
-                <a16:creationId xmlns:a16="http://schemas.microsoft.com/office/drawing/2014/main" id="{3276B693-3FB5-31F7-B40B-15F91AF78375}"/>
-              </a:ext>
-            </a:extLst>
-          </p:cNvPr>
-          <p:cNvSpPr txBox="1"/>
-          <p:nvPr/>
-        </p:nvSpPr>
-        <p:spPr>
-          <a:xfrm>
-            <a:off x="648929" y="1522934"/>
-            <a:ext cx="11277599" cy="923330"/>
-          </a:xfrm>
-          <a:prstGeom prst="rect">
-            <a:avLst/>
-          </a:prstGeom>
-          <a:noFill/>
-        </p:spPr>
-        <p:txBody>
-          <a:bodyPr wrap="square" rtlCol="0">
-            <a:spAutoFit/>
-          </a:bodyPr>
-          <a:lstStyle/>
-          <a:p>
-            <a:pPr marL="285750" indent="-285750">
-              <a:buFont typeface="Arial" panose="020B0604020202020204" pitchFamily="34" charset="0"/>
-              <a:buChar char="•"/>
-            </a:pPr>
-            <a:r>
-              <a:rPr lang="en-US" dirty="0" err="1"/>
-              <a:t>Supabase</a:t>
-            </a:r>
-            <a:r>
-              <a:rPr lang="en-US" dirty="0"/>
-              <a:t> PostgreSQL (Database)</a:t>
-            </a:r>
-          </a:p>
-          <a:p>
-            <a:pPr marL="285750" indent="-285750">
-              <a:buFont typeface="Arial" panose="020B0604020202020204" pitchFamily="34" charset="0"/>
-              <a:buChar char="•"/>
-            </a:pPr>
-            <a:r>
-              <a:rPr lang="en-US" dirty="0" err="1"/>
-              <a:t>Supabase</a:t>
-            </a:r>
-            <a:r>
-              <a:rPr lang="en-US" dirty="0"/>
-              <a:t> Storage (Cloud Storage)</a:t>
-            </a:r>
-          </a:p>
-          <a:p>
-            <a:pPr marL="285750" indent="-285750">
-              <a:buFont typeface="Arial" panose="020B0604020202020204" pitchFamily="34" charset="0"/>
-              <a:buChar char="•"/>
-            </a:pPr>
-            <a:r>
-              <a:rPr lang="en-US" dirty="0" err="1"/>
-              <a:t>Supabase</a:t>
-            </a:r>
-            <a:r>
-              <a:rPr lang="en-US" dirty="0"/>
-              <a:t> Auth (Authentication)</a:t>
-            </a:r>
-          </a:p>
-        </p:txBody>
-      </p:sp>
-    </p:spTree>
-    <p:extLst>
-      <p:ext uri="{BB962C8B-B14F-4D97-AF65-F5344CB8AC3E}">
-        <p14:creationId xmlns:p14="http://schemas.microsoft.com/office/powerpoint/2010/main" val="3005237376"/>
-      </p:ext>
-    </p:extLst>
-  </p:cSld>
-  <p:clrMapOvr>
-    <a:masterClrMapping/>
-  </p:clrMapOvr>
-</p:sld>
-</file>
-
-<file path=ppt/slides/slide12.xml><?xml version="1.0" encoding="utf-8"?>
-<p:sld xmlns:a="http://schemas.openxmlformats.org/drawingml/2006/main" xmlns:r="http://schemas.openxmlformats.org/officeDocument/2006/relationships" xmlns:p="http://schemas.openxmlformats.org/presentationml/2006/main">
-  <p:cSld>
-    <p:spTree>
-      <p:nvGrpSpPr>
-        <p:cNvPr id="1" name="">
-          <a:extLst>
-            <a:ext uri="{FF2B5EF4-FFF2-40B4-BE49-F238E27FC236}">
-              <a16:creationId xmlns:a16="http://schemas.microsoft.com/office/drawing/2014/main" id="{6E68B785-70A1-FE73-7CB4-D80FEBDF6441}"/>
-            </a:ext>
-          </a:extLst>
-        </p:cNvPr>
-        <p:cNvGrpSpPr/>
-        <p:nvPr/>
-      </p:nvGrpSpPr>
-      <p:grpSpPr>
-        <a:xfrm>
-          <a:off x="0" y="0"/>
-          <a:ext cx="0" cy="0"/>
-          <a:chOff x="0" y="0"/>
-          <a:chExt cx="0" cy="0"/>
-        </a:xfrm>
-      </p:grpSpPr>
-      <p:sp>
-        <p:nvSpPr>
-          <p:cNvPr id="2" name="TextBox 1">
-            <a:extLst>
-              <a:ext uri="{FF2B5EF4-FFF2-40B4-BE49-F238E27FC236}">
-                <a16:creationId xmlns:a16="http://schemas.microsoft.com/office/drawing/2014/main" id="{98F204D3-8311-111B-B37A-C77025B300C5}"/>
-              </a:ext>
-            </a:extLst>
-          </p:cNvPr>
-          <p:cNvSpPr txBox="1"/>
-          <p:nvPr/>
-        </p:nvSpPr>
-        <p:spPr>
-          <a:xfrm>
-            <a:off x="265471" y="196645"/>
-            <a:ext cx="11661058" cy="523220"/>
-          </a:xfrm>
-          <a:prstGeom prst="rect">
-            <a:avLst/>
-          </a:prstGeom>
-          <a:noFill/>
-        </p:spPr>
-        <p:txBody>
-          <a:bodyPr wrap="square" rtlCol="0">
-            <a:spAutoFit/>
-          </a:bodyPr>
-          <a:lstStyle/>
-          <a:p>
-            <a:r>
-              <a:rPr lang="en-US" sz="2800" b="1" dirty="0"/>
-              <a:t>Technology Stack</a:t>
-            </a:r>
-          </a:p>
-        </p:txBody>
-      </p:sp>
-      <p:sp>
-        <p:nvSpPr>
-          <p:cNvPr id="3" name="TextBox 2">
-            <a:extLst>
-              <a:ext uri="{FF2B5EF4-FFF2-40B4-BE49-F238E27FC236}">
-                <a16:creationId xmlns:a16="http://schemas.microsoft.com/office/drawing/2014/main" id="{3217FF82-EC34-378F-BF4D-20907721855C}"/>
-              </a:ext>
-            </a:extLst>
-          </p:cNvPr>
-          <p:cNvSpPr txBox="1"/>
-          <p:nvPr/>
-        </p:nvSpPr>
-        <p:spPr>
-          <a:xfrm>
-            <a:off x="265470" y="815048"/>
-            <a:ext cx="11661058" cy="2246769"/>
-          </a:xfrm>
-          <a:prstGeom prst="rect">
-            <a:avLst/>
-          </a:prstGeom>
-          <a:noFill/>
-        </p:spPr>
-        <p:txBody>
-          <a:bodyPr wrap="square" rtlCol="0">
-            <a:spAutoFit/>
-          </a:bodyPr>
-          <a:lstStyle/>
-          <a:p>
-            <a:pPr marL="342900" indent="-342900">
-              <a:buFont typeface="Wingdings" panose="05000000000000000000" pitchFamily="2" charset="2"/>
-              <a:buChar char="Ø"/>
-            </a:pPr>
-            <a:r>
-              <a:rPr lang="en-US" sz="2000" b="1" dirty="0">
-                <a:latin typeface="Times New Roman" panose="02020603050405020304" pitchFamily="18" charset="0"/>
-                <a:cs typeface="Times New Roman" panose="02020603050405020304" pitchFamily="18" charset="0"/>
-              </a:rPr>
-              <a:t>Version Control</a:t>
-            </a:r>
-          </a:p>
-          <a:p>
-            <a:pPr marL="342900" indent="-342900">
-              <a:buFont typeface="Wingdings" panose="05000000000000000000" pitchFamily="2" charset="2"/>
-              <a:buChar char="ü"/>
-            </a:pPr>
-            <a:r>
-              <a:rPr lang="en-US" sz="2000" dirty="0">
-                <a:latin typeface="Times New Roman" panose="02020603050405020304" pitchFamily="18" charset="0"/>
-                <a:cs typeface="Times New Roman" panose="02020603050405020304" pitchFamily="18" charset="0"/>
-              </a:rPr>
-              <a:t>Git</a:t>
-            </a:r>
-          </a:p>
-          <a:p>
-            <a:endParaRPr lang="en-US" sz="2000" dirty="0">
-              <a:latin typeface="Times New Roman" panose="02020603050405020304" pitchFamily="18" charset="0"/>
-              <a:cs typeface="Times New Roman" panose="02020603050405020304" pitchFamily="18" charset="0"/>
-            </a:endParaRPr>
-          </a:p>
-          <a:p>
-            <a:pPr marL="342900" indent="-342900">
-              <a:buFont typeface="Wingdings" panose="05000000000000000000" pitchFamily="2" charset="2"/>
-              <a:buChar char="Ø"/>
-            </a:pPr>
-            <a:r>
-              <a:rPr lang="en-US" sz="2000" b="1" dirty="0">
-                <a:latin typeface="Times New Roman" panose="02020603050405020304" pitchFamily="18" charset="0"/>
-                <a:cs typeface="Times New Roman" panose="02020603050405020304" pitchFamily="18" charset="0"/>
-              </a:rPr>
-              <a:t>Development Tools</a:t>
-            </a:r>
-            <a:endParaRPr lang="en-US" sz="2000" b="1" dirty="0"/>
-          </a:p>
-          <a:p>
-            <a:pPr marL="342900" indent="-342900">
-              <a:buFont typeface="Wingdings" panose="05000000000000000000" pitchFamily="2" charset="2"/>
-              <a:buChar char="ü"/>
-            </a:pPr>
-            <a:r>
-              <a:rPr lang="en-US" sz="2000" dirty="0"/>
-              <a:t>VS Code</a:t>
-            </a:r>
-          </a:p>
-          <a:p>
-            <a:pPr marL="342900" indent="-342900">
-              <a:buFont typeface="Wingdings" panose="05000000000000000000" pitchFamily="2" charset="2"/>
-              <a:buChar char="ü"/>
-            </a:pPr>
-            <a:r>
-              <a:rPr lang="en-US" sz="2000" dirty="0" err="1"/>
-              <a:t>Jupyter</a:t>
-            </a:r>
-            <a:r>
-              <a:rPr lang="en-US" sz="2000" dirty="0"/>
-              <a:t> Notebook</a:t>
-            </a:r>
-          </a:p>
-          <a:p>
-            <a:pPr marL="342900" indent="-342900">
-              <a:buFont typeface="Wingdings" panose="05000000000000000000" pitchFamily="2" charset="2"/>
-              <a:buChar char="Ø"/>
-            </a:pPr>
-            <a:endParaRPr lang="en-US" sz="2000" dirty="0"/>
-          </a:p>
-        </p:txBody>
-      </p:sp>
-    </p:spTree>
-    <p:extLst>
-      <p:ext uri="{BB962C8B-B14F-4D97-AF65-F5344CB8AC3E}">
-        <p14:creationId xmlns:p14="http://schemas.microsoft.com/office/powerpoint/2010/main" val="4500555"/>
-      </p:ext>
-    </p:extLst>
-  </p:cSld>
-  <p:clrMapOvr>
-    <a:masterClrMapping/>
-  </p:clrMapOvr>
-</p:sld>
-</file>
-
-<file path=ppt/slides/slide13.xml><?xml version="1.0" encoding="utf-8"?>
-<p:sld xmlns:a="http://schemas.openxmlformats.org/drawingml/2006/main" xmlns:r="http://schemas.openxmlformats.org/officeDocument/2006/relationships" xmlns:p="http://schemas.openxmlformats.org/presentationml/2006/main">
-  <p:cSld>
-    <p:spTree>
-      <p:nvGrpSpPr>
-        <p:cNvPr id="1" name="">
-          <a:extLst>
-            <a:ext uri="{FF2B5EF4-FFF2-40B4-BE49-F238E27FC236}">
               <a16:creationId xmlns:a16="http://schemas.microsoft.com/office/drawing/2014/main" id="{C093F5B6-0A81-ED91-3840-230D805A7644}"/>
             </a:ext>
           </a:extLst>
@@ -6649,7 +5340,7 @@
 </p:sld>
 </file>
 
-<file path=ppt/slides/slide14.xml><?xml version="1.0" encoding="utf-8"?>
+<file path=ppt/slides/slide11.xml><?xml version="1.0" encoding="utf-8"?>
 <p:sld xmlns:a="http://schemas.openxmlformats.org/drawingml/2006/main" xmlns:r="http://schemas.openxmlformats.org/officeDocument/2006/relationships" xmlns:p="http://schemas.openxmlformats.org/presentationml/2006/main">
   <p:cSld>
     <p:spTree>
@@ -6840,7 +5531,7 @@
 </p:sld>
 </file>
 
-<file path=ppt/slides/slide15.xml><?xml version="1.0" encoding="utf-8"?>
+<file path=ppt/slides/slide12.xml><?xml version="1.0" encoding="utf-8"?>
 <p:sld xmlns:a="http://schemas.openxmlformats.org/drawingml/2006/main" xmlns:r="http://schemas.openxmlformats.org/officeDocument/2006/relationships" xmlns:p="http://schemas.openxmlformats.org/presentationml/2006/main">
   <p:cSld>
     <p:spTree>
@@ -7005,7 +5696,7 @@
 </p:sld>
 </file>
 
-<file path=ppt/slides/slide16.xml><?xml version="1.0" encoding="utf-8"?>
+<file path=ppt/slides/slide13.xml><?xml version="1.0" encoding="utf-8"?>
 <p:sld xmlns:a="http://schemas.openxmlformats.org/drawingml/2006/main" xmlns:r="http://schemas.openxmlformats.org/officeDocument/2006/relationships" xmlns:p="http://schemas.openxmlformats.org/presentationml/2006/main">
   <p:cSld>
     <p:spTree>
@@ -7141,7 +5832,7 @@
 </p:sld>
 </file>
 
-<file path=ppt/slides/slide17.xml><?xml version="1.0" encoding="utf-8"?>
+<file path=ppt/slides/slide14.xml><?xml version="1.0" encoding="utf-8"?>
 <p:sld xmlns:a="http://schemas.openxmlformats.org/drawingml/2006/main" xmlns:r="http://schemas.openxmlformats.org/officeDocument/2006/relationships" xmlns:p="http://schemas.openxmlformats.org/presentationml/2006/main">
   <p:cSld>
     <p:spTree>

--- a/docs/Clg 2nd review.pptx
+++ b/docs/Clg 2nd review.pptx
@@ -210,7 +210,7 @@
           <a:p>
             <a:fld id="{C1BED7E8-5420-4F73-BA32-34A7030FE7D8}" type="datetimeFigureOut">
               <a:rPr lang="en-US" smtClean="0"/>
-              <a:t>4/13/2026</a:t>
+              <a:t>4/17/2026</a:t>
             </a:fld>
             <a:endParaRPr lang="en-US"/>
           </a:p>
@@ -1764,7 +1764,7 @@
           <a:p>
             <a:fld id="{C198EE3F-C531-4F47-81BE-EB7857D8F039}" type="datetimeFigureOut">
               <a:rPr lang="en-US" smtClean="0"/>
-              <a:t>4/13/2026</a:t>
+              <a:t>4/17/2026</a:t>
             </a:fld>
             <a:endParaRPr lang="en-US"/>
           </a:p>
@@ -1962,7 +1962,7 @@
           <a:p>
             <a:fld id="{C198EE3F-C531-4F47-81BE-EB7857D8F039}" type="datetimeFigureOut">
               <a:rPr lang="en-US" smtClean="0"/>
-              <a:t>4/13/2026</a:t>
+              <a:t>4/17/2026</a:t>
             </a:fld>
             <a:endParaRPr lang="en-US"/>
           </a:p>
@@ -2170,7 +2170,7 @@
           <a:p>
             <a:fld id="{C198EE3F-C531-4F47-81BE-EB7857D8F039}" type="datetimeFigureOut">
               <a:rPr lang="en-US" smtClean="0"/>
-              <a:t>4/13/2026</a:t>
+              <a:t>4/17/2026</a:t>
             </a:fld>
             <a:endParaRPr lang="en-US"/>
           </a:p>
@@ -2368,7 +2368,7 @@
           <a:p>
             <a:fld id="{C198EE3F-C531-4F47-81BE-EB7857D8F039}" type="datetimeFigureOut">
               <a:rPr lang="en-US" smtClean="0"/>
-              <a:t>4/13/2026</a:t>
+              <a:t>4/17/2026</a:t>
             </a:fld>
             <a:endParaRPr lang="en-US"/>
           </a:p>
@@ -2643,7 +2643,7 @@
           <a:p>
             <a:fld id="{C198EE3F-C531-4F47-81BE-EB7857D8F039}" type="datetimeFigureOut">
               <a:rPr lang="en-US" smtClean="0"/>
-              <a:t>4/13/2026</a:t>
+              <a:t>4/17/2026</a:t>
             </a:fld>
             <a:endParaRPr lang="en-US"/>
           </a:p>
@@ -2908,7 +2908,7 @@
           <a:p>
             <a:fld id="{C198EE3F-C531-4F47-81BE-EB7857D8F039}" type="datetimeFigureOut">
               <a:rPr lang="en-US" smtClean="0"/>
-              <a:t>4/13/2026</a:t>
+              <a:t>4/17/2026</a:t>
             </a:fld>
             <a:endParaRPr lang="en-US"/>
           </a:p>
@@ -3320,7 +3320,7 @@
           <a:p>
             <a:fld id="{C198EE3F-C531-4F47-81BE-EB7857D8F039}" type="datetimeFigureOut">
               <a:rPr lang="en-US" smtClean="0"/>
-              <a:t>4/13/2026</a:t>
+              <a:t>4/17/2026</a:t>
             </a:fld>
             <a:endParaRPr lang="en-US"/>
           </a:p>
@@ -3461,7 +3461,7 @@
           <a:p>
             <a:fld id="{C198EE3F-C531-4F47-81BE-EB7857D8F039}" type="datetimeFigureOut">
               <a:rPr lang="en-US" smtClean="0"/>
-              <a:t>4/13/2026</a:t>
+              <a:t>4/17/2026</a:t>
             </a:fld>
             <a:endParaRPr lang="en-US"/>
           </a:p>
@@ -3574,7 +3574,7 @@
           <a:p>
             <a:fld id="{C198EE3F-C531-4F47-81BE-EB7857D8F039}" type="datetimeFigureOut">
               <a:rPr lang="en-US" smtClean="0"/>
-              <a:t>4/13/2026</a:t>
+              <a:t>4/17/2026</a:t>
             </a:fld>
             <a:endParaRPr lang="en-US"/>
           </a:p>
@@ -3885,7 +3885,7 @@
           <a:p>
             <a:fld id="{C198EE3F-C531-4F47-81BE-EB7857D8F039}" type="datetimeFigureOut">
               <a:rPr lang="en-US" smtClean="0"/>
-              <a:t>4/13/2026</a:t>
+              <a:t>4/17/2026</a:t>
             </a:fld>
             <a:endParaRPr lang="en-US"/>
           </a:p>
@@ -4173,7 +4173,7 @@
           <a:p>
             <a:fld id="{C198EE3F-C531-4F47-81BE-EB7857D8F039}" type="datetimeFigureOut">
               <a:rPr lang="en-US" smtClean="0"/>
-              <a:t>4/13/2026</a:t>
+              <a:t>4/17/2026</a:t>
             </a:fld>
             <a:endParaRPr lang="en-US"/>
           </a:p>
@@ -4414,7 +4414,7 @@
           <a:p>
             <a:fld id="{C198EE3F-C531-4F47-81BE-EB7857D8F039}" type="datetimeFigureOut">
               <a:rPr lang="en-US" smtClean="0"/>
-              <a:t>4/13/2026</a:t>
+              <a:t>4/17/2026</a:t>
             </a:fld>
             <a:endParaRPr lang="en-US"/>
           </a:p>
@@ -5413,7 +5413,7 @@
         <p:spPr>
           <a:xfrm>
             <a:off x="265471" y="792624"/>
-            <a:ext cx="11661058" cy="4093428"/>
+            <a:ext cx="11661058" cy="3785652"/>
           </a:xfrm>
           <a:prstGeom prst="rect">
             <a:avLst/>
@@ -5435,7 +5435,7 @@
                 <a:latin typeface="Times New Roman" panose="02020603050405020304" pitchFamily="18" charset="0"/>
                 <a:cs typeface="Times New Roman" panose="02020603050405020304" pitchFamily="18" charset="0"/>
               </a:rPr>
-              <a:t>Reduces unexpected breakdowns by predicting potential failures in advance and enabling timely preventive maintenance actions.</a:t>
+              <a:t>Reduces unexpected breakdowns and maintenance costs by predicting failures in advance and shifting from reactive to planned, condition-based maintenance. </a:t>
             </a:r>
           </a:p>
           <a:p>
@@ -5443,12 +5443,22 @@
               <a:buFont typeface="Wingdings" panose="05000000000000000000" pitchFamily="2" charset="2"/>
               <a:buChar char="Ø"/>
             </a:pPr>
+            <a:endParaRPr lang="en-US" sz="2000" dirty="0">
+              <a:latin typeface="Times New Roman" panose="02020603050405020304" pitchFamily="18" charset="0"/>
+              <a:cs typeface="Times New Roman" panose="02020603050405020304" pitchFamily="18" charset="0"/>
+            </a:endParaRPr>
+          </a:p>
+          <a:p>
+            <a:pPr marL="342900" indent="-342900" algn="just">
+              <a:buFont typeface="Wingdings" panose="05000000000000000000" pitchFamily="2" charset="2"/>
+              <a:buChar char="Ø"/>
+            </a:pPr>
             <a:r>
               <a:rPr lang="en-US" sz="2000" dirty="0">
                 <a:latin typeface="Times New Roman" panose="02020603050405020304" pitchFamily="18" charset="0"/>
                 <a:cs typeface="Times New Roman" panose="02020603050405020304" pitchFamily="18" charset="0"/>
               </a:rPr>
-              <a:t>Minimizes maintenance costs by shifting from reactive repairs to planned maintenance based on equipment condition.</a:t>
+              <a:t>Increases equipment lifespan and operational efficiency through continuous monitoring and early detection of performance degradation. </a:t>
             </a:r>
           </a:p>
           <a:p>
@@ -5456,12 +5466,22 @@
               <a:buFont typeface="Wingdings" panose="05000000000000000000" pitchFamily="2" charset="2"/>
               <a:buChar char="Ø"/>
             </a:pPr>
+            <a:endParaRPr lang="en-US" sz="2000" dirty="0">
+              <a:latin typeface="Times New Roman" panose="02020603050405020304" pitchFamily="18" charset="0"/>
+              <a:cs typeface="Times New Roman" panose="02020603050405020304" pitchFamily="18" charset="0"/>
+            </a:endParaRPr>
+          </a:p>
+          <a:p>
+            <a:pPr marL="342900" indent="-342900" algn="just">
+              <a:buFont typeface="Wingdings" panose="05000000000000000000" pitchFamily="2" charset="2"/>
+              <a:buChar char="Ø"/>
+            </a:pPr>
             <a:r>
               <a:rPr lang="en-US" sz="2000" dirty="0">
                 <a:latin typeface="Times New Roman" panose="02020603050405020304" pitchFamily="18" charset="0"/>
                 <a:cs typeface="Times New Roman" panose="02020603050405020304" pitchFamily="18" charset="0"/>
               </a:rPr>
-              <a:t>Increases equipment lifespan through continuous monitoring and early detection of performance degradation.</a:t>
+              <a:t>Provides real-time monitoring of equipment health parameters, enabling faster decision-making and better operational control. </a:t>
             </a:r>
           </a:p>
           <a:p>
@@ -5469,12 +5489,22 @@
               <a:buFont typeface="Wingdings" panose="05000000000000000000" pitchFamily="2" charset="2"/>
               <a:buChar char="Ø"/>
             </a:pPr>
+            <a:endParaRPr lang="en-US" sz="2000" dirty="0">
+              <a:latin typeface="Times New Roman" panose="02020603050405020304" pitchFamily="18" charset="0"/>
+              <a:cs typeface="Times New Roman" panose="02020603050405020304" pitchFamily="18" charset="0"/>
+            </a:endParaRPr>
+          </a:p>
+          <a:p>
+            <a:pPr marL="342900" indent="-342900" algn="just">
+              <a:buFont typeface="Wingdings" panose="05000000000000000000" pitchFamily="2" charset="2"/>
+              <a:buChar char="Ø"/>
+            </a:pPr>
             <a:r>
               <a:rPr lang="en-US" sz="2000" dirty="0">
                 <a:latin typeface="Times New Roman" panose="02020603050405020304" pitchFamily="18" charset="0"/>
                 <a:cs typeface="Times New Roman" panose="02020603050405020304" pitchFamily="18" charset="0"/>
               </a:rPr>
-              <a:t>Provides real-time monitoring of equipment health parameters for faster decision-making and operational control.</a:t>
+              <a:t>Ensures cloud scalability and secure data storage with controlled access, allowing efficient handling of large data volumes and protection of sensitive information. </a:t>
             </a:r>
           </a:p>
           <a:p>
@@ -5482,39 +5512,10 @@
               <a:buFont typeface="Wingdings" panose="05000000000000000000" pitchFamily="2" charset="2"/>
               <a:buChar char="Ø"/>
             </a:pPr>
-            <a:r>
-              <a:rPr lang="en-US" sz="2000" dirty="0">
-                <a:latin typeface="Times New Roman" panose="02020603050405020304" pitchFamily="18" charset="0"/>
-                <a:cs typeface="Times New Roman" panose="02020603050405020304" pitchFamily="18" charset="0"/>
-              </a:rPr>
-              <a:t>Ensures cloud scalability, allowing the system to handle increasing data volume and multiple equipment units efficiently.</a:t>
-            </a:r>
-          </a:p>
-          <a:p>
-            <a:pPr marL="342900" indent="-342900" algn="just">
-              <a:buFont typeface="Wingdings" panose="05000000000000000000" pitchFamily="2" charset="2"/>
-              <a:buChar char="Ø"/>
-            </a:pPr>
-            <a:r>
-              <a:rPr lang="en-US" sz="2000" dirty="0">
-                <a:latin typeface="Times New Roman" panose="02020603050405020304" pitchFamily="18" charset="0"/>
-                <a:cs typeface="Times New Roman" panose="02020603050405020304" pitchFamily="18" charset="0"/>
-              </a:rPr>
-              <a:t>Offers secure data storage with authentication and controlled access to protect sensitive operational information.</a:t>
-            </a:r>
-          </a:p>
-          <a:p>
-            <a:pPr marL="342900" indent="-342900" algn="just">
-              <a:buFont typeface="Wingdings" panose="05000000000000000000" pitchFamily="2" charset="2"/>
-              <a:buChar char="Ø"/>
-            </a:pPr>
-            <a:r>
-              <a:rPr lang="en-US" sz="2000" dirty="0">
-                <a:latin typeface="Times New Roman" panose="02020603050405020304" pitchFamily="18" charset="0"/>
-                <a:cs typeface="Times New Roman" panose="02020603050405020304" pitchFamily="18" charset="0"/>
-              </a:rPr>
-              <a:t>Improves overall operational efficiency by optimizing maintenance scheduling and reducing production downtime.</a:t>
-            </a:r>
+            <a:endParaRPr lang="en-US" sz="2000" dirty="0">
+              <a:latin typeface="Times New Roman" panose="02020603050405020304" pitchFamily="18" charset="0"/>
+              <a:cs typeface="Times New Roman" panose="02020603050405020304" pitchFamily="18" charset="0"/>
+            </a:endParaRPr>
           </a:p>
         </p:txBody>
       </p:sp>
@@ -5604,7 +5605,7 @@
         <p:spPr>
           <a:xfrm>
             <a:off x="265471" y="792624"/>
-            <a:ext cx="11661058" cy="3170099"/>
+            <a:ext cx="11661058" cy="3477875"/>
           </a:xfrm>
           <a:prstGeom prst="rect">
             <a:avLst/>
@@ -5626,7 +5627,7 @@
                 <a:latin typeface="Times New Roman" panose="02020603050405020304" pitchFamily="18" charset="0"/>
                 <a:cs typeface="Times New Roman" panose="02020603050405020304" pitchFamily="18" charset="0"/>
               </a:rPr>
-              <a:t>Requires accurate historical data to train the machine learning model effectively and ensure reliable failure predictions.</a:t>
+              <a:t>Requires high-quality and sufficient historical data to train machine learning models effectively, as poor or imbalanced data can reduce prediction accuracy.</a:t>
             </a:r>
           </a:p>
           <a:p>
@@ -5634,12 +5635,22 @@
               <a:buFont typeface="Wingdings" panose="05000000000000000000" pitchFamily="2" charset="2"/>
               <a:buChar char="Ø"/>
             </a:pPr>
+            <a:endParaRPr lang="en-US" sz="2000" dirty="0">
+              <a:latin typeface="Times New Roman" panose="02020603050405020304" pitchFamily="18" charset="0"/>
+              <a:cs typeface="Times New Roman" panose="02020603050405020304" pitchFamily="18" charset="0"/>
+            </a:endParaRPr>
+          </a:p>
+          <a:p>
+            <a:pPr marL="342900" indent="-342900" algn="just">
+              <a:buFont typeface="Wingdings" panose="05000000000000000000" pitchFamily="2" charset="2"/>
+              <a:buChar char="Ø"/>
+            </a:pPr>
             <a:r>
               <a:rPr lang="en-US" sz="2000" dirty="0">
                 <a:latin typeface="Times New Roman" panose="02020603050405020304" pitchFamily="18" charset="0"/>
                 <a:cs typeface="Times New Roman" panose="02020603050405020304" pitchFamily="18" charset="0"/>
               </a:rPr>
-              <a:t>Initial setup cost is high, as it involves cloud infrastructure configuration, system development, and model training.</a:t>
+              <a:t>Involves high initial setup costs due to cloud infrastructure configuration, system development, and model training.</a:t>
             </a:r>
           </a:p>
           <a:p>
@@ -5647,12 +5658,22 @@
               <a:buFont typeface="Wingdings" panose="05000000000000000000" pitchFamily="2" charset="2"/>
               <a:buChar char="Ø"/>
             </a:pPr>
+            <a:endParaRPr lang="en-US" sz="2000" dirty="0">
+              <a:latin typeface="Times New Roman" panose="02020603050405020304" pitchFamily="18" charset="0"/>
+              <a:cs typeface="Times New Roman" panose="02020603050405020304" pitchFamily="18" charset="0"/>
+            </a:endParaRPr>
+          </a:p>
+          <a:p>
+            <a:pPr marL="342900" indent="-342900" algn="just">
+              <a:buFont typeface="Wingdings" panose="05000000000000000000" pitchFamily="2" charset="2"/>
+              <a:buChar char="Ø"/>
+            </a:pPr>
             <a:r>
               <a:rPr lang="en-US" sz="2000" dirty="0">
                 <a:latin typeface="Times New Roman" panose="02020603050405020304" pitchFamily="18" charset="0"/>
                 <a:cs typeface="Times New Roman" panose="02020603050405020304" pitchFamily="18" charset="0"/>
               </a:rPr>
-              <a:t>Model accuracy depends on training data quality, and poor or imbalanced data can reduce prediction performance.</a:t>
+              <a:t>Depends on stable internet connectivity for continuous cloud access, real-time monitoring, and data synchronization.</a:t>
             </a:r>
           </a:p>
           <a:p>
@@ -5660,25 +5681,22 @@
               <a:buFont typeface="Wingdings" panose="05000000000000000000" pitchFamily="2" charset="2"/>
               <a:buChar char="Ø"/>
             </a:pPr>
+            <a:endParaRPr lang="en-US" sz="2000" dirty="0">
+              <a:latin typeface="Times New Roman" panose="02020603050405020304" pitchFamily="18" charset="0"/>
+              <a:cs typeface="Times New Roman" panose="02020603050405020304" pitchFamily="18" charset="0"/>
+            </a:endParaRPr>
+          </a:p>
+          <a:p>
+            <a:pPr marL="342900" indent="-342900" algn="just">
+              <a:buFont typeface="Wingdings" panose="05000000000000000000" pitchFamily="2" charset="2"/>
+              <a:buChar char="Ø"/>
+            </a:pPr>
             <a:r>
               <a:rPr lang="en-US" sz="2000" dirty="0">
                 <a:latin typeface="Times New Roman" panose="02020603050405020304" pitchFamily="18" charset="0"/>
                 <a:cs typeface="Times New Roman" panose="02020603050405020304" pitchFamily="18" charset="0"/>
               </a:rPr>
-              <a:t>Requires stable internet connectivity for continuous cloud access, real-time monitoring, and data synchronization.</a:t>
-            </a:r>
-          </a:p>
-          <a:p>
-            <a:pPr marL="342900" indent="-342900" algn="just">
-              <a:buFont typeface="Wingdings" panose="05000000000000000000" pitchFamily="2" charset="2"/>
-              <a:buChar char="Ø"/>
-            </a:pPr>
-            <a:r>
-              <a:rPr lang="en-US" sz="2000" dirty="0">
-                <a:latin typeface="Times New Roman" panose="02020603050405020304" pitchFamily="18" charset="0"/>
-                <a:cs typeface="Times New Roman" panose="02020603050405020304" pitchFamily="18" charset="0"/>
-              </a:rPr>
-              <a:t>Needs periodic model retraining to adapt to new failure patterns, changing equipment behavior, and updated operational conditions.</a:t>
+              <a:t>Needs periodic model retraining to adapt to changing equipment behavior, new failure patterns, and updated operational conditions.</a:t>
             </a:r>
           </a:p>
         </p:txBody>
@@ -5769,7 +5787,7 @@
         <p:spPr>
           <a:xfrm>
             <a:off x="265471" y="792624"/>
-            <a:ext cx="11661058" cy="3170099"/>
+            <a:ext cx="11661058" cy="2554545"/>
           </a:xfrm>
           <a:prstGeom prst="rect">
             <a:avLst/>
@@ -5791,20 +5809,7 @@
                 <a:latin typeface="Times New Roman" panose="02020603050405020304" pitchFamily="18" charset="0"/>
                 <a:cs typeface="Times New Roman" panose="02020603050405020304" pitchFamily="18" charset="0"/>
               </a:rPr>
-              <a:t>The Proactive Equipment Care system presents an intelligent and scalable approach to predictive maintenance by integrating cloud computing, data analytics, and deep learning technologies. By continuously collecting and analyzing equipment data, the system enables early detection of potential failures and supports proactive maintenance planning. The implementation of an LSTM-based model enhances prediction accuracy, allowing industries to receive alerts 24–48 hours before possible breakdowns.</a:t>
-            </a:r>
-          </a:p>
-          <a:p>
-            <a:pPr marL="342900" indent="-342900" algn="just">
-              <a:buFont typeface="Wingdings" panose="05000000000000000000" pitchFamily="2" charset="2"/>
-              <a:buChar char="Ø"/>
-            </a:pPr>
-            <a:r>
-              <a:rPr lang="en-US" sz="2000" dirty="0">
-                <a:latin typeface="Times New Roman" panose="02020603050405020304" pitchFamily="18" charset="0"/>
-                <a:cs typeface="Times New Roman" panose="02020603050405020304" pitchFamily="18" charset="0"/>
-              </a:rPr>
-              <a:t>Overall, this project successfully demonstrates how cloud-integrated analytics can transform traditional reactive maintenance into a data-driven, predictive maintenance strategy. By reducing downtime, lowering maintenance costs, and improving equipment reliability, the system contributes to increased productivity, operational efficiency, and long-term industrial sustainability.</a:t>
+              <a:t>The Proactive Equipment Care system provides a scalable predictive maintenance solution by integrating cloud computing, data analytics, and deep learning to continuously monitor and analyze equipment data.</a:t>
             </a:r>
           </a:p>
           <a:p>
@@ -5816,6 +5821,42 @@
               <a:latin typeface="Times New Roman" panose="02020603050405020304" pitchFamily="18" charset="0"/>
               <a:cs typeface="Times New Roman" panose="02020603050405020304" pitchFamily="18" charset="0"/>
             </a:endParaRPr>
+          </a:p>
+          <a:p>
+            <a:pPr marL="342900" indent="-342900" algn="just">
+              <a:buFont typeface="Wingdings" panose="05000000000000000000" pitchFamily="2" charset="2"/>
+              <a:buChar char="Ø"/>
+            </a:pPr>
+            <a:r>
+              <a:rPr lang="en-US" sz="2000" dirty="0">
+                <a:latin typeface="Times New Roman" panose="02020603050405020304" pitchFamily="18" charset="0"/>
+                <a:cs typeface="Times New Roman" panose="02020603050405020304" pitchFamily="18" charset="0"/>
+              </a:rPr>
+              <a:t>The use of an LSTM-based model improves prediction accuracy and enables early failure detection, allowing industries to receive alerts 24–48 hours in advance for proactive maintenance.</a:t>
+            </a:r>
+          </a:p>
+          <a:p>
+            <a:pPr marL="342900" indent="-342900" algn="just">
+              <a:buFont typeface="Wingdings" panose="05000000000000000000" pitchFamily="2" charset="2"/>
+              <a:buChar char="Ø"/>
+            </a:pPr>
+            <a:endParaRPr lang="en-US" sz="2000" dirty="0">
+              <a:latin typeface="Times New Roman" panose="02020603050405020304" pitchFamily="18" charset="0"/>
+              <a:cs typeface="Times New Roman" panose="02020603050405020304" pitchFamily="18" charset="0"/>
+            </a:endParaRPr>
+          </a:p>
+          <a:p>
+            <a:pPr marL="342900" indent="-342900" algn="just">
+              <a:buFont typeface="Wingdings" panose="05000000000000000000" pitchFamily="2" charset="2"/>
+              <a:buChar char="Ø"/>
+            </a:pPr>
+            <a:r>
+              <a:rPr lang="en-US" sz="2000" dirty="0">
+                <a:latin typeface="Times New Roman" panose="02020603050405020304" pitchFamily="18" charset="0"/>
+                <a:cs typeface="Times New Roman" panose="02020603050405020304" pitchFamily="18" charset="0"/>
+              </a:rPr>
+              <a:t>The system transforms traditional reactive maintenance into a data-driven approach, reducing downtime and costs while improving equipment reliability, productivity, and overall operational efficiency.</a:t>
+            </a:r>
           </a:p>
         </p:txBody>
       </p:sp>
@@ -6221,7 +6262,7 @@
         <p:spPr>
           <a:xfrm>
             <a:off x="265471" y="792624"/>
-            <a:ext cx="11661058" cy="2554545"/>
+            <a:ext cx="11661058" cy="3785652"/>
           </a:xfrm>
           <a:prstGeom prst="rect">
             <a:avLst/>
@@ -6252,6 +6293,17 @@
               <a:buFont typeface="Wingdings" panose="05000000000000000000" pitchFamily="2" charset="2"/>
               <a:buChar char="Ø"/>
             </a:pPr>
+            <a:endParaRPr lang="en-US" sz="2000" dirty="0">
+              <a:latin typeface="Times New Roman" panose="02020603050405020304" pitchFamily="18" charset="0"/>
+              <a:ea typeface="Tahoma" panose="020B0604030504040204" pitchFamily="34" charset="0"/>
+              <a:cs typeface="Times New Roman" panose="02020603050405020304" pitchFamily="18" charset="0"/>
+            </a:endParaRPr>
+          </a:p>
+          <a:p>
+            <a:pPr marL="342900" indent="-342900" algn="just">
+              <a:buFont typeface="Wingdings" panose="05000000000000000000" pitchFamily="2" charset="2"/>
+              <a:buChar char="Ø"/>
+            </a:pPr>
             <a:r>
               <a:rPr lang="en-US" sz="2000" dirty="0">
                 <a:latin typeface="Times New Roman" panose="02020603050405020304" pitchFamily="18" charset="0"/>
@@ -6266,6 +6318,17 @@
               <a:buFont typeface="Wingdings" panose="05000000000000000000" pitchFamily="2" charset="2"/>
               <a:buChar char="Ø"/>
             </a:pPr>
+            <a:endParaRPr lang="en-US" sz="2000" dirty="0">
+              <a:latin typeface="Times New Roman" panose="02020603050405020304" pitchFamily="18" charset="0"/>
+              <a:ea typeface="Tahoma" panose="020B0604030504040204" pitchFamily="34" charset="0"/>
+              <a:cs typeface="Times New Roman" panose="02020603050405020304" pitchFamily="18" charset="0"/>
+            </a:endParaRPr>
+          </a:p>
+          <a:p>
+            <a:pPr marL="342900" indent="-342900" algn="just">
+              <a:buFont typeface="Wingdings" panose="05000000000000000000" pitchFamily="2" charset="2"/>
+              <a:buChar char="Ø"/>
+            </a:pPr>
             <a:r>
               <a:rPr lang="en-US" sz="2000" dirty="0">
                 <a:latin typeface="Times New Roman" panose="02020603050405020304" pitchFamily="18" charset="0"/>
@@ -6280,6 +6343,17 @@
               <a:buFont typeface="Wingdings" panose="05000000000000000000" pitchFamily="2" charset="2"/>
               <a:buChar char="Ø"/>
             </a:pPr>
+            <a:endParaRPr lang="en-US" sz="2000" dirty="0">
+              <a:latin typeface="Times New Roman" panose="02020603050405020304" pitchFamily="18" charset="0"/>
+              <a:ea typeface="Tahoma" panose="020B0604030504040204" pitchFamily="34" charset="0"/>
+              <a:cs typeface="Times New Roman" panose="02020603050405020304" pitchFamily="18" charset="0"/>
+            </a:endParaRPr>
+          </a:p>
+          <a:p>
+            <a:pPr marL="342900" indent="-342900" algn="just">
+              <a:buFont typeface="Wingdings" panose="05000000000000000000" pitchFamily="2" charset="2"/>
+              <a:buChar char="Ø"/>
+            </a:pPr>
             <a:r>
               <a:rPr lang="en-US" sz="2000" dirty="0">
                 <a:latin typeface="Times New Roman" panose="02020603050405020304" pitchFamily="18" charset="0"/>
@@ -6288,6 +6362,17 @@
               </a:rPr>
               <a:t>The ML model predicts potential failures, enabling preventive maintenance. </a:t>
             </a:r>
+          </a:p>
+          <a:p>
+            <a:pPr marL="342900" indent="-342900" algn="just">
+              <a:buFont typeface="Wingdings" panose="05000000000000000000" pitchFamily="2" charset="2"/>
+              <a:buChar char="Ø"/>
+            </a:pPr>
+            <a:endParaRPr lang="en-US" sz="2000" dirty="0">
+              <a:latin typeface="Times New Roman" panose="02020603050405020304" pitchFamily="18" charset="0"/>
+              <a:ea typeface="Tahoma" panose="020B0604030504040204" pitchFamily="34" charset="0"/>
+              <a:cs typeface="Times New Roman" panose="02020603050405020304" pitchFamily="18" charset="0"/>
+            </a:endParaRPr>
           </a:p>
           <a:p>
             <a:pPr marL="342900" indent="-342900" algn="just">
@@ -6385,7 +6470,7 @@
         <p:spPr>
           <a:xfrm>
             <a:off x="265471" y="792624"/>
-            <a:ext cx="11661058" cy="3785652"/>
+            <a:ext cx="11661058" cy="3477875"/>
           </a:xfrm>
           <a:prstGeom prst="rect">
             <a:avLst/>
@@ -6420,7 +6505,7 @@
                 <a:latin typeface="Times New Roman" panose="02020603050405020304" pitchFamily="18" charset="0"/>
                 <a:cs typeface="Times New Roman" panose="02020603050405020304" pitchFamily="18" charset="0"/>
               </a:rPr>
-              <a:t>Unexpected equipment failures cause production loss, downtime, and high maintenance costs in many industries.</a:t>
+              <a:t>Unexpected equipment failures lead to production loss, increased downtime, high maintenance costs, and potential safety risks in industrial environments. </a:t>
             </a:r>
           </a:p>
           <a:p>
@@ -6428,80 +6513,53 @@
               <a:buFont typeface="Wingdings" panose="05000000000000000000" pitchFamily="2" charset="2"/>
               <a:buChar char="ü"/>
             </a:pPr>
+            <a:endParaRPr lang="en-US" sz="2000" dirty="0">
+              <a:latin typeface="Times New Roman" panose="02020603050405020304" pitchFamily="18" charset="0"/>
+              <a:cs typeface="Times New Roman" panose="02020603050405020304" pitchFamily="18" charset="0"/>
+            </a:endParaRPr>
+          </a:p>
+          <a:p>
+            <a:pPr marL="342900" indent="-342900" algn="just">
+              <a:buFont typeface="Wingdings" panose="05000000000000000000" pitchFamily="2" charset="2"/>
+              <a:buChar char="ü"/>
+            </a:pPr>
             <a:r>
               <a:rPr lang="en-US" sz="2000" dirty="0">
                 <a:latin typeface="Times New Roman" panose="02020603050405020304" pitchFamily="18" charset="0"/>
                 <a:cs typeface="Times New Roman" panose="02020603050405020304" pitchFamily="18" charset="0"/>
               </a:rPr>
-              <a:t>Traditional maintenance happens after equipment fails. This causes production </a:t>
-            </a:r>
-            <a:r>
-              <a:rPr lang="en-US" sz="2000" dirty="0" err="1">
-                <a:latin typeface="Times New Roman" panose="02020603050405020304" pitchFamily="18" charset="0"/>
-                <a:cs typeface="Times New Roman" panose="02020603050405020304" pitchFamily="18" charset="0"/>
-              </a:rPr>
-              <a:t>loss,repair</a:t>
-            </a:r>
+              <a:t>Traditional reactive maintenance approaches address issues only after failure, resulting in inefficient operations, higher repair costs, and poor maintenance planning. </a:t>
+            </a:r>
+          </a:p>
+          <a:p>
+            <a:pPr marL="342900" indent="-342900" algn="just">
+              <a:buFont typeface="Wingdings" panose="05000000000000000000" pitchFamily="2" charset="2"/>
+              <a:buChar char="ü"/>
+            </a:pPr>
+            <a:endParaRPr lang="en-US" sz="2000" dirty="0">
+              <a:latin typeface="Times New Roman" panose="02020603050405020304" pitchFamily="18" charset="0"/>
+              <a:cs typeface="Times New Roman" panose="02020603050405020304" pitchFamily="18" charset="0"/>
+            </a:endParaRPr>
+          </a:p>
+          <a:p>
+            <a:pPr marL="342900" indent="-342900" algn="just">
+              <a:buFont typeface="Wingdings" panose="05000000000000000000" pitchFamily="2" charset="2"/>
+              <a:buChar char="ü"/>
+            </a:pPr>
             <a:r>
               <a:rPr lang="en-US" sz="2000" dirty="0">
                 <a:latin typeface="Times New Roman" panose="02020603050405020304" pitchFamily="18" charset="0"/>
                 <a:cs typeface="Times New Roman" panose="02020603050405020304" pitchFamily="18" charset="0"/>
               </a:rPr>
-              <a:t> </a:t>
-            </a:r>
-            <a:r>
-              <a:rPr lang="en-US" sz="2000" dirty="0" err="1">
-                <a:latin typeface="Times New Roman" panose="02020603050405020304" pitchFamily="18" charset="0"/>
-                <a:cs typeface="Times New Roman" panose="02020603050405020304" pitchFamily="18" charset="0"/>
-              </a:rPr>
-              <a:t>cost,and</a:t>
-            </a:r>
-            <a:r>
-              <a:rPr lang="en-US" sz="2000" dirty="0">
-                <a:latin typeface="Times New Roman" panose="02020603050405020304" pitchFamily="18" charset="0"/>
-                <a:cs typeface="Times New Roman" panose="02020603050405020304" pitchFamily="18" charset="0"/>
-              </a:rPr>
-              <a:t> safety risk.</a:t>
-            </a:r>
-          </a:p>
-          <a:p>
-            <a:pPr marL="342900" indent="-342900" algn="just">
-              <a:buFont typeface="Wingdings" panose="05000000000000000000" pitchFamily="2" charset="2"/>
-              <a:buChar char="ü"/>
-            </a:pPr>
-            <a:r>
-              <a:rPr lang="en-US" sz="2000" dirty="0">
-                <a:latin typeface="Times New Roman" panose="02020603050405020304" pitchFamily="18" charset="0"/>
-                <a:cs typeface="Times New Roman" panose="02020603050405020304" pitchFamily="18" charset="0"/>
-              </a:rPr>
-              <a:t>A smart system that uses analytics and cloud computing to continuously monitor equipment health and anticipate failures early is required.</a:t>
-            </a:r>
-          </a:p>
-          <a:p>
-            <a:pPr marL="342900" indent="-342900" algn="just">
-              <a:buFont typeface="Wingdings" panose="05000000000000000000" pitchFamily="2" charset="2"/>
-              <a:buChar char="ü"/>
-            </a:pPr>
-            <a:r>
-              <a:rPr lang="en-US" sz="2000" dirty="0">
-                <a:latin typeface="Times New Roman" panose="02020603050405020304" pitchFamily="18" charset="0"/>
-                <a:cs typeface="Times New Roman" panose="02020603050405020304" pitchFamily="18" charset="0"/>
-              </a:rPr>
-              <a:t>Without intelligent analytics, industries struggle to optimize maintenance planning, resource allocation, and spare part management.</a:t>
-            </a:r>
-          </a:p>
-          <a:p>
-            <a:pPr marL="342900" indent="-342900" algn="just">
-              <a:buFont typeface="Wingdings" panose="05000000000000000000" pitchFamily="2" charset="2"/>
-              <a:buChar char="ü"/>
-            </a:pPr>
-            <a:r>
-              <a:rPr lang="en-US" sz="2000" dirty="0">
-                <a:latin typeface="Times New Roman" panose="02020603050405020304" pitchFamily="18" charset="0"/>
-                <a:cs typeface="Times New Roman" panose="02020603050405020304" pitchFamily="18" charset="0"/>
-              </a:rPr>
-              <a:t>The absence of centralized cloud-based data storage limits historical data analysis and prevents data-driven maintenance decision-making.</a:t>
-            </a:r>
+              <a:t>There is a need for a cloud-based smart system with analytics to enable continuous monitoring, centralized data storage, and data-driven decision-making for optimized maintenance and resource management. </a:t>
+            </a:r>
+          </a:p>
+          <a:p>
+            <a:pPr algn="just"/>
+            <a:endParaRPr lang="en-US" sz="2000" dirty="0">
+              <a:latin typeface="Times New Roman" panose="02020603050405020304" pitchFamily="18" charset="0"/>
+              <a:cs typeface="Times New Roman" panose="02020603050405020304" pitchFamily="18" charset="0"/>
+            </a:endParaRPr>
           </a:p>
         </p:txBody>
       </p:sp>
@@ -6519,7 +6577,7 @@
         </p:nvSpPr>
         <p:spPr>
           <a:xfrm>
-            <a:off x="265471" y="4807974"/>
+            <a:off x="265471" y="4054189"/>
             <a:ext cx="11661058" cy="1015663"/>
           </a:xfrm>
           <a:prstGeom prst="rect">
@@ -6637,7 +6695,7 @@
         <p:spPr>
           <a:xfrm>
             <a:off x="265471" y="792624"/>
-            <a:ext cx="11661058" cy="4401205"/>
+            <a:ext cx="11661058" cy="3785652"/>
           </a:xfrm>
           <a:prstGeom prst="rect">
             <a:avLst/>
@@ -6659,7 +6717,7 @@
                 <a:latin typeface="Times New Roman" panose="02020603050405020304" pitchFamily="18" charset="0"/>
                 <a:cs typeface="Times New Roman" panose="02020603050405020304" pitchFamily="18" charset="0"/>
               </a:rPr>
-              <a:t>To develop a cloud-based predictive maintenance system that enables continuous monitoring and intelligent analysis of equipment performance from any location.</a:t>
+              <a:t>To develop a cloud-based predictive maintenance system for continuous remote monitoring, secure data storage, and intelligent analysis of equipment performance.</a:t>
             </a:r>
           </a:p>
           <a:p>
@@ -6667,12 +6725,22 @@
               <a:buFont typeface="Wingdings" panose="05000000000000000000" pitchFamily="2" charset="2"/>
               <a:buChar char="Ø"/>
             </a:pPr>
+            <a:endParaRPr lang="en-US" sz="2000" dirty="0">
+              <a:latin typeface="Times New Roman" panose="02020603050405020304" pitchFamily="18" charset="0"/>
+              <a:cs typeface="Times New Roman" panose="02020603050405020304" pitchFamily="18" charset="0"/>
+            </a:endParaRPr>
+          </a:p>
+          <a:p>
+            <a:pPr marL="342900" indent="-342900" algn="just">
+              <a:buFont typeface="Wingdings" panose="05000000000000000000" pitchFamily="2" charset="2"/>
+              <a:buChar char="Ø"/>
+            </a:pPr>
             <a:r>
               <a:rPr lang="en-US" sz="2000" dirty="0">
                 <a:latin typeface="Times New Roman" panose="02020603050405020304" pitchFamily="18" charset="0"/>
                 <a:cs typeface="Times New Roman" panose="02020603050405020304" pitchFamily="18" charset="0"/>
               </a:rPr>
-              <a:t>To collect and process motor equipment data such as temperature, vibration, and load parameters to assess operational health accurately.</a:t>
+              <a:t>To collect and process key motor data (temperature, vibration, load) and apply machine learning algorithms to accurately assess equipment health and predict potential failures.</a:t>
             </a:r>
           </a:p>
           <a:p>
@@ -6680,12 +6748,22 @@
               <a:buFont typeface="Wingdings" panose="05000000000000000000" pitchFamily="2" charset="2"/>
               <a:buChar char="Ø"/>
             </a:pPr>
+            <a:endParaRPr lang="en-US" sz="2000" dirty="0">
+              <a:latin typeface="Times New Roman" panose="02020603050405020304" pitchFamily="18" charset="0"/>
+              <a:cs typeface="Times New Roman" panose="02020603050405020304" pitchFamily="18" charset="0"/>
+            </a:endParaRPr>
+          </a:p>
+          <a:p>
+            <a:pPr marL="342900" indent="-342900" algn="just">
+              <a:buFont typeface="Wingdings" panose="05000000000000000000" pitchFamily="2" charset="2"/>
+              <a:buChar char="Ø"/>
+            </a:pPr>
             <a:r>
               <a:rPr lang="en-US" sz="2000" dirty="0">
                 <a:latin typeface="Times New Roman" panose="02020603050405020304" pitchFamily="18" charset="0"/>
                 <a:cs typeface="Times New Roman" panose="02020603050405020304" pitchFamily="18" charset="0"/>
               </a:rPr>
-              <a:t>To apply Machine Learning algorithms for failure prediction in order to identify early warning signs and prevent unexpected equipment breakdowns.</a:t>
+              <a:t>To provide a real-time dashboard that visualizes equipment status, predictions, and historical trends for effective monitoring and decision-making.</a:t>
             </a:r>
           </a:p>
           <a:p>
@@ -6693,12 +6771,22 @@
               <a:buFont typeface="Wingdings" panose="05000000000000000000" pitchFamily="2" charset="2"/>
               <a:buChar char="Ø"/>
             </a:pPr>
+            <a:endParaRPr lang="en-US" sz="2000" dirty="0">
+              <a:latin typeface="Times New Roman" panose="02020603050405020304" pitchFamily="18" charset="0"/>
+              <a:cs typeface="Times New Roman" panose="02020603050405020304" pitchFamily="18" charset="0"/>
+            </a:endParaRPr>
+          </a:p>
+          <a:p>
+            <a:pPr marL="342900" indent="-342900" algn="just">
+              <a:buFont typeface="Wingdings" panose="05000000000000000000" pitchFamily="2" charset="2"/>
+              <a:buChar char="Ø"/>
+            </a:pPr>
             <a:r>
               <a:rPr lang="en-US" sz="2000" dirty="0">
                 <a:latin typeface="Times New Roman" panose="02020603050405020304" pitchFamily="18" charset="0"/>
                 <a:cs typeface="Times New Roman" panose="02020603050405020304" pitchFamily="18" charset="0"/>
               </a:rPr>
-              <a:t>To provide a real-time monitoring dashboard that visually represents equipment status, predictions, and historical trends for better decision-making.</a:t>
+              <a:t>To reduce downtime and maintenance costs by enabling proactive maintenance through advanced analytics and early fault detection. </a:t>
             </a:r>
           </a:p>
           <a:p>
@@ -6706,39 +6794,10 @@
               <a:buFont typeface="Wingdings" panose="05000000000000000000" pitchFamily="2" charset="2"/>
               <a:buChar char="Ø"/>
             </a:pPr>
-            <a:r>
-              <a:rPr lang="en-US" sz="2000" dirty="0">
-                <a:latin typeface="Times New Roman" panose="02020603050405020304" pitchFamily="18" charset="0"/>
-                <a:cs typeface="Times New Roman" panose="02020603050405020304" pitchFamily="18" charset="0"/>
-              </a:rPr>
-              <a:t>To reduce downtime and maintenance costs by shifting from reactive maintenance to a proactive and predictive approach.</a:t>
-            </a:r>
-          </a:p>
-          <a:p>
-            <a:pPr marL="342900" indent="-342900" algn="just">
-              <a:buFont typeface="Wingdings" panose="05000000000000000000" pitchFamily="2" charset="2"/>
-              <a:buChar char="Ø"/>
-            </a:pPr>
-            <a:r>
-              <a:rPr lang="en-US" sz="2000" dirty="0">
-                <a:latin typeface="Times New Roman" panose="02020603050405020304" pitchFamily="18" charset="0"/>
-                <a:cs typeface="Times New Roman" panose="02020603050405020304" pitchFamily="18" charset="0"/>
-              </a:rPr>
-              <a:t>To securely store logs and system data ensuring data integrity, confidentiality, and easy retrieval for future analysis.</a:t>
-            </a:r>
-          </a:p>
-          <a:p>
-            <a:pPr marL="342900" indent="-342900" algn="just">
-              <a:buFont typeface="Wingdings" panose="05000000000000000000" pitchFamily="2" charset="2"/>
-              <a:buChar char="Ø"/>
-            </a:pPr>
-            <a:r>
-              <a:rPr lang="en-US" sz="2000" dirty="0">
-                <a:latin typeface="Times New Roman" panose="02020603050405020304" pitchFamily="18" charset="0"/>
-                <a:cs typeface="Times New Roman" panose="02020603050405020304" pitchFamily="18" charset="0"/>
-              </a:rPr>
-              <a:t>To analyze equipment data using advanced analytics models to extract meaningful insights and improve maintenance planning.</a:t>
-            </a:r>
+            <a:endParaRPr lang="en-US" sz="2000" dirty="0">
+              <a:latin typeface="Times New Roman" panose="02020603050405020304" pitchFamily="18" charset="0"/>
+              <a:cs typeface="Times New Roman" panose="02020603050405020304" pitchFamily="18" charset="0"/>
+            </a:endParaRPr>
           </a:p>
         </p:txBody>
       </p:sp>
@@ -6828,7 +6887,7 @@
         <p:spPr>
           <a:xfrm>
             <a:off x="265471" y="792624"/>
-            <a:ext cx="11661058" cy="5016758"/>
+            <a:ext cx="11661058" cy="4093428"/>
           </a:xfrm>
           <a:prstGeom prst="rect">
             <a:avLst/>
@@ -6863,7 +6922,7 @@
                 <a:latin typeface="Times New Roman" panose="02020603050405020304" pitchFamily="18" charset="0"/>
                 <a:cs typeface="Times New Roman" panose="02020603050405020304" pitchFamily="18" charset="0"/>
               </a:rPr>
-              <a:t>To track the condition of equipment in real time by continuously monitoring operational parameters such as temperature, vibration, and load.</a:t>
+              <a:t>To continuously monitor equipment condition in real time by tracking parameters such as temperature, vibration, and load for accurate performance assessment. </a:t>
             </a:r>
           </a:p>
           <a:p>
@@ -6871,12 +6930,22 @@
               <a:buFont typeface="Wingdings" panose="05000000000000000000" pitchFamily="2" charset="2"/>
               <a:buChar char="ü"/>
             </a:pPr>
+            <a:endParaRPr lang="en-US" sz="2000" dirty="0">
+              <a:latin typeface="Times New Roman" panose="02020603050405020304" pitchFamily="18" charset="0"/>
+              <a:cs typeface="Times New Roman" panose="02020603050405020304" pitchFamily="18" charset="0"/>
+            </a:endParaRPr>
+          </a:p>
+          <a:p>
+            <a:pPr marL="342900" indent="-342900" algn="just">
+              <a:buFont typeface="Wingdings" panose="05000000000000000000" pitchFamily="2" charset="2"/>
+              <a:buChar char="ü"/>
+            </a:pPr>
             <a:r>
               <a:rPr lang="en-US" sz="2000" dirty="0">
                 <a:latin typeface="Times New Roman" panose="02020603050405020304" pitchFamily="18" charset="0"/>
                 <a:cs typeface="Times New Roman" panose="02020603050405020304" pitchFamily="18" charset="0"/>
               </a:rPr>
-              <a:t>To predict equipment failures before they occur using data-driven models that analyze patterns and detect early warning signs.</a:t>
+              <a:t>To predict potential equipment failures using data-driven and machine learning models that identify patterns and early warning signs. </a:t>
             </a:r>
           </a:p>
           <a:p>
@@ -6884,20 +6953,29 @@
               <a:buFont typeface="Wingdings" panose="05000000000000000000" pitchFamily="2" charset="2"/>
               <a:buChar char="ü"/>
             </a:pPr>
+            <a:endParaRPr lang="en-US" sz="2000" dirty="0">
+              <a:latin typeface="Times New Roman" panose="02020603050405020304" pitchFamily="18" charset="0"/>
+              <a:cs typeface="Times New Roman" panose="02020603050405020304" pitchFamily="18" charset="0"/>
+            </a:endParaRPr>
+          </a:p>
+          <a:p>
+            <a:pPr marL="342900" indent="-342900" algn="just">
+              <a:buFont typeface="Wingdings" panose="05000000000000000000" pitchFamily="2" charset="2"/>
+              <a:buChar char="ü"/>
+            </a:pPr>
             <a:r>
               <a:rPr lang="en-US" sz="2000" dirty="0">
                 <a:latin typeface="Times New Roman" panose="02020603050405020304" pitchFamily="18" charset="0"/>
                 <a:cs typeface="Times New Roman" panose="02020603050405020304" pitchFamily="18" charset="0"/>
               </a:rPr>
-              <a:t>To enable remote monitoring through cloud integration, allowing users to access system data and predictions from any </a:t>
-            </a:r>
-            <a:r>
-              <a:rPr lang="en-US" sz="2000" dirty="0" err="1">
-                <a:latin typeface="Times New Roman" panose="02020603050405020304" pitchFamily="18" charset="0"/>
-                <a:cs typeface="Times New Roman" panose="02020603050405020304" pitchFamily="18" charset="0"/>
-              </a:rPr>
-              <a:t>location.a</a:t>
-            </a:r>
+              <a:t>To enable remote monitoring and real-time accessibility through cloud integration, ensuring scalability and efficient handling of large data and multiple devices. </a:t>
+            </a:r>
+          </a:p>
+          <a:p>
+            <a:pPr marL="342900" indent="-342900" algn="just">
+              <a:buFont typeface="Wingdings" panose="05000000000000000000" pitchFamily="2" charset="2"/>
+              <a:buChar char="ü"/>
+            </a:pPr>
             <a:endParaRPr lang="en-US" sz="2000" dirty="0">
               <a:latin typeface="Times New Roman" panose="02020603050405020304" pitchFamily="18" charset="0"/>
               <a:cs typeface="Times New Roman" panose="02020603050405020304" pitchFamily="18" charset="0"/>
@@ -6913,7 +6991,7 @@
                 <a:latin typeface="Times New Roman" panose="02020603050405020304" pitchFamily="18" charset="0"/>
                 <a:cs typeface="Times New Roman" panose="02020603050405020304" pitchFamily="18" charset="0"/>
               </a:rPr>
-              <a:t>Applicable in manufacturing industries, where continuous machine operation and preventive maintenance are critical for productivity.</a:t>
+              <a:t>To support applications in industries like manufacturing, power plants, and heavy machinery, with IoT integration for smart sensors to improve maintenance efficiency and reduce operational risks. </a:t>
             </a:r>
           </a:p>
           <a:p>
@@ -6921,52 +6999,10 @@
               <a:buFont typeface="Wingdings" panose="05000000000000000000" pitchFamily="2" charset="2"/>
               <a:buChar char="ü"/>
             </a:pPr>
-            <a:r>
-              <a:rPr lang="en-US" sz="2000" dirty="0">
-                <a:latin typeface="Times New Roman" panose="02020603050405020304" pitchFamily="18" charset="0"/>
-                <a:cs typeface="Times New Roman" panose="02020603050405020304" pitchFamily="18" charset="0"/>
-              </a:rPr>
-              <a:t>Can be implemented in power plants and heavy machinery systems to monitor critical assets and reduce operational risks.</a:t>
-            </a:r>
-          </a:p>
-          <a:p>
-            <a:pPr marL="342900" indent="-342900" algn="just">
-              <a:buFont typeface="Wingdings" panose="05000000000000000000" pitchFamily="2" charset="2"/>
-              <a:buChar char="ü"/>
-            </a:pPr>
-            <a:r>
-              <a:rPr lang="en-US" sz="2000" dirty="0">
-                <a:latin typeface="Times New Roman" panose="02020603050405020304" pitchFamily="18" charset="0"/>
-                <a:cs typeface="Times New Roman" panose="02020603050405020304" pitchFamily="18" charset="0"/>
-              </a:rPr>
-              <a:t>Supports cloud deployment for scalability, enabling the system to handle increasing volumes of data and multiple equipment units efficiently.</a:t>
-            </a:r>
-          </a:p>
-          <a:p>
-            <a:pPr marL="342900" indent="-342900" algn="just">
-              <a:buFont typeface="Wingdings" panose="05000000000000000000" pitchFamily="2" charset="2"/>
-              <a:buChar char="ü"/>
-            </a:pPr>
-            <a:r>
-              <a:rPr lang="en-US" sz="2000" dirty="0">
-                <a:latin typeface="Times New Roman" panose="02020603050405020304" pitchFamily="18" charset="0"/>
-                <a:cs typeface="Times New Roman" panose="02020603050405020304" pitchFamily="18" charset="0"/>
-              </a:rPr>
-              <a:t>Enables real-time monitoring from anywhere, improving accessibility and faster decision-making for maintenance teams.</a:t>
-            </a:r>
-          </a:p>
-          <a:p>
-            <a:pPr marL="342900" indent="-342900" algn="just">
-              <a:buFont typeface="Wingdings" panose="05000000000000000000" pitchFamily="2" charset="2"/>
-              <a:buChar char="ü"/>
-            </a:pPr>
-            <a:r>
-              <a:rPr lang="en-US" sz="2000" dirty="0">
-                <a:latin typeface="Times New Roman" panose="02020603050405020304" pitchFamily="18" charset="0"/>
-                <a:cs typeface="Times New Roman" panose="02020603050405020304" pitchFamily="18" charset="0"/>
-              </a:rPr>
-              <a:t>Can be extended with IoT integration, allowing direct connection with smart sensors and industrial devices.</a:t>
-            </a:r>
+            <a:endParaRPr lang="en-US" sz="2000" dirty="0">
+              <a:latin typeface="Times New Roman" panose="02020603050405020304" pitchFamily="18" charset="0"/>
+              <a:cs typeface="Times New Roman" panose="02020603050405020304" pitchFamily="18" charset="0"/>
+            </a:endParaRPr>
           </a:p>
         </p:txBody>
       </p:sp>

--- a/docs/Clg 2nd review.pptx
+++ b/docs/Clg 2nd review.pptx
@@ -210,7 +210,7 @@
           <a:p>
             <a:fld id="{C1BED7E8-5420-4F73-BA32-34A7030FE7D8}" type="datetimeFigureOut">
               <a:rPr lang="en-US" smtClean="0"/>
-              <a:t>4/17/2026</a:t>
+              <a:t>4/18/2026</a:t>
             </a:fld>
             <a:endParaRPr lang="en-US"/>
           </a:p>
@@ -1764,7 +1764,7 @@
           <a:p>
             <a:fld id="{C198EE3F-C531-4F47-81BE-EB7857D8F039}" type="datetimeFigureOut">
               <a:rPr lang="en-US" smtClean="0"/>
-              <a:t>4/17/2026</a:t>
+              <a:t>4/18/2026</a:t>
             </a:fld>
             <a:endParaRPr lang="en-US"/>
           </a:p>
@@ -1962,7 +1962,7 @@
           <a:p>
             <a:fld id="{C198EE3F-C531-4F47-81BE-EB7857D8F039}" type="datetimeFigureOut">
               <a:rPr lang="en-US" smtClean="0"/>
-              <a:t>4/17/2026</a:t>
+              <a:t>4/18/2026</a:t>
             </a:fld>
             <a:endParaRPr lang="en-US"/>
           </a:p>
@@ -2170,7 +2170,7 @@
           <a:p>
             <a:fld id="{C198EE3F-C531-4F47-81BE-EB7857D8F039}" type="datetimeFigureOut">
               <a:rPr lang="en-US" smtClean="0"/>
-              <a:t>4/17/2026</a:t>
+              <a:t>4/18/2026</a:t>
             </a:fld>
             <a:endParaRPr lang="en-US"/>
           </a:p>
@@ -2368,7 +2368,7 @@
           <a:p>
             <a:fld id="{C198EE3F-C531-4F47-81BE-EB7857D8F039}" type="datetimeFigureOut">
               <a:rPr lang="en-US" smtClean="0"/>
-              <a:t>4/17/2026</a:t>
+              <a:t>4/18/2026</a:t>
             </a:fld>
             <a:endParaRPr lang="en-US"/>
           </a:p>
@@ -2643,7 +2643,7 @@
           <a:p>
             <a:fld id="{C198EE3F-C531-4F47-81BE-EB7857D8F039}" type="datetimeFigureOut">
               <a:rPr lang="en-US" smtClean="0"/>
-              <a:t>4/17/2026</a:t>
+              <a:t>4/18/2026</a:t>
             </a:fld>
             <a:endParaRPr lang="en-US"/>
           </a:p>
@@ -2908,7 +2908,7 @@
           <a:p>
             <a:fld id="{C198EE3F-C531-4F47-81BE-EB7857D8F039}" type="datetimeFigureOut">
               <a:rPr lang="en-US" smtClean="0"/>
-              <a:t>4/17/2026</a:t>
+              <a:t>4/18/2026</a:t>
             </a:fld>
             <a:endParaRPr lang="en-US"/>
           </a:p>
@@ -3320,7 +3320,7 @@
           <a:p>
             <a:fld id="{C198EE3F-C531-4F47-81BE-EB7857D8F039}" type="datetimeFigureOut">
               <a:rPr lang="en-US" smtClean="0"/>
-              <a:t>4/17/2026</a:t>
+              <a:t>4/18/2026</a:t>
             </a:fld>
             <a:endParaRPr lang="en-US"/>
           </a:p>
@@ -3461,7 +3461,7 @@
           <a:p>
             <a:fld id="{C198EE3F-C531-4F47-81BE-EB7857D8F039}" type="datetimeFigureOut">
               <a:rPr lang="en-US" smtClean="0"/>
-              <a:t>4/17/2026</a:t>
+              <a:t>4/18/2026</a:t>
             </a:fld>
             <a:endParaRPr lang="en-US"/>
           </a:p>
@@ -3574,7 +3574,7 @@
           <a:p>
             <a:fld id="{C198EE3F-C531-4F47-81BE-EB7857D8F039}" type="datetimeFigureOut">
               <a:rPr lang="en-US" smtClean="0"/>
-              <a:t>4/17/2026</a:t>
+              <a:t>4/18/2026</a:t>
             </a:fld>
             <a:endParaRPr lang="en-US"/>
           </a:p>
@@ -3885,7 +3885,7 @@
           <a:p>
             <a:fld id="{C198EE3F-C531-4F47-81BE-EB7857D8F039}" type="datetimeFigureOut">
               <a:rPr lang="en-US" smtClean="0"/>
-              <a:t>4/17/2026</a:t>
+              <a:t>4/18/2026</a:t>
             </a:fld>
             <a:endParaRPr lang="en-US"/>
           </a:p>
@@ -4173,7 +4173,7 @@
           <a:p>
             <a:fld id="{C198EE3F-C531-4F47-81BE-EB7857D8F039}" type="datetimeFigureOut">
               <a:rPr lang="en-US" smtClean="0"/>
-              <a:t>4/17/2026</a:t>
+              <a:t>4/18/2026</a:t>
             </a:fld>
             <a:endParaRPr lang="en-US"/>
           </a:p>
@@ -4414,7 +4414,7 @@
           <a:p>
             <a:fld id="{C198EE3F-C531-4F47-81BE-EB7857D8F039}" type="datetimeFigureOut">
               <a:rPr lang="en-US" smtClean="0"/>
-              <a:t>4/17/2026</a:t>
+              <a:t>4/18/2026</a:t>
             </a:fld>
             <a:endParaRPr lang="en-US"/>
           </a:p>
@@ -5027,21 +5027,35 @@
                 <a:latin typeface="Times New Roman" panose="02020603050405020304" pitchFamily="18" charset="0"/>
                 <a:cs typeface="Times New Roman" panose="02020603050405020304" pitchFamily="18" charset="0"/>
               </a:rPr>
-              <a:t>Date:- 11</a:t>
-            </a:r>
-            <a:r>
-              <a:rPr lang="en-US" sz="2600" baseline="30000" dirty="0">
+              <a:t>Date</a:t>
+            </a:r>
+            <a:r>
+              <a:rPr lang="en-US" sz="2600">
+                <a:latin typeface="Times New Roman" panose="02020603050405020304" pitchFamily="18" charset="0"/>
+                <a:cs typeface="Times New Roman" panose="02020603050405020304" pitchFamily="18" charset="0"/>
+              </a:rPr>
+              <a:t>:- 18</a:t>
+            </a:r>
+            <a:r>
+              <a:rPr lang="en-US" sz="2600" baseline="30000">
                 <a:latin typeface="Times New Roman" panose="02020603050405020304" pitchFamily="18" charset="0"/>
                 <a:cs typeface="Times New Roman" panose="02020603050405020304" pitchFamily="18" charset="0"/>
               </a:rPr>
               <a:t>th</a:t>
             </a:r>
             <a:r>
+              <a:rPr lang="en-US" sz="2600">
+                <a:latin typeface="Times New Roman" panose="02020603050405020304" pitchFamily="18" charset="0"/>
+                <a:cs typeface="Times New Roman" panose="02020603050405020304" pitchFamily="18" charset="0"/>
+              </a:rPr>
+              <a:t> </a:t>
+            </a:r>
+            <a:r>
               <a:rPr lang="en-US" sz="2600" dirty="0">
                 <a:latin typeface="Times New Roman" panose="02020603050405020304" pitchFamily="18" charset="0"/>
                 <a:cs typeface="Times New Roman" panose="02020603050405020304" pitchFamily="18" charset="0"/>
               </a:rPr>
-              <a:t> April 2026</a:t>
+              <a:t>April 2026</a:t>
             </a:r>
           </a:p>
           <a:p>
